--- a/01-slides/W01-Introduction-Systems-Analysts-and-OOAD.pptx
+++ b/01-slides/W01-Introduction-Systems-Analysts-and-OOAD.pptx
@@ -581,7 +581,7 @@
   <p:cSld>
     <p:spTree>
       <p:nvGrpSpPr>
-        <p:cNvPr id="1" name="" descr="&lt;Slide style={{ background: '#0E3F8C', padding: 0 }}&gt;&#10;  &lt;Box style={{ flexDirection: 'column', height: '100%', justifyContent: 'center', padding: '0 80px', position: 'relative' }}&gt;&#10;    &lt;Box style={{ position: 'absolute', top: 0, left: 0, right: 0, height: 8, background: '#1E4FA8' }} /&gt;&#10;    &lt;Box style={{ position: 'absolute', top: 8, left: 0, right: 0, height: 2, background: '#3D7BD9' }} /&gt;&#10;    &lt;Box style={{ flexDirection: 'row', alignItems: 'center', gap: 14, marginBottom: 30 }}&gt;&#10;      &lt;Box style={{ padding: '7px 18px', background: '#3D7BD9', borderRadius: 18 }}&gt;&#10;        &lt;Text style={{ fontSize: 16, color: '#FFFFFF', fontWeight: 'bold', letterSpacing: 2 }}&gt;ISAD · WEEK 01&lt;/Text&gt;&#10;      &lt;/Box&gt;&#10;      &lt;Box style={{ width: 56, height: 1, background: '#5B84C4' }} /&gt;&#10;      &lt;Text style={{ fontSize: 16, color: '#7FA2D6', letterSpacing: 1 }}&gt;MODULE A · FOUNDATIONS&lt;/Text&gt;&#10;    &lt;/Box&gt;&#10;    &lt;Text style={{ fontSize: 58, fontWeight: 'bold', color: '#FFFFFF', fontFamily: 'Georgia, serif', lineHeight: 1.12 }}&gt;&#10;      Information Systems&#10;      &lt;br /&gt;&#10;      Analysis &amp;amp; Design&#10;    &lt;/Text&gt;&#10;    &lt;Box style={{ width: 88, height: 5, background: '#FFC107', marginTop: 28, marginBottom: 22 }} /&gt;&#10;    &lt;Text style={{ fontSize: 26, color: '#B9CDF0', lineHeight: 1.45 }}&gt;&#10;      Systems, Analysts &amp;amp; the OOAD Roadmap&#10;    &lt;/Text&gt;&#10;    &lt;Box style={{ position: 'absolute', bottom: 46, left: 80, right: 80, flexDirection: 'row', justifyContent: 'space-between', alignItems: 'center', borderTop: '1px solid #2B5793', paddingTop: 18 }}&gt;&#10;      &lt;Text style={{ fontSize: 17, color: '#C5D4EA' }}&gt;Ren Zheng · School of Software Engineering&lt;/Text&gt;&#10;      &lt;Text style={{ fontSize: 17, color: '#C5D4EA' }}&gt;Fall 2026&lt;/Text&gt;&#10;    &lt;/Box&gt;&#10;  &lt;/Box&gt;&#10;&lt;/Slide&gt;"/>
+        <p:cNvPr id="1" name=""/>
         <p:cNvGrpSpPr/>
         <p:nvPr/>
       </p:nvGrpSpPr>
@@ -614,7 +614,10 @@
         </p:spPr>
         <p:txBody>
           <a:bodyPr/>
-          <a:p/>
+          <a:p>
+            <a:pPr/>
+            <a:endParaRPr/>
+          </a:p>
         </p:txBody>
       </p:sp>
       <p:sp>
@@ -640,7 +643,10 @@
         </p:spPr>
         <p:txBody>
           <a:bodyPr/>
-          <a:p/>
+          <a:p>
+            <a:pPr/>
+            <a:endParaRPr/>
+          </a:p>
         </p:txBody>
       </p:sp>
       <p:sp>
@@ -699,7 +705,10 @@
         </p:spPr>
         <p:txBody>
           <a:bodyPr/>
-          <a:p/>
+          <a:p>
+            <a:pPr/>
+            <a:endParaRPr/>
+          </a:p>
         </p:txBody>
       </p:sp>
       <p:sp>
@@ -811,7 +820,10 @@
         </p:spPr>
         <p:txBody>
           <a:bodyPr/>
-          <a:p/>
+          <a:p>
+            <a:pPr/>
+            <a:endParaRPr/>
+          </a:p>
         </p:txBody>
       </p:sp>
       <p:sp>
@@ -870,7 +882,10 @@
         </p:spPr>
         <p:txBody>
           <a:bodyPr/>
-          <a:p/>
+          <a:p>
+            <a:pPr/>
+            <a:endParaRPr/>
+          </a:p>
         </p:txBody>
       </p:sp>
       <p:sp>
@@ -894,7 +909,10 @@
         </p:spPr>
         <p:txBody>
           <a:bodyPr/>
-          <a:p/>
+          <a:p>
+            <a:pPr/>
+            <a:endParaRPr/>
+          </a:p>
         </p:txBody>
       </p:sp>
       <p:sp>
@@ -934,7 +952,10 @@
         </p:spPr>
         <p:txBody>
           <a:bodyPr/>
-          <a:p/>
+          <a:p>
+            <a:pPr/>
+            <a:endParaRPr/>
+          </a:p>
         </p:txBody>
       </p:sp>
       <p:sp>
@@ -1017,7 +1038,7 @@
   <p:cSld>
     <p:spTree>
       <p:nvGrpSpPr>
-        <p:cNvPr id="15" name="" descr="&lt;Slide style={{ background: '#FFFFFF', padding: 0 }}&gt;&#10;  &lt;Box style={{ padding: '26px 40px 8px 40px', flexDirection: 'row', alignItems: 'center', justifyContent: 'space-between' }}&gt;&#10;    &lt;Text style={{ fontSize: 34, fontWeight: 'bold', color: '#0E3F8C' }}&gt;Four Elements That Must Work Together&lt;/Text&gt;&#10;    &lt;Text style={{ fontSize: 14, color: '#1E4FA8', fontWeight: 'bold' }}&gt;10 / 38&lt;/Text&gt;&#10;  &lt;/Box&gt;&#10;  &lt;Box style={{ flex: 1, padding: '8px 40px 0 40px', justifyContent: 'center', alignItems: 'center' }}&gt;&#10;    &lt;svg width={1180} height={440} viewBox='0 0 1180 440'&gt;&#10;      &lt;rect x='40' y='30' width='340' height='170' rx='16' fill='#E8EFF8' stroke='#3D7BD9' strokeWidth='2' /&gt;&#10;      &lt;text x='210' y='82' textAnchor='middle' fill='#0E3F8C' fontSize='30' fontWeight='bold'&gt;People&lt;/text&gt;&#10;      &lt;text x='210' y='120' textAnchor='middle' fill='#4A5568' fontSize='18'&gt;who use and run the system&lt;/text&gt;&#10;      &lt;text x='210' y='152' textAnchor='middle' fill='#8B97A8' fontSize='16'&gt;customers, staff, couriers&lt;/text&gt;&#10;      &lt;rect x='800' y='30' width='340' height='170' rx='16' fill='#E8EFF8' stroke='#3D7BD9' strokeWidth='2' /&gt;&#10;      &lt;text x='970' y='82' textAnchor='middle' fill='#0E3F8C' fontSize='30' fontWeight='bold'&gt;Process&lt;/text&gt;&#10;      &lt;text x='970' y='120' textAnchor='middle' fill='#4A5568' fontSize='18'&gt;the flow of activities&lt;/text&gt;&#10;      &lt;text x='970' y='152' textAnchor='middle' fill='#8B97A8' fontSize='16'&gt;order → cook → deliver&lt;/text&gt;&#10;      &lt;rect x='40' y='240' width='340' height='170' rx='16' fill='#E8EFF8' stroke='#3D7BD9' strokeWidth='2' /&gt;&#10;      &lt;text x='210' y='292' textAnchor='middle' fill='#0E3F8C' fontSize='30' fontWeight='bold'&gt;Data&lt;/text&gt;&#10;      &lt;text x='210' y='330' textAnchor='middle' fill='#4A5568' fontSize='18'&gt;facts and records&lt;/text&gt;&#10;      &lt;text x='210' y='362' textAnchor='middle' fill='#8B97A8' fontSize='16'&gt;orders, menus, payments&lt;/text&gt;&#10;      &lt;rect x='800' y='240' width='340' height='170' rx='16' fill='#E8EFF8' stroke='#3D7BD9' strokeWidth='2' /&gt;&#10;      &lt;text x='970' y='292' textAnchor='middle' fill='#0E3F8C' fontSize='30' fontWeight='bold'&gt;Technology&lt;/text&gt;&#10;      &lt;text x='970' y='330' textAnchor='middle' fill='#4A5568' fontSize='18'&gt;hardware and software&lt;/text&gt;&#10;      &lt;text x='970' y='362' textAnchor='middle' fill='#8B97A8' fontSize='16'&gt;app, server, card reader&lt;/text&gt;&#10;      &lt;circle cx='590' cy='220' r='92' fill='#0E3F8C' /&gt;&#10;      &lt;text x='590' y='210' textAnchor='middle' fill='#FFFFFF' fontSize='26' fontWeight='bold'&gt;Information&lt;/text&gt;&#10;      &lt;text x='590' y='246' textAnchor='middle' fill='#FFC107' fontSize='24' fontWeight='bold'&gt;System&lt;/text&gt;&#10;    &lt;/svg&gt;&#10;  &lt;/Box&gt;&#10;  &lt;Box style={{ height: 56, background: '#0E3F8C', padding: '0 40px', flexDirection: 'row', alignItems: 'center', justifyContent: 'center' }}&gt;&#10;    &lt;Text style={{ fontSize: 18, color: '#FFFFFF', fontWeight: '600' }}&gt;Remove any one element, and the system stops making sense.&lt;/Text&gt;&#10;  &lt;/Box&gt;&#10;&lt;/Slide&gt;"/>
+        <p:cNvPr id="15" name=""/>
         <p:cNvGrpSpPr/>
         <p:nvPr/>
       </p:nvGrpSpPr>
@@ -1050,7 +1071,10 @@
         </p:spPr>
         <p:txBody>
           <a:bodyPr/>
-          <a:p/>
+          <a:p>
+            <a:pPr/>
+            <a:endParaRPr/>
+          </a:p>
         </p:txBody>
       </p:sp>
       <p:sp>
@@ -1175,7 +1199,10 @@
         </p:spPr>
         <p:txBody>
           <a:bodyPr/>
-          <a:p/>
+          <a:p>
+            <a:pPr/>
+            <a:endParaRPr/>
+          </a:p>
         </p:txBody>
       </p:sp>
       <p:sp>
@@ -1223,7 +1250,7 @@
   <p:cSld>
     <p:spTree>
       <p:nvGrpSpPr>
-        <p:cNvPr id="22" name="" descr="&lt;Slide style={{ background: '#FFFFFF', padding: 0 }}&gt;&#10;  &lt;Box style={{ height: 72, background: '#1E4FA8', padding: '0 40px', flexDirection: 'row', alignItems: 'center', justifyContent: 'space-between' }}&gt;&#10;    &lt;Text style={{ fontSize: 15, color: '#B9CDF0', letterSpacing: 1 }}&gt;ISAD · INFORMATION SYSTEMS ANALYSIS &amp;amp; DESIGN&lt;/Text&gt;&#10;    &lt;Text style={{ fontSize: 15, color: '#B9CDF0' }}&gt;W01 · INTRODUCTION&lt;/Text&gt;&#10;  &lt;/Box&gt;&#10;  &lt;Box style={{ padding: '24px 40px 0 40px' }}&gt;&#10;    &lt;Text style={{ fontSize: 34, fontWeight: 'bold', color: '#0E3F8C' }}&gt;Information Systems Around Us&lt;/Text&gt;&#10;  &lt;/Box&gt;&#10;  &lt;Box style={{ flex: 1, padding: '20px 40px 0 40px', flexDirection: 'row', gap: 24 }}&gt;&#10;    {[&#10;      { icon: 'book', t: 'Library System', d: 'People: readers &amp; librarians · Process: borrow / return · Data: catalogue, loans · Tech: kiosk, database' },&#10;      { icon: 'shopping-cart', t: 'Food Delivery', d: 'People: customers, riders · Process: order → cook → deliver · Data: menu, orders · Tech: app, GPS' },&#10;      { icon: 'hospital', t: 'Hospital Registration', d: 'People: patients, staff · Process: register → triage → treat · Data: records, queue · Tech: terminals, HIS' },&#10;    ].map((c) =&gt; (&#10;      &lt;Box key={c.t} style={{ flex: 1, padding: '26px 24px', background: '#F7F9FC', borderRadius: 12, border: '1px solid #E5E7EB', flexDirection: 'column', gap: 14 }}&gt;&#10;        &lt;Box style={{ width: 56, height: 56, borderRadius: 12, background: '#E8EFF8', justifyContent: 'center', alignItems: 'center' }}&gt;&#10;          &lt;FAIcon name={c.icon} style={{ fill: '#1E4FA8', width: 28, height: 28 }} /&gt;&#10;        &lt;/Box&gt;&#10;        &lt;Text style={{ fontSize: 23, fontWeight: 'bold', color: '#0E3F8C' }}&gt;{c.t}&lt;/Text&gt;&#10;        &lt;Text style={{ fontSize: 15, color: '#4A5568', lineHeight: 1.6 }}&gt;{c.d}&lt;/Text&gt;&#10;      &lt;/Box&gt;&#10;    ))}&#10;  &lt;/Box&gt;&#10;  &lt;Box style={{ height: 40, padding: '0 40px', flexDirection: 'row', alignItems: 'center', justifyContent: 'space-between' }}&gt;&#10;    &lt;Text style={{ fontSize: 13, color: '#8B97A8' }}&gt;Every example has all four elements — people, process, data, technology.&lt;/Text&gt;&#10;    &lt;Text style={{ fontSize: 14, color: '#1E4FA8', fontWeight: 'bold' }}&gt;11 / 38&lt;/Text&gt;&#10;  &lt;/Box&gt;&#10;&lt;/Slide&gt;"/>
+        <p:cNvPr id="22" name=""/>
         <p:cNvGrpSpPr/>
         <p:nvPr/>
       </p:nvGrpSpPr>
@@ -1256,7 +1283,10 @@
         </p:spPr>
         <p:txBody>
           <a:bodyPr/>
-          <a:p/>
+          <a:p>
+            <a:pPr/>
+            <a:endParaRPr/>
+          </a:p>
         </p:txBody>
       </p:sp>
       <p:sp>
@@ -1280,7 +1310,10 @@
         </p:spPr>
         <p:txBody>
           <a:bodyPr/>
-          <a:p/>
+          <a:p>
+            <a:pPr/>
+            <a:endParaRPr/>
+          </a:p>
         </p:txBody>
       </p:sp>
       <p:sp>
@@ -1416,7 +1449,10 @@
         </p:spPr>
         <p:txBody>
           <a:bodyPr/>
-          <a:p/>
+          <a:p>
+            <a:pPr/>
+            <a:endParaRPr/>
+          </a:p>
         </p:txBody>
       </p:sp>
       <p:sp>
@@ -1442,7 +1478,10 @@
         </p:spPr>
         <p:txBody>
           <a:bodyPr/>
-          <a:p/>
+          <a:p>
+            <a:pPr/>
+            <a:endParaRPr/>
+          </a:p>
         </p:txBody>
       </p:sp>
       <p:pic>
@@ -1576,7 +1615,10 @@
         </p:spPr>
         <p:txBody>
           <a:bodyPr/>
-          <a:p/>
+          <a:p>
+            <a:pPr/>
+            <a:endParaRPr/>
+          </a:p>
         </p:txBody>
       </p:sp>
       <p:sp>
@@ -1602,7 +1644,10 @@
         </p:spPr>
         <p:txBody>
           <a:bodyPr/>
-          <a:p/>
+          <a:p>
+            <a:pPr/>
+            <a:endParaRPr/>
+          </a:p>
         </p:txBody>
       </p:sp>
       <p:pic>
@@ -1736,7 +1781,10 @@
         </p:spPr>
         <p:txBody>
           <a:bodyPr/>
-          <a:p/>
+          <a:p>
+            <a:pPr/>
+            <a:endParaRPr/>
+          </a:p>
         </p:txBody>
       </p:sp>
       <p:sp>
@@ -1762,7 +1810,10 @@
         </p:spPr>
         <p:txBody>
           <a:bodyPr/>
-          <a:p/>
+          <a:p>
+            <a:pPr/>
+            <a:endParaRPr/>
+          </a:p>
         </p:txBody>
       </p:sp>
       <p:pic>
@@ -1948,7 +1999,7 @@
   <p:cSld>
     <p:spTree>
       <p:nvGrpSpPr>
-        <p:cNvPr id="45" name="" descr="&lt;Slide style={{ background: '#FFFFFF', padding: 0 }}&gt;&#10;  &lt;Box style={{ height: 72, background: '#1E4FA8', padding: '0 40px', flexDirection: 'row', alignItems: 'center', justifyContent: 'space-between' }}&gt;&#10;    &lt;Text style={{ fontSize: 15, color: '#B9CDF0', letterSpacing: 1 }}&gt;ISAD · INFORMATION SYSTEMS ANALYSIS &amp;amp; DESIGN&lt;/Text&gt;&#10;    &lt;Text style={{ fontSize: 15, color: '#B9CDF0' }}&gt;W01 · INTRODUCTION&lt;/Text&gt;&#10;  &lt;/Box&gt;&#10;  &lt;Box style={{ padding: '24px 40px 0 40px' }}&gt;&#10;    &lt;Text style={{ fontSize: 34, fontWeight: 'bold', color: '#0E3F8C' }}&gt;Why Information Systems Fail&lt;/Text&gt;&#10;  &lt;/Box&gt;&#10;  &lt;Box style={{ flex: 1, padding: '18px 40px 0 40px', flexDirection: 'row', gap: 28 }}&gt;&#10;    &lt;Box style={{ flex: 3, padding: '20px 24px', background: '#F7F9FC', borderRadius: 12, border: '1px solid #E5E7EB', flexDirection: 'column', gap: 14, justifyContent: 'center' }}&gt;&#10;      {[&#10;        ['Technology-first thinking', 'Building before understanding what people actually need.'],&#10;        ['Misread requirements', 'The team builds the wrong system — perfectly.'],&#10;        ['Broken communication', 'Business people and developers speak different languages.'],&#10;        ['Scope without control', 'The system keeps growing until it collapses under its own weight.'],&#10;      ].map(([t, d]) =&gt; (&#10;        &lt;Box key={t} style={{ flexDirection: 'row', gap: 14, alignItems: 'flex-start' }}&gt;&#10;          &lt;Box style={{ width: 26, height: 26, borderRadius: 6, background: '#D9534F', justifyContent: 'center', alignItems: 'center' }}&gt;&#10;            &lt;FAIcon name='times' style={{ fill: '#FFFFFF', width: 14, height: 14 }} /&gt;&#10;          &lt;/Box&gt;&#10;          &lt;Box style={{ flexDirection: 'column', gap: 3 }}&gt;&#10;            &lt;Text style={{ fontSize: 18, fontWeight: 'bold', color: '#1A2230' }}&gt;{t}&lt;/Text&gt;&#10;            &lt;Text style={{ fontSize: 15, color: '#4A5568', lineHeight: 1.5 }}&gt;{d}&lt;/Text&gt;&#10;          &lt;/Box&gt;&#10;        &lt;/Box&gt;&#10;      ))}&#10;    &lt;/Box&gt;&#10;    &lt;Box style={{ flex: 2, padding: '28px 24px', background: '#0E3F8C', borderRadius: 12, flexDirection: 'column', justifyContent: 'center', gap: 14 }}&gt;&#10;      &lt;FAIcon name='exclamation-circle' style={{ fill: '#FFC107', width: 40, height: 40 }} /&gt;&#10;      &lt;Text style={{ fontSize: 24, fontWeight: 'bold', color: '#FFFFFF', lineHeight: 1.3 }}&gt;Most failures happen before a single line of code.&lt;/Text&gt;&#10;      &lt;Text style={{ fontSize: 17, color: '#C5D4EA', lineHeight: 1.55 }}&gt;They happen in the space where needs are understood and turned into models. That space belongs to the &lt;span style={{ fontWeight: 'bold', color: '#FFFFFF' }}&gt;systems analyst&lt;/span&gt;.&lt;/Text&gt;&#10;    &lt;/Box&gt;&#10;  &lt;/Box&gt;&#10;  &lt;Box style={{ height: 40, padding: '0 40px', flexDirection: 'row', alignItems: 'center', justifyContent: 'space-between' }}&gt;&#10;    &lt;Text style={{ fontSize: 13, color: '#8B97A8' }}&gt;ISAD · Fall 2026&lt;/Text&gt;&#10;    &lt;Text style={{ fontSize: 14, color: '#1E4FA8', fontWeight: 'bold' }}&gt;12 / 38&lt;/Text&gt;&#10;  &lt;/Box&gt;&#10;&lt;/Slide&gt;"/>
+        <p:cNvPr id="45" name=""/>
         <p:cNvGrpSpPr/>
         <p:nvPr/>
       </p:nvGrpSpPr>
@@ -1981,7 +2032,10 @@
         </p:spPr>
         <p:txBody>
           <a:bodyPr/>
-          <a:p/>
+          <a:p>
+            <a:pPr/>
+            <a:endParaRPr/>
+          </a:p>
         </p:txBody>
       </p:sp>
       <p:sp>
@@ -2005,7 +2059,10 @@
         </p:spPr>
         <p:txBody>
           <a:bodyPr/>
-          <a:p/>
+          <a:p>
+            <a:pPr/>
+            <a:endParaRPr/>
+          </a:p>
         </p:txBody>
       </p:sp>
       <p:sp>
@@ -2141,7 +2198,10 @@
         </p:spPr>
         <p:txBody>
           <a:bodyPr/>
-          <a:p/>
+          <a:p>
+            <a:pPr/>
+            <a:endParaRPr/>
+          </a:p>
         </p:txBody>
       </p:sp>
       <p:sp>
@@ -2167,7 +2227,10 @@
         </p:spPr>
         <p:txBody>
           <a:bodyPr/>
-          <a:p/>
+          <a:p>
+            <a:pPr/>
+            <a:endParaRPr/>
+          </a:p>
         </p:txBody>
       </p:sp>
       <p:pic>
@@ -2294,7 +2357,10 @@
         </p:spPr>
         <p:txBody>
           <a:bodyPr/>
-          <a:p/>
+          <a:p>
+            <a:pPr/>
+            <a:endParaRPr/>
+          </a:p>
         </p:txBody>
       </p:sp>
       <p:pic>
@@ -2421,7 +2487,10 @@
         </p:spPr>
         <p:txBody>
           <a:bodyPr/>
-          <a:p/>
+          <a:p>
+            <a:pPr/>
+            <a:endParaRPr/>
+          </a:p>
         </p:txBody>
       </p:sp>
       <p:pic>
@@ -2548,7 +2617,10 @@
         </p:spPr>
         <p:txBody>
           <a:bodyPr/>
-          <a:p/>
+          <a:p>
+            <a:pPr/>
+            <a:endParaRPr/>
+          </a:p>
         </p:txBody>
       </p:sp>
       <p:pic>
@@ -2675,7 +2747,10 @@
         </p:spPr>
         <p:txBody>
           <a:bodyPr/>
-          <a:p/>
+          <a:p>
+            <a:pPr/>
+            <a:endParaRPr/>
+          </a:p>
         </p:txBody>
       </p:sp>
       <p:pic>
@@ -2883,7 +2958,7 @@
   <p:cSld>
     <p:spTree>
       <p:nvGrpSpPr>
-        <p:cNvPr id="74" name="" descr="&lt;Slide style={{ background: '#0E3F8C', padding: 0 }}&gt;&#10;  &lt;Box style={{ flexDirection: 'row', height: '100%', position: 'relative' }}&gt;&#10;    &lt;Box style={{ position: 'absolute', top: 0, left: 0, right: 0, height: 8, background: '#1E4FA8' }} /&gt;&#10;    &lt;Box style={{ width: 300, justifyContent: 'center', alignItems: 'center', borderRight: '1px solid #2B5793' }}&gt;&#10;      &lt;Text style={{ fontSize: 220, fontWeight: 'bold', color: '#3D7BD9', fontFamily: 'Georgia, serif', lineHeight: 1 }}&gt;03&lt;/Text&gt;&#10;    &lt;/Box&gt;&#10;    &lt;Box style={{ flex: 1, padding: '70px 64px', flexDirection: 'column', justifyContent: 'center' }}&gt;&#10;      &lt;Text style={{ fontSize: 15, color: '#7FA2D6', letterSpacing: 2, marginBottom: 18 }}&gt;PART 1 · LECTURE&lt;/Text&gt;&#10;      &lt;Text style={{ fontSize: 48, fontWeight: 'bold', color: '#FFFFFF', lineHeight: 1.18 }}&gt;The Systems Analyst&lt;/Text&gt;&#10;      &lt;Box style={{ width: 64, height: 4, background: '#FFC107', marginTop: 26, marginBottom: 26 }} /&gt;&#10;      &lt;Box style={{ flexDirection: 'column', gap: 12 }}&gt;&#10;        {[&#10;          'A bridge between business and technology',&#10;          'What analysts actually do day to day',&#10;          'The three-part skill profile',&#10;        ].map((t) =&gt; (&#10;          &lt;Box key={t} style={{ flexDirection: 'row', alignItems: 'center', gap: 12 }}&gt;&#10;            &lt;Box style={{ width: 8, height: 8, borderRadius: 4, background: '#3D7BD9' }} /&gt;&#10;            &lt;Text style={{ fontSize: 20, color: '#C5D4EA' }}&gt;{t}&lt;/Text&gt;&#10;          &lt;/Box&gt;&#10;        ))}&#10;      &lt;/Box&gt;&#10;    &lt;/Box&gt;&#10;  &lt;/Box&gt;&#10;&lt;/Slide&gt;"/>
+        <p:cNvPr id="74" name=""/>
         <p:cNvGrpSpPr/>
         <p:nvPr/>
       </p:nvGrpSpPr>
@@ -2916,7 +2991,10 @@
         </p:spPr>
         <p:txBody>
           <a:bodyPr/>
-          <a:p/>
+          <a:p>
+            <a:pPr/>
+            <a:endParaRPr/>
+          </a:p>
         </p:txBody>
       </p:sp>
       <p:sp>
@@ -2956,7 +3034,10 @@
         </p:spPr>
         <p:txBody>
           <a:bodyPr/>
-          <a:p/>
+          <a:p>
+            <a:pPr/>
+            <a:endParaRPr/>
+          </a:p>
         </p:txBody>
       </p:sp>
       <p:sp>
@@ -3085,7 +3166,10 @@
         </p:spPr>
         <p:txBody>
           <a:bodyPr/>
-          <a:p/>
+          <a:p>
+            <a:pPr/>
+            <a:endParaRPr/>
+          </a:p>
         </p:txBody>
       </p:sp>
       <p:sp>
@@ -3111,7 +3195,10 @@
         </p:spPr>
         <p:txBody>
           <a:bodyPr/>
-          <a:p/>
+          <a:p>
+            <a:pPr/>
+            <a:endParaRPr/>
+          </a:p>
         </p:txBody>
       </p:sp>
       <p:sp>
@@ -3172,7 +3259,10 @@
         </p:spPr>
         <p:txBody>
           <a:bodyPr/>
-          <a:p/>
+          <a:p>
+            <a:pPr/>
+            <a:endParaRPr/>
+          </a:p>
         </p:txBody>
       </p:sp>
       <p:sp>
@@ -3233,7 +3323,10 @@
         </p:spPr>
         <p:txBody>
           <a:bodyPr/>
-          <a:p/>
+          <a:p>
+            <a:pPr/>
+            <a:endParaRPr/>
+          </a:p>
         </p:txBody>
       </p:sp>
       <p:sp>
@@ -3292,7 +3385,10 @@
         </p:spPr>
         <p:txBody>
           <a:bodyPr/>
-          <a:p/>
+          <a:p>
+            <a:pPr/>
+            <a:endParaRPr/>
+          </a:p>
         </p:txBody>
       </p:sp>
     </p:spTree>
@@ -3305,7 +3401,7 @@
   <p:cSld>
     <p:spTree>
       <p:nvGrpSpPr>
-        <p:cNvPr id="88" name="" descr="&lt;Slide style={{ background: '#FFFFFF', padding: 0 }}&gt;&#10;  &lt;Box style={{ height: 72, background: '#1E4FA8', padding: '0 40px', flexDirection: 'row', alignItems: 'center', justifyContent: 'space-between' }}&gt;&#10;    &lt;Text style={{ fontSize: 15, color: '#B9CDF0', letterSpacing: 1 }}&gt;ISAD · INFORMATION SYSTEMS ANALYSIS &amp;amp; DESIGN&lt;/Text&gt;&#10;    &lt;Text style={{ fontSize: 15, color: '#B9CDF0' }}&gt;W01 · INTRODUCTION&lt;/Text&gt;&#10;  &lt;/Box&gt;&#10;  &lt;Box style={{ padding: '24px 40px 0 40px' }}&gt;&#10;    &lt;Text style={{ fontSize: 34, fontWeight: 'bold', color: '#0E3F8C' }}&gt;The Analyst as a Bridge&lt;/Text&gt;&#10;  &lt;/Box&gt;&#10;  &lt;Box style={{ flex: 1, padding: '18px 40px 0 40px', flexDirection: 'row', gap: 28 }}&gt;&#10;    &lt;Box style={{ flex: 3, justifyContent: 'center', alignItems: 'center' }}&gt;&#10;      &lt;svg width={560} height={380} viewBox='0 0 560 380'&gt;&#10;        &lt;rect x='20' y='30' width='180' height='320' rx='16' fill='#E8EFF8' stroke='#3D7BD9' strokeWidth='2' /&gt;&#10;        &lt;text x='110' y='80' textAnchor='middle' fill='#0E3F8C' fontSize='26' fontWeight='bold'&gt;Business&lt;/text&gt;&#10;        &lt;text x='110' y='116' textAnchor='middle' fill='#4A5568' fontSize='16'&gt;goals, needs,&lt;/text&gt;&#10;        &lt;text x='110' y='142' textAnchor='middle' fill='#4A5568' fontSize='16'&gt;domain knowledge&lt;/text&gt;&#10;        &lt;text x='110' y='210' textAnchor='middle' fill='#8B97A8' fontSize='15'&gt;“We want faster&lt;/text&gt;&#10;        &lt;text x='110' y='232' textAnchor='middle' fill='#8B97A8' fontSize='15'&gt;order tracking.”&lt;/text&gt;&#10;        &lt;rect x='360' y='30' width='180' height='320' rx='16' fill='#E8EFF8' stroke='#3D7BD9' strokeWidth='2' /&gt;&#10;        &lt;text x='450' y='80' textAnchor='middle' fill='#0E3F8C' fontSize='26' fontWeight='bold'&gt;Technology&lt;/text&gt;&#10;        &lt;text x='450' y='116' textAnchor='middle' fill='#4A5568' fontSize='16'&gt;code, systems,&lt;/text&gt;&#10;        &lt;text x='450' y='142' textAnchor='middle' fill='#4A5568' fontSize='16'&gt;architecture&lt;/text&gt;&#10;        &lt;text x='450' y='210' textAnchor='middle' fill='#8B97A8' fontSize='15'&gt;“Use Observer&lt;/text&gt;&#10;        &lt;text x='450' y='232' textAnchor='middle' fill='#8B97A8' fontSize='15'&gt;for updates.”&lt;/text&gt;&#10;        &lt;rect x='228' y='140' width='104' height='100' rx='14' fill='#1E4FA8' /&gt;&#10;        &lt;text x='280' y='182' textAnchor='middle' fill='#FFFFFF' fontSize='20' fontWeight='bold'&gt;Analyst&lt;/text&gt;&#10;        &lt;text x='280' y='208' textAnchor='middle' fill='#B9CDF0' fontSize='14'&gt;translator&lt;/text&gt;&#10;        &lt;line x1='200' y1='170' x2='228' y2='178' stroke='#3D7BD9' strokeWidth='3' /&gt;&#10;        &lt;line x1='332' y1='178' x2='360' y2='170' stroke='#3D7BD9' strokeWidth='3' /&gt;&#10;        &lt;line x1='200' y1='210' x2='228' y2='202' stroke='#3D7BD9' strokeWidth='3' /&gt;&#10;        &lt;line x1='332' y1='202' x2='360' y2='210' stroke='#3D7BD9' strokeWidth='3' /&gt;&#10;      &lt;/svg&gt;&#10;    &lt;/Box&gt;&#10;    &lt;Box style={{ flex: 2, flexDirection: 'column', gap: 16, justifyContent: 'center' }}&gt;&#10;      &lt;Text style={{ fontSize: 20, color: '#4A5568', lineHeight: 1.55 }}&gt;The analyst turns vague business needs into precise models that developers can build from.&lt;/Text&gt;&#10;      &lt;Box style={{ padding: '16px 18px', background: '#F7F9FC', borderRadius: 10, border: '1px solid #E5E7EB', flexDirection: 'column', gap: 6 }}&gt;&#10;        &lt;Text style={{ fontSize: 16, fontWeight: 'bold', color: '#0E3F8C' }}&gt;Translation in both directions&lt;/Text&gt;&#10;        &lt;Text style={{ fontSize: 15, color: '#4A5568', lineHeight: 1.5 }}&gt;Business language → models → technical language, and back again when questions arise.&lt;/Text&gt;&#10;      &lt;/Box&gt;&#10;    &lt;/Box&gt;&#10;  &lt;/Box&gt;&#10;  &lt;Box style={{ height: 40, padding: '0 40px', flexDirection: 'row', alignItems: 'center', justifyContent: 'space-between' }}&gt;&#10;    &lt;Text style={{ fontSize: 13, color: '#8B97A8' }}&gt;ISAD · Fall 2026&lt;/Text&gt;&#10;    &lt;Text style={{ fontSize: 14, color: '#1E4FA8', fontWeight: 'bold' }}&gt;14 / 38&lt;/Text&gt;&#10;  &lt;/Box&gt;&#10;&lt;/Slide&gt;"/>
+        <p:cNvPr id="88" name=""/>
         <p:cNvGrpSpPr/>
         <p:nvPr/>
       </p:nvGrpSpPr>
@@ -3338,7 +3434,10 @@
         </p:spPr>
         <p:txBody>
           <a:bodyPr/>
-          <a:p/>
+          <a:p>
+            <a:pPr/>
+            <a:endParaRPr/>
+          </a:p>
         </p:txBody>
       </p:sp>
       <p:sp>
@@ -3362,7 +3461,10 @@
         </p:spPr>
         <p:txBody>
           <a:bodyPr/>
-          <a:p/>
+          <a:p>
+            <a:pPr/>
+            <a:endParaRPr/>
+          </a:p>
         </p:txBody>
       </p:sp>
       <p:sp>
@@ -3566,7 +3668,10 @@
         </p:spPr>
         <p:txBody>
           <a:bodyPr/>
-          <a:p/>
+          <a:p>
+            <a:pPr/>
+            <a:endParaRPr/>
+          </a:p>
         </p:txBody>
       </p:sp>
       <p:sp>
@@ -3721,7 +3826,7 @@
   <p:cSld>
     <p:spTree>
       <p:nvGrpSpPr>
-        <p:cNvPr id="101" name="" descr="&lt;Slide style={{ background: '#FFFFFF', padding: 0 }}&gt;&#10;  &lt;Box style={{ height: 72, background: '#1E4FA8', padding: '0 40px', flexDirection: 'row', alignItems: 'center', justifyContent: 'space-between' }}&gt;&#10;    &lt;Text style={{ fontSize: 15, color: '#B9CDF0', letterSpacing: 1 }}&gt;ISAD · INFORMATION SYSTEMS ANALYSIS &amp;amp; DESIGN&lt;/Text&gt;&#10;    &lt;Text style={{ fontSize: 15, color: '#B9CDF0' }}&gt;W01 · INTRODUCTION&lt;/Text&gt;&#10;  &lt;/Box&gt;&#10;  &lt;Box style={{ padding: '24px 40px 0 40px' }}&gt;&#10;    &lt;Text style={{ fontSize: 34, fontWeight: 'bold', color: '#0E3F8C' }}&gt;What Analysts Actually Do&lt;/Text&gt;&#10;  &lt;/Box&gt;&#10;  &lt;Box style={{ flex: 1, padding: '18px 40px 0 40px', flexDirection: 'row', gap: 28 }}&gt;&#10;    &lt;Box style={{ width: 300, padding: '28px 24px', background: '#0E3F8C', borderRadius: 12, flexDirection: 'column', justifyContent: 'center', gap: 14 }}&gt;&#10;      &lt;Text style={{ fontSize: 24, fontWeight: 'bold', color: '#FFFFFF', lineHeight: 1.35 }}&gt;Four recurring activities&lt;/Text&gt;&#10;      &lt;Text style={{ fontSize: 16, color: '#C5D4EA', lineHeight: 1.55 }}&gt;Analysis is not a single event — it is a loop of asking, modelling, checking and communicating.&lt;/Text&gt;&#10;    &lt;/Box&gt;&#10;    &lt;Box style={{ flex: 1, flexDirection: 'column', gap: 14, justifyContent: 'center' }}&gt;&#10;      {[&#10;        ['search', 'Elicit requirements', 'Interview stakeholders, observe workflows, read existing documents.'],&#10;        ['edit', 'Model the system', 'Express findings as use cases, domain models and diagrams.'],&#10;        ['comment', 'Validate with stakeholders', 'Walk models past the people who will actually use the system.'],&#10;        ['users', 'Communicate the design', 'Hand precise models to developers and keep everyone aligned.'],&#10;      ].map(([icon, t, d]) =&gt; (&#10;        &lt;Box key={t} style={{ flexDirection: 'row', gap: 14, alignItems: 'flex-start' }}&gt;&#10;          &lt;Box style={{ width: 42, height: 42, borderRadius: 10, background: '#E8EFF8', justifyContent: 'center', alignItems: 'center' }}&gt;&#10;            &lt;FAIcon name={icon} style={{ fill: '#1E4FA8', width: 22, height: 22 }} /&gt;&#10;          &lt;/Box&gt;&#10;          &lt;Box style={{ flexDirection: 'column', gap: 3 }}&gt;&#10;            &lt;Text style={{ fontSize: 18, fontWeight: 'bold', color: '#1A2230' }}&gt;{t}&lt;/Text&gt;&#10;            &lt;Text style={{ fontSize: 15, color: '#4A5568', lineHeight: 1.5 }}&gt;{d}&lt;/Text&gt;&#10;          &lt;/Box&gt;&#10;        &lt;/Box&gt;&#10;      ))}&#10;    &lt;/Box&gt;&#10;  &lt;/Box&gt;&#10;  &lt;Box style={{ height: 40, padding: '0 40px', flexDirection: 'row', alignItems: 'center', justifyContent: 'space-between' }}&gt;&#10;    &lt;Text style={{ fontSize: 13, color: '#8B97A8' }}&gt;ISAD · Fall 2026&lt;/Text&gt;&#10;    &lt;Text style={{ fontSize: 14, color: '#1E4FA8', fontWeight: 'bold' }}&gt;15 / 38&lt;/Text&gt;&#10;  &lt;/Box&gt;&#10;&lt;/Slide&gt;"/>
+        <p:cNvPr id="101" name=""/>
         <p:cNvGrpSpPr/>
         <p:nvPr/>
       </p:nvGrpSpPr>
@@ -3754,7 +3859,10 @@
         </p:spPr>
         <p:txBody>
           <a:bodyPr/>
-          <a:p/>
+          <a:p>
+            <a:pPr/>
+            <a:endParaRPr/>
+          </a:p>
         </p:txBody>
       </p:sp>
       <p:sp>
@@ -3778,7 +3886,10 @@
         </p:spPr>
         <p:txBody>
           <a:bodyPr/>
-          <a:p/>
+          <a:p>
+            <a:pPr/>
+            <a:endParaRPr/>
+          </a:p>
         </p:txBody>
       </p:sp>
       <p:sp>
@@ -3909,7 +4020,10 @@
         </p:spPr>
         <p:txBody>
           <a:bodyPr/>
-          <a:p/>
+          <a:p>
+            <a:pPr/>
+            <a:endParaRPr/>
+          </a:p>
         </p:txBody>
       </p:sp>
       <p:sp>
@@ -4009,7 +4123,10 @@
         </p:spPr>
         <p:txBody>
           <a:bodyPr/>
-          <a:p/>
+          <a:p>
+            <a:pPr/>
+            <a:endParaRPr/>
+          </a:p>
         </p:txBody>
       </p:sp>
       <p:pic>
@@ -4136,7 +4253,10 @@
         </p:spPr>
         <p:txBody>
           <a:bodyPr/>
-          <a:p/>
+          <a:p>
+            <a:pPr/>
+            <a:endParaRPr/>
+          </a:p>
         </p:txBody>
       </p:sp>
       <p:pic>
@@ -4263,7 +4383,10 @@
         </p:spPr>
         <p:txBody>
           <a:bodyPr/>
-          <a:p/>
+          <a:p>
+            <a:pPr/>
+            <a:endParaRPr/>
+          </a:p>
         </p:txBody>
       </p:sp>
       <p:pic>
@@ -4390,7 +4513,10 @@
         </p:spPr>
         <p:txBody>
           <a:bodyPr/>
-          <a:p/>
+          <a:p>
+            <a:pPr/>
+            <a:endParaRPr/>
+          </a:p>
         </p:txBody>
       </p:sp>
       <p:pic>
@@ -4574,7 +4700,7 @@
   <p:cSld>
     <p:spTree>
       <p:nvGrpSpPr>
-        <p:cNvPr id="128" name="" descr="&lt;Slide style={{ background: '#FFFFFF', padding: 0 }}&gt;&#10;  &lt;Box style={{ height: 72, background: '#1E4FA8', padding: '0 40px', flexDirection: 'row', alignItems: 'center', justifyContent: 'space-between' }}&gt;&#10;    &lt;Text style={{ fontSize: 15, color: '#B9CDF0', letterSpacing: 1 }}&gt;ISAD · INFORMATION SYSTEMS ANALYSIS &amp;amp; DESIGN&lt;/Text&gt;&#10;    &lt;Text style={{ fontSize: 15, color: '#B9CDF0' }}&gt;W01 · INTRODUCTION&lt;/Text&gt;&#10;  &lt;/Box&gt;&#10;  &lt;Box style={{ padding: '24px 40px 0 40px' }}&gt;&#10;    &lt;Text style={{ fontSize: 34, fontWeight: 'bold', color: '#0E3F8C' }}&gt;The Analyst Skill Profile&lt;/Text&gt;&#10;  &lt;/Box&gt;&#10;  &lt;Box style={{ flex: 1, padding: '18px 40px 0 40px', flexDirection: 'row', gap: 28 }}&gt;&#10;    &lt;Box style={{ flex: 3, flexDirection: 'column', gap: 14, justifyContent: 'center' }}&gt;&#10;      {[&#10;        ['cog', 'Technical skills', 'Understand systems, data and what is feasible — without needing to write every line.'],&#10;        ['briefcase', 'Business skills', 'Understand the domain, the process and the real goal behind each requirement.'],&#10;        ['users', 'Human skills', 'Listen, interview, negotiate and communicate across two very different worlds.'],&#10;      ].map(([icon, t, d]) =&gt; (&#10;        &lt;Box key={t} style={{ flexDirection: 'row', gap: 14, padding: '16px 18px', background: '#F7F9FC', borderRadius: 10, border: '1px solid #E5E7EB', alignItems: 'center' }}&gt;&#10;          &lt;Box style={{ width: 48, height: 48, borderRadius: 12, background: '#E8EFF8', justifyContent: 'center', alignItems: 'center' }}&gt;&#10;            &lt;FAIcon name={icon} style={{ fill: '#1E4FA8', width: 24, height: 24 }} /&gt;&#10;          &lt;/Box&gt;&#10;          &lt;Box style={{ flexDirection: 'column', gap: 4 }}&gt;&#10;            &lt;Text style={{ fontSize: 19, fontWeight: 'bold', color: '#1A2230' }}&gt;{t}&lt;/Text&gt;&#10;            &lt;Text style={{ fontSize: 15, color: '#4A5568', lineHeight: 1.5 }}&gt;{d}&lt;/Text&gt;&#10;          &lt;/Box&gt;&#10;        &lt;/Box&gt;&#10;      ))}&#10;    &lt;/Box&gt;&#10;    &lt;Box style={{ flex: 2, padding: '24px 22px', background: '#0E3F8C', borderRadius: 12, flexDirection: 'column', justifyContent: 'center', gap: 12 }}&gt;&#10;      &lt;Text style={{ fontSize: 22, fontWeight: 'bold', color: '#FFFFFF', lineHeight: 1.3 }}&gt;Missing any one, and the bridge collapses.&lt;/Text&gt;&#10;      &lt;Text style={{ fontSize: 16, color: '#C5D4EA', lineHeight: 1.55 }}&gt;All technical and no business = wrong system. All business and no technical = impossible system. No human skills = nobody buys in.&lt;/Text&gt;&#10;    &lt;/Box&gt;&#10;  &lt;/Box&gt;&#10;  &lt;Box style={{ height: 40, padding: '0 40px', flexDirection: 'row', alignItems: 'center', justifyContent: 'space-between' }}&gt;&#10;    &lt;Text style={{ fontSize: 13, color: '#8B97A8' }}&gt;ISAD · Fall 2026&lt;/Text&gt;&#10;    &lt;Text style={{ fontSize: 14, color: '#1E4FA8', fontWeight: 'bold' }}&gt;16 / 38&lt;/Text&gt;&#10;  &lt;/Box&gt;&#10;&lt;/Slide&gt;"/>
+        <p:cNvPr id="128" name=""/>
         <p:cNvGrpSpPr/>
         <p:nvPr/>
       </p:nvGrpSpPr>
@@ -4607,7 +4733,10 @@
         </p:spPr>
         <p:txBody>
           <a:bodyPr/>
-          <a:p/>
+          <a:p>
+            <a:pPr/>
+            <a:endParaRPr/>
+          </a:p>
         </p:txBody>
       </p:sp>
       <p:sp>
@@ -4631,7 +4760,10 @@
         </p:spPr>
         <p:txBody>
           <a:bodyPr/>
-          <a:p/>
+          <a:p>
+            <a:pPr/>
+            <a:endParaRPr/>
+          </a:p>
         </p:txBody>
       </p:sp>
       <p:sp>
@@ -4767,7 +4899,10 @@
         </p:spPr>
         <p:txBody>
           <a:bodyPr/>
-          <a:p/>
+          <a:p>
+            <a:pPr/>
+            <a:endParaRPr/>
+          </a:p>
         </p:txBody>
       </p:sp>
       <p:sp>
@@ -4793,7 +4928,10 @@
         </p:spPr>
         <p:txBody>
           <a:bodyPr/>
-          <a:p/>
+          <a:p>
+            <a:pPr/>
+            <a:endParaRPr/>
+          </a:p>
         </p:txBody>
       </p:sp>
       <p:pic>
@@ -4925,7 +5063,10 @@
         </p:spPr>
         <p:txBody>
           <a:bodyPr/>
-          <a:p/>
+          <a:p>
+            <a:pPr/>
+            <a:endParaRPr/>
+          </a:p>
         </p:txBody>
       </p:sp>
       <p:sp>
@@ -4951,7 +5092,10 @@
         </p:spPr>
         <p:txBody>
           <a:bodyPr/>
-          <a:p/>
+          <a:p>
+            <a:pPr/>
+            <a:endParaRPr/>
+          </a:p>
         </p:txBody>
       </p:sp>
       <p:pic>
@@ -5083,7 +5227,10 @@
         </p:spPr>
         <p:txBody>
           <a:bodyPr/>
-          <a:p/>
+          <a:p>
+            <a:pPr/>
+            <a:endParaRPr/>
+          </a:p>
         </p:txBody>
       </p:sp>
       <p:sp>
@@ -5109,7 +5256,10 @@
         </p:spPr>
         <p:txBody>
           <a:bodyPr/>
-          <a:p/>
+          <a:p>
+            <a:pPr/>
+            <a:endParaRPr/>
+          </a:p>
         </p:txBody>
       </p:sp>
       <p:pic>
@@ -5236,7 +5386,10 @@
         </p:spPr>
         <p:txBody>
           <a:bodyPr/>
-          <a:p/>
+          <a:p>
+            <a:pPr/>
+            <a:endParaRPr/>
+          </a:p>
         </p:txBody>
       </p:sp>
       <p:sp>
@@ -5393,7 +5546,7 @@
   <p:cSld>
     <p:spTree>
       <p:nvGrpSpPr>
-        <p:cNvPr id="154" name="" descr="&lt;Slide style={{ background: '#FFFFFF', padding: 0 }}&gt;&#10;  &lt;Box style={{ height: 72, background: '#1E4FA8', padding: '0 40px', flexDirection: 'row', alignItems: 'center', justifyContent: 'space-between' }}&gt;&#10;    &lt;Text style={{ fontSize: 15, color: '#B9CDF0', letterSpacing: 1 }}&gt;ISAD · INFORMATION SYSTEMS ANALYSIS &amp;amp; DESIGN&lt;/Text&gt;&#10;    &lt;Text style={{ fontSize: 15, color: '#B9CDF0' }}&gt;W01 · INTRODUCTION&lt;/Text&gt;&#10;  &lt;/Box&gt;&#10;  &lt;Box style={{ padding: '24px 40px 0 40px' }}&gt;&#10;    &lt;Text style={{ fontSize: 34, fontWeight: 'bold', color: '#0E3F8C' }}&gt;Analyst vs. Other Roles&lt;/Text&gt;&#10;  &lt;/Box&gt;&#10;  &lt;Box style={{ flex: 1, padding: '20px 40px 0 40px' }}&gt;&#10;    &lt;Table&#10;      style={{ width: '100%', height: '100%' }}&#10;      defaultTextStyle={{ fontSize: 16, textAlign: 'left', color: '#1A2230' }}&#10;      defaultCellStyle={{&#10;        border: {&#10;          left: { width: 1, color: '#E5E7EB' },&#10;          right: { width: 1, color: '#E5E7EB' },&#10;          top: { width: 1, color: '#E5E7EB' },&#10;          bottom: { width: 1, color: '#E5E7EB' },&#10;        },&#10;      }}&#10;      cells={[&#10;        [&#10;          { text: 'Role', textStyle: { bold: true, color: '#FFFFFF', textAlign: 'left' }, cellStyle: { background: { color: '#0E3F8C' } } },&#10;          { text: 'Primary focus', textStyle: { bold: true, color: '#FFFFFF', textAlign: 'left' }, cellStyle: { background: { color: '#0E3F8C' } } },&#10;          { text: 'Key question', textStyle: { bold: true, color: '#FFFFFF', textAlign: 'left' }, cellStyle: { background: { color: '#0E3F8C' } } },&#10;        ],&#10;        [&#10;          { text: 'Systems Analyst', textStyle: { bold: true, color: '#1E4FA8' }, cellStyle: { background: { color: '#F0F5FC' } } },&#10;          { text: 'Understand needs, build models', textStyle: { color: '#4A5568' }, cellStyle: { background: { color: '#F0F5FC' } } },&#10;          { text: 'What should the system do?', textStyle: { color: '#4A5568' }, cellStyle: { background: { color: '#F0F5FC' } } },&#10;        ],&#10;        [&#10;          { text: 'Developer', textStyle: { bold: true, color: '#1A2230' } },&#10;          { text: 'Build the system', textStyle: { color: '#4A5568' } },&#10;          { text: 'How do we build it?', textStyle: { color: '#4A5568' } },&#10;        ],&#10;        [&#10;          { text: 'Tester', textStyle: { bold: true, color: '#1A2230' }, cellStyle: { background: { color: '#F7F9FC' } } },&#10;          { text: 'Verify quality', textStyle: { color: '#4A5568' }, cellStyle: { background: { color: '#F7F9FC' } } },&#10;          { text: 'Does it work correctly?', textStyle: { color: '#4A5568' }, cellStyle: { background: { color: '#F7F9FC' } } },&#10;        ],&#10;        [&#10;          { text: 'Project Manager', textStyle: { bold: true, color: '#1A2230' } },&#10;          { text: 'Scope, schedule, resources', textStyle: { color: '#4A5568' } },&#10;          { text: 'Are we on track?', textStyle: { color: '#4A5568' } },&#10;        ],&#10;      ]}&#10;    /&gt;&#10;  &lt;/Box&gt;&#10;  &lt;Box style={{ height: 40, padding: '0 40px', flexDirection: 'row', alignItems: 'center', justifyContent: 'space-between' }}&gt;&#10;    &lt;Text style={{ fontSize: 13, color: '#8B97A8' }}&gt;This course trains you for the top row.&lt;/Text&gt;&#10;    &lt;Text style={{ fontSize: 14, color: '#1E4FA8', fontWeight: 'bold' }}&gt;17 / 38&lt;/Text&gt;&#10;  &lt;/Box&gt;&#10;&lt;/Slide&gt;"/>
+        <p:cNvPr id="154" name=""/>
         <p:cNvGrpSpPr/>
         <p:nvPr/>
       </p:nvGrpSpPr>
@@ -5426,7 +5579,10 @@
         </p:spPr>
         <p:txBody>
           <a:bodyPr/>
-          <a:p/>
+          <a:p>
+            <a:pPr/>
+            <a:endParaRPr/>
+          </a:p>
         </p:txBody>
       </p:sp>
       <p:sp>
@@ -5450,7 +5606,10 @@
         </p:spPr>
         <p:txBody>
           <a:bodyPr/>
-          <a:p/>
+          <a:p>
+            <a:pPr/>
+            <a:endParaRPr/>
+          </a:p>
         </p:txBody>
       </p:sp>
       <p:sp>
@@ -6325,7 +6484,7 @@
   <p:cSld>
     <p:spTree>
       <p:nvGrpSpPr>
-        <p:cNvPr id="163" name="" descr="&lt;Slide style={{ background: '#0E3F8C', padding: 0 }}&gt;&#10;  &lt;Box style={{ flexDirection: 'row', height: '100%', position: 'relative' }}&gt;&#10;    &lt;Box style={{ position: 'absolute', top: 0, left: 0, right: 0, height: 8, background: '#1E4FA8' }} /&gt;&#10;    &lt;Box style={{ width: 300, justifyContent: 'center', alignItems: 'center', borderRight: '1px solid #2B5793' }}&gt;&#10;      &lt;Text style={{ fontSize: 220, fontWeight: 'bold', color: '#3D7BD9', fontFamily: 'Georgia, serif', lineHeight: 1 }}&gt;04&lt;/Text&gt;&#10;    &lt;/Box&gt;&#10;    &lt;Box style={{ flex: 1, padding: '70px 64px', flexDirection: 'column', justifyContent: 'center' }}&gt;&#10;      &lt;Text style={{ fontSize: 15, color: '#7FA2D6', letterSpacing: 2, marginBottom: 18 }}&gt;PART 1 · LECTURE&lt;/Text&gt;&#10;      &lt;Text style={{ fontSize: 48, fontWeight: 'bold', color: '#FFFFFF', lineHeight: 1.18 }}&gt;Analysis &amp;amp; Design&lt;br /&gt;in the SDLC&lt;/Text&gt;&#10;      &lt;Box style={{ width: 64, height: 4, background: '#FFC107', marginTop: 26, marginBottom: 26 }} /&gt;&#10;      &lt;Box style={{ flexDirection: 'column', gap: 12 }}&gt;&#10;        {[&#10;          'A quick recap of the software life cycle',&#10;          'Analysis vs. design vs. implementation',&#10;          'Models as abstractions — like maps',&#10;        ].map((t) =&gt; (&#10;          &lt;Box key={t} style={{ flexDirection: 'row', alignItems: 'center', gap: 12 }}&gt;&#10;            &lt;Box style={{ width: 8, height: 8, borderRadius: 4, background: '#3D7BD9' }} /&gt;&#10;            &lt;Text style={{ fontSize: 20, color: '#C5D4EA' }}&gt;{t}&lt;/Text&gt;&#10;          &lt;/Box&gt;&#10;        ))}&#10;      &lt;/Box&gt;&#10;    &lt;/Box&gt;&#10;  &lt;/Box&gt;&#10;&lt;/Slide&gt;"/>
+        <p:cNvPr id="163" name=""/>
         <p:cNvGrpSpPr/>
         <p:nvPr/>
       </p:nvGrpSpPr>
@@ -6358,7 +6517,10 @@
         </p:spPr>
         <p:txBody>
           <a:bodyPr/>
-          <a:p/>
+          <a:p>
+            <a:pPr/>
+            <a:endParaRPr/>
+          </a:p>
         </p:txBody>
       </p:sp>
       <p:sp>
@@ -6398,7 +6560,10 @@
         </p:spPr>
         <p:txBody>
           <a:bodyPr/>
-          <a:p/>
+          <a:p>
+            <a:pPr/>
+            <a:endParaRPr/>
+          </a:p>
         </p:txBody>
       </p:sp>
       <p:sp>
@@ -6545,7 +6710,10 @@
         </p:spPr>
         <p:txBody>
           <a:bodyPr/>
-          <a:p/>
+          <a:p>
+            <a:pPr/>
+            <a:endParaRPr/>
+          </a:p>
         </p:txBody>
       </p:sp>
       <p:sp>
@@ -6571,7 +6739,10 @@
         </p:spPr>
         <p:txBody>
           <a:bodyPr/>
-          <a:p/>
+          <a:p>
+            <a:pPr/>
+            <a:endParaRPr/>
+          </a:p>
         </p:txBody>
       </p:sp>
       <p:sp>
@@ -6632,7 +6803,10 @@
         </p:spPr>
         <p:txBody>
           <a:bodyPr/>
-          <a:p/>
+          <a:p>
+            <a:pPr/>
+            <a:endParaRPr/>
+          </a:p>
         </p:txBody>
       </p:sp>
       <p:sp>
@@ -6693,7 +6867,10 @@
         </p:spPr>
         <p:txBody>
           <a:bodyPr/>
-          <a:p/>
+          <a:p>
+            <a:pPr/>
+            <a:endParaRPr/>
+          </a:p>
         </p:txBody>
       </p:sp>
       <p:sp>
@@ -6752,7 +6929,10 @@
         </p:spPr>
         <p:txBody>
           <a:bodyPr/>
-          <a:p/>
+          <a:p>
+            <a:pPr/>
+            <a:endParaRPr/>
+          </a:p>
         </p:txBody>
       </p:sp>
     </p:spTree>
@@ -6765,7 +6945,7 @@
   <p:cSld>
     <p:spTree>
       <p:nvGrpSpPr>
-        <p:cNvPr id="177" name="" descr="&lt;Slide style={{ background: '#FFFFFF', padding: 0 }}&gt;&#10;  &lt;Box style={{ height: 72, background: '#1E4FA8', padding: '0 40px', flexDirection: 'row', alignItems: 'center', justifyContent: 'space-between' }}&gt;&#10;    &lt;Text style={{ fontSize: 15, color: '#B9CDF0', letterSpacing: 1 }}&gt;ISAD · INFORMATION SYSTEMS ANALYSIS &amp;amp; DESIGN&lt;/Text&gt;&#10;    &lt;Text style={{ fontSize: 15, color: '#B9CDF0' }}&gt;W01 · INTRODUCTION&lt;/Text&gt;&#10;  &lt;/Box&gt;&#10;  &lt;Box style={{ padding: '24px 40px 0 40px' }}&gt;&#10;    &lt;Text style={{ fontSize: 34, fontWeight: 'bold', color: '#0E3F8C' }}&gt;The Software Life Cycle (SDLC)&lt;/Text&gt;&#10;  &lt;/Box&gt;&#10;  &lt;Box style={{ flex: 1, padding: '18px 40px 0 40px', flexDirection: 'row', gap: 28 }}&gt;&#10;    &lt;Box style={{ flex: 3, justifyContent: 'center', alignItems: 'center' }}&gt;&#10;      &lt;svg width={560} height={400} viewBox='0 0 560 400'&gt;&#10;        &lt;rect x='20' y='40' width='150' height='70' rx='12' fill='#E8EFF8' stroke='#3D7BD9' strokeWidth='2' /&gt;&#10;        &lt;text x='95' y='70' textAnchor='middle' fill='#4A5568' fontSize='15'&gt;1 · Requirements&lt;/text&gt;&#10;        &lt;text x='95' y='92' textAnchor='middle' fill='#8B97A8' fontSize='13'&gt;what is needed&lt;/text&gt;&#10;        &lt;rect x='205' y='40' width='150' height='70' rx='12' fill='#1E4FA8' /&gt;&#10;        &lt;text x='280' y='70' textAnchor='middle' fill='#FFFFFF' fontSize='15' fontWeight='bold'&gt;2 · Analysis&lt;/text&gt;&#10;        &lt;text x='280' y='92' textAnchor='middle' fill='#B9CDF0' fontSize='13'&gt;understand the problem&lt;/text&gt;&#10;        &lt;rect x='390' y='40' width='150' height='70' rx='12' fill='#1E4FA8' /&gt;&#10;        &lt;text x='465' y='70' textAnchor='middle' fill='#FFFFFF' fontSize='15' fontWeight='bold'&gt;3 · Design&lt;/text&gt;&#10;        &lt;text x='465' y='92' textAnchor='middle' fill='#B9CDF0' fontSize='13'&gt;plan the solution&lt;/text&gt;&#10;        &lt;rect x='390' y='250' width='150' height='70' rx='12' fill='#E8EFF8' stroke='#3D7BD9' strokeWidth='2' /&gt;&#10;        &lt;text x='465' y='280' textAnchor='middle' fill='#4A5568' fontSize='15'&gt;4 · Implementation&lt;/text&gt;&#10;        &lt;text x='465' y='302' textAnchor='middle' fill='#8B97A8' fontSize='13'&gt;write the code&lt;/text&gt;&#10;        &lt;rect x='205' y='250' width='150' height='70' rx='12' fill='#E8EFF8' stroke='#3D7BD9' strokeWidth='2' /&gt;&#10;        &lt;text x='280' y='280' textAnchor='middle' fill='#4A5568' fontSize='15'&gt;5 · Testing&lt;/text&gt;&#10;        &lt;text x='280' y='302' textAnchor='middle' fill='#8B97A8' fontSize='13'&gt;verify quality&lt;/text&gt;&#10;        &lt;rect x='20' y='250' width='150' height='70' rx='12' fill='#E8EFF8' stroke='#3D7BD9' strokeWidth='2' /&gt;&#10;        &lt;text x='95' y='280' textAnchor='middle' fill='#4A5568' fontSize='15'&gt;6 · Deployment&lt;/text&gt;&#10;        &lt;text x='95' y='302' textAnchor='middle' fill='#8B97A8' fontSize='13'&gt;ship and maintain&lt;/text&gt;&#10;        &lt;line x1='170' y1='75' x2='205' y2='75' stroke='#3D7BD9' strokeWidth='3' /&gt;&#10;        &lt;polygon points='200,70 212,75 200,80' fill='#3D7BD9' /&gt;&#10;        &lt;line x1='355' y1='75' x2='390' y2='75' stroke='#3D7BD9' strokeWidth='3' /&gt;&#10;        &lt;polygon points='385,70 397,75 385,80' fill='#3D7BD9' /&gt;&#10;        &lt;line x1='465' y1='110' x2='465' y2='250' stroke='#3D7BD9' strokeWidth='3' /&gt;&#10;        &lt;polygon points='460,245 465,257 470,245' fill='#3D7BD9' /&gt;&#10;        &lt;line x1='390' y1='285' x2='355' y2='285' stroke='#3D7BD9' strokeWidth='3' /&gt;&#10;        &lt;polygon points='360,280 348,285 360,290' fill='#3D7BD9' /&gt;&#10;        &lt;line x1='205' y1='285' x2='170' y2='285' stroke='#3D7BD9' strokeWidth='3' /&gt;&#10;        &lt;polygon points='175,280 163,285 175,290' fill='#3D7BD9' /&gt;&#10;      &lt;/svg&gt;&#10;    &lt;/Box&gt;&#10;    &lt;Box style={{ flex: 2, flexDirection: 'column', gap: 16, justifyContent: 'center' }}&gt;&#10;      &lt;Box style={{ padding: '18px 20px', background: '#F0F5FC', borderRadius: 10, border: '1px solid #3D7BD9', flexDirection: 'column', gap: 6 }}&gt;&#10;        &lt;Text style={{ fontSize: 17, fontWeight: 'bold', color: '#1E4FA8' }}&gt;This course lives in steps 2 and 3&lt;/Text&gt;&#10;        &lt;Text style={{ fontSize: 15, color: '#4A5568', lineHeight: 1.5 }}&gt;You already saw the whole cycle in SE1. Now we go deep into the two steps where systems are most often made wrong.&lt;/Text&gt;&#10;      &lt;/Box&gt;&#10;      &lt;Text style={{ fontSize: 16, color: '#4A5568', lineHeight: 1.55 }}&gt;In real projects the steps &lt;span style={{ fontWeight: 'bold', color: '#1A2230' }}&gt;overlap and repeat&lt;/span&gt; — we will use an iterative style, not a strict waterfall.&lt;/Text&gt;&#10;    &lt;/Box&gt;&#10;  &lt;/Box&gt;&#10;  &lt;Box style={{ height: 40, padding: '0 40px', flexDirection: 'row', alignItems: 'center', justifyContent: 'space-between' }}&gt;&#10;    &lt;Text style={{ fontSize: 13, color: '#8B97A8' }}&gt;ISAD · Fall 2026&lt;/Text&gt;&#10;    &lt;Text style={{ fontSize: 14, color: '#1E4FA8', fontWeight: 'bold' }}&gt;19 / 38&lt;/Text&gt;&#10;  &lt;/Box&gt;&#10;&lt;/Slide&gt;"/>
+        <p:cNvPr id="177" name=""/>
         <p:cNvGrpSpPr/>
         <p:nvPr/>
       </p:nvGrpSpPr>
@@ -6798,7 +6978,10 @@
         </p:spPr>
         <p:txBody>
           <a:bodyPr/>
-          <a:p/>
+          <a:p>
+            <a:pPr/>
+            <a:endParaRPr/>
+          </a:p>
         </p:txBody>
       </p:sp>
       <p:sp>
@@ -6822,7 +7005,10 @@
         </p:spPr>
         <p:txBody>
           <a:bodyPr/>
-          <a:p/>
+          <a:p>
+            <a:pPr/>
+            <a:endParaRPr/>
+          </a:p>
         </p:txBody>
       </p:sp>
       <p:sp>
@@ -6989,7 +7175,10 @@
         </p:spPr>
         <p:txBody>
           <a:bodyPr/>
-          <a:p/>
+          <a:p>
+            <a:pPr/>
+            <a:endParaRPr/>
+          </a:p>
         </p:txBody>
       </p:sp>
       <p:sp>
@@ -7201,7 +7390,7 @@
   <p:cSld>
     <p:spTree>
       <p:nvGrpSpPr>
-        <p:cNvPr id="190" name="" descr="&lt;Slide style={{ background: '#FFFFFF', padding: 0 }}&gt;&#10;  &lt;Box style={{ flexDirection: 'row', height: '100%' }}&gt;&#10;    &lt;Box style={{ width: 320, background: '#0E3F8C', padding: '60px 44px', flexDirection: 'column', justifyContent: 'space-between' }}&gt;&#10;      &lt;Box&gt;&#10;        &lt;Box style={{ width: 40, height: 4, background: '#FFC107', marginBottom: 24 }} /&gt;&#10;        &lt;Text style={{ fontSize: 46, fontWeight: 'bold', color: '#FFFFFF', fontFamily: 'Georgia, serif', lineHeight: 1.15 }}&gt;Contents&lt;/Text&gt;&#10;        &lt;Text style={{ fontSize: 16, color: '#7FA2D6', marginTop: 18, letterSpacing: 1 }}&gt;WEEK 01 · ROADMAP&lt;/Text&gt;&#10;      &lt;/Box&gt;&#10;      &lt;Text style={{ fontSize: 15, color: '#5B84C4', lineHeight: 1.5 }}&gt;Information Systems&lt;br /&gt;Analysis &amp;amp; Design&lt;/Text&gt;&#10;    &lt;/Box&gt;&#10;    &lt;Box style={{ flex: 1, padding: '56px 56px', flexDirection: 'column', gap: 18 }}&gt;&#10;      {[&#10;        { n: '01', t: 'Welcome &amp;amp; Course Overview', p: '03' },&#10;        { n: '02', t: 'What Is an Information System?', p: '08' },&#10;        { n: '03', t: 'The Systems Analyst', p: '13' },&#10;        { n: '04', t: 'Analysis &amp;amp; Design in the SDLC', p: '18' },&#10;        { n: '05', t: 'The OOAD Roadmap', p: '23' },&#10;        { n: '06', t: 'Lab — Reading UML &amp;amp; Exercises', p: '29' },&#10;      ].map((item) =&gt; (&#10;        &lt;Box key={item.n} style={{ flexDirection: 'row', alignItems: 'center', gap: 20, padding: '16px 20px', background: '#F7F9FC', borderRadius: 10, border: '1px solid #E5E7EB' }}&gt;&#10;          &lt;Box style={{ width: 52, height: 52, borderRadius: 8, background: '#1E4FA8', justifyContent: 'center', alignItems: 'center' }}&gt;&#10;            &lt;Text style={{ fontSize: 22, fontWeight: 'bold', color: '#FFFFFF' }}&gt;{item.n}&lt;/Text&gt;&#10;          &lt;/Box&gt;&#10;          &lt;Text style={{ flex: 1, fontSize: 21, color: '#1A2230', fontWeight: '600' }}&gt;{item.t}&lt;/Text&gt;&#10;          &lt;Text style={{ fontSize: 20, color: '#8B97A8', fontWeight: 'bold' }}&gt;{item.p}&lt;/Text&gt;&#10;        &lt;/Box&gt;&#10;      ))}&#10;    &lt;/Box&gt;&#10;  &lt;/Box&gt;&#10;&lt;/Slide&gt;"/>
+        <p:cNvPr id="190" name="" descr="&lt;Slide style={{ background: '#FFFFFF', padding: 0 }}&gt;&#10;  &lt;Box style={{ flexDirection: 'row', height: '100%' }}&gt;&#10;    &lt;Box style={{ width: 320, background: '#0E3F8C', padding: '60px 44px', flexDirection: 'column', justifyContent: 'space-between' }}&gt;&#10;      &lt;Box&gt;&#10;        &lt;Box style={{ width: 40, height: 4, background: '#FFC107', marginBottom: 24 }} /&gt;&#10;        &lt;Text style={{ fontSize: 46, fontWeight: 'bold', color: '#FFFFFF', fontFamily: 'Georgia, serif', lineHeight: 1.15 }}&gt;Contents&lt;/Text&gt;&#10;        &lt;Text style={{ fontSize: 16, color: '#7FA2D6', marginTop: 18, letterSpacing: 1 }}&gt;WEEK 01 · ROADMAP&lt;/Text&gt;&#10;      &lt;/Box&gt;&#10;      &lt;Text style={{ fontSize: 15, color: '#5B84C4', lineHeight: 1.5 }}&gt;Information Systems&lt;br /&gt;Analysis &amp;amp; Design&lt;/Text&gt;&#10;    &lt;/Box&gt;&#10;    &lt;Box style={{ flex: 1, padding: '56px 56px', flexDirection: 'column', gap: 18 }}&gt;&#10;      {[&#10;        { n: '01', t: 'Welcome &amp; Course Overview', p: '03' },&#10;        { n: '02', t: 'What Is an Information System?', p: '08' },&#10;        { n: '03', t: 'The Systems Analyst', p: '13' },&#10;        { n: '04', t: 'Analysis &amp; Design in the SDLC', p: '18' },&#10;        { n: '05', t: 'The OOAD Roadmap', p: '23' },&#10;        { n: '06', t: 'Lab — Reading UML &amp; Exercises', p: '29' },&#10;      ].map((item) =&gt; (&#10;        &lt;Box key={item.n} style={{ flexDirection: 'row', alignItems: 'center', gap: 20, padding: '16px 20px', background: '#F7F9FC', borderRadius: 10, border: '1px solid #E5E7EB' }}&gt;&#10;          &lt;Box style={{ width: 52, height: 52, borderRadius: 8, background: '#1E4FA8', justifyContent: 'center', alignItems: 'center' }}&gt;&#10;            &lt;Text style={{ fontSize: 22, fontWeight: 'bold', color: '#FFFFFF' }}&gt;{item.n}&lt;/Text&gt;&#10;          &lt;/Box&gt;&#10;          &lt;Text style={{ flex: 1, fontSize: 21, color: '#1A2230', fontWeight: '600' }}&gt;{item.t}&lt;/Text&gt;&#10;          &lt;Text style={{ fontSize: 20, color: '#8B97A8', fontWeight: 'bold' }}&gt;{item.p}&lt;/Text&gt;&#10;        &lt;/Box&gt;&#10;      ))}&#10;    &lt;/Box&gt;&#10;  &lt;/Box&gt;&#10;&lt;/Slide&gt;&#10;"/>
         <p:cNvGrpSpPr/>
         <p:nvPr/>
       </p:nvGrpSpPr>
@@ -7529,7 +7718,7 @@
                 <a:latin typeface="Microsoft YaHei"/>
                 <a:ea typeface="Microsoft YaHei"/>
               </a:rPr>
-              <a:t>Welcome &amp;amp; Course Overview</a:t>
+              <a:t>Welcome &amp; Course Overview</a:t>
             </a:r>
             <a:endParaRPr/>
           </a:p>
@@ -8015,7 +8204,7 @@
                 <a:latin typeface="Microsoft YaHei"/>
                 <a:ea typeface="Microsoft YaHei"/>
               </a:rPr>
-              <a:t>Analysis &amp;amp; Design in the SDLC</a:t>
+              <a:t>Analysis &amp; Design in the SDLC</a:t>
             </a:r>
             <a:endParaRPr/>
           </a:p>
@@ -8339,7 +8528,7 @@
                 <a:latin typeface="Microsoft YaHei"/>
                 <a:ea typeface="Microsoft YaHei"/>
               </a:rPr>
-              <a:t>Lab — Reading UML &amp;amp; Exercises</a:t>
+              <a:t>Lab — Reading UML &amp; Exercises</a:t>
             </a:r>
             <a:endParaRPr/>
           </a:p>
@@ -8390,7 +8579,7 @@
   <p:cSld>
     <p:spTree>
       <p:nvGrpSpPr>
-        <p:cNvPr id="227" name="" descr="&lt;Slide style={{ background: '#FFFFFF', padding: 0 }}&gt;&#10;  &lt;Box style={{ height: 72, background: '#1E4FA8', padding: '0 40px', flexDirection: 'row', alignItems: 'center', justifyContent: 'space-between' }}&gt;&#10;    &lt;Text style={{ fontSize: 15, color: '#B9CDF0', letterSpacing: 1 }}&gt;ISAD · INFORMATION SYSTEMS ANALYSIS &amp;amp; DESIGN&lt;/Text&gt;&#10;    &lt;Text style={{ fontSize: 15, color: '#B9CDF0' }}&gt;W01 · INTRODUCTION&lt;/Text&gt;&#10;  &lt;/Box&gt;&#10;  &lt;Box style={{ padding: '24px 40px 0 40px' }}&gt;&#10;    &lt;Text style={{ fontSize: 34, fontWeight: 'bold', color: '#0E3F8C' }}&gt;Analysis vs. Design vs. Implementation&lt;/Text&gt;&#10;  &lt;/Box&gt;&#10;  &lt;Box style={{ flex: 1, padding: '18px 40px 0 40px', flexDirection: 'row', gap: 28 }}&gt;&#10;    &lt;Box style={{ flex: 3, flexDirection: 'column', gap: 14, justifyContent: 'center' }}&gt;&#10;      {[&#10;        ['Analysis', 'WHAT', 'Understand the problem — what does the system need to do? Use cases, domain model.', '#1E4FA8'],&#10;        ['Design', 'HOW', 'Plan the solution — how will it work? Design classes, principles, patterns.', '#3D7BD9'],&#10;        ['Implementation', 'BUILD', 'Write the code — turn the plan into working software.', '#8B97A8'],&#10;      ].map(([t, tag, d, color]) =&gt; (&#10;        &lt;Box key={t} style={{ flexDirection: 'row', gap: 16, alignItems: 'center', padding: '16px 20px', background: '#F7F9FC', borderRadius: 10, border: '1px solid #E5E7EB' }}&gt;&#10;          &lt;Box style={{ width: 130, padding: '10px 0', borderRadius: 8, background: color, justifyContent: 'center', alignItems: 'center' }}&gt;&#10;            &lt;Text style={{ fontSize: 20, fontWeight: 'bold', color: '#FFFFFF' }}&gt;{t}&lt;/Text&gt;&#10;          &lt;/Box&gt;&#10;          &lt;Box style={{ width: 70, justifyContent: 'center', alignItems: 'center' }}&gt;&#10;            &lt;Text style={{ fontSize: 15, fontWeight: 'bold', color: color, letterSpacing: 1 }}&gt;{tag}&lt;/Text&gt;&#10;          &lt;/Box&gt;&#10;          &lt;Text style={{ flex: 1, fontSize: 15, color: '#4A5568', lineHeight: 1.5 }}&gt;{d}&lt;/Text&gt;&#10;        &lt;/Box&gt;&#10;      ))}&#10;    &lt;/Box&gt;&#10;    &lt;Box style={{ flex: 2, padding: '26px 24px', background: '#0E3F8C', borderRadius: 12, flexDirection: 'column', justifyContent: 'center', gap: 14 }}&gt;&#10;      &lt;Text style={{ fontSize: 22, fontWeight: 'bold', color: '#FFFFFF', lineHeight: 1.3 }}&gt;A mistake in analysis is the most expensive to fix.&lt;/Text&gt;&#10;      &lt;Text style={{ fontSize: 16, color: '#C5D4EA', lineHeight: 1.55 }}&gt;Wrong requirement → wrong model → wrong design → wrong code. Every later stage only makes the error more expensive.&lt;/Text&gt;&#10;    &lt;/Box&gt;&#10;  &lt;/Box&gt;&#10;  &lt;Box style={{ height: 40, padding: '0 40px', flexDirection: 'row', alignItems: 'center', justifyContent: 'space-between' }}&gt;&#10;    &lt;Text style={{ fontSize: 13, color: '#8B97A8' }}&gt;ISAD · Fall 2026&lt;/Text&gt;&#10;    &lt;Text style={{ fontSize: 14, color: '#1E4FA8', fontWeight: 'bold' }}&gt;20 / 38&lt;/Text&gt;&#10;  &lt;/Box&gt;&#10;&lt;/Slide&gt;"/>
+        <p:cNvPr id="227" name=""/>
         <p:cNvGrpSpPr/>
         <p:nvPr/>
       </p:nvGrpSpPr>
@@ -8423,7 +8612,10 @@
         </p:spPr>
         <p:txBody>
           <a:bodyPr/>
-          <a:p/>
+          <a:p>
+            <a:pPr/>
+            <a:endParaRPr/>
+          </a:p>
         </p:txBody>
       </p:sp>
       <p:sp>
@@ -8447,7 +8639,10 @@
         </p:spPr>
         <p:txBody>
           <a:bodyPr/>
-          <a:p/>
+          <a:p>
+            <a:pPr/>
+            <a:endParaRPr/>
+          </a:p>
         </p:txBody>
       </p:sp>
       <p:sp>
@@ -8583,7 +8778,10 @@
         </p:spPr>
         <p:txBody>
           <a:bodyPr/>
-          <a:p/>
+          <a:p>
+            <a:pPr/>
+            <a:endParaRPr/>
+          </a:p>
         </p:txBody>
       </p:sp>
       <p:sp>
@@ -8609,7 +8807,10 @@
         </p:spPr>
         <p:txBody>
           <a:bodyPr/>
-          <a:p/>
+          <a:p>
+            <a:pPr/>
+            <a:endParaRPr/>
+          </a:p>
         </p:txBody>
       </p:sp>
       <p:sp>
@@ -8747,7 +8948,10 @@
         </p:spPr>
         <p:txBody>
           <a:bodyPr/>
-          <a:p/>
+          <a:p>
+            <a:pPr/>
+            <a:endParaRPr/>
+          </a:p>
         </p:txBody>
       </p:sp>
       <p:sp>
@@ -8773,7 +8977,10 @@
         </p:spPr>
         <p:txBody>
           <a:bodyPr/>
-          <a:p/>
+          <a:p>
+            <a:pPr/>
+            <a:endParaRPr/>
+          </a:p>
         </p:txBody>
       </p:sp>
       <p:sp>
@@ -8911,7 +9118,10 @@
         </p:spPr>
         <p:txBody>
           <a:bodyPr/>
-          <a:p/>
+          <a:p>
+            <a:pPr/>
+            <a:endParaRPr/>
+          </a:p>
         </p:txBody>
       </p:sp>
       <p:sp>
@@ -8937,7 +9147,10 @@
         </p:spPr>
         <p:txBody>
           <a:bodyPr/>
-          <a:p/>
+          <a:p>
+            <a:pPr/>
+            <a:endParaRPr/>
+          </a:p>
         </p:txBody>
       </p:sp>
       <p:sp>
@@ -9068,7 +9281,10 @@
         </p:spPr>
         <p:txBody>
           <a:bodyPr/>
-          <a:p/>
+          <a:p>
+            <a:pPr/>
+            <a:endParaRPr/>
+          </a:p>
         </p:txBody>
       </p:sp>
       <p:sp>
@@ -9225,7 +9441,7 @@
   <p:cSld>
     <p:spTree>
       <p:nvGrpSpPr>
-        <p:cNvPr id="253" name="" descr="&lt;Slide style={{ background: '#FFFFFF', padding: 0 }}&gt;&#10;  &lt;Box style={{ height: 72, background: '#1E4FA8', padding: '0 40px', flexDirection: 'row', alignItems: 'center', justifyContent: 'space-between' }}&gt;&#10;    &lt;Text style={{ fontSize: 15, color: '#B9CDF0', letterSpacing: 1 }}&gt;ISAD · INFORMATION SYSTEMS ANALYSIS &amp;amp; DESIGN&lt;/Text&gt;&#10;    &lt;Text style={{ fontSize: 15, color: '#B9CDF0' }}&gt;W01 · INTRODUCTION&lt;/Text&gt;&#10;  &lt;/Box&gt;&#10;  &lt;Box style={{ padding: '24px 40px 0 40px' }}&gt;&#10;    &lt;Text style={{ fontSize: 34, fontWeight: 'bold', color: '#0E3F8C' }}&gt;Models as Abstractions&lt;/Text&gt;&#10;  &lt;/Box&gt;&#10;  &lt;Box style={{ flex: 1, padding: '18px 40px 0 40px', flexDirection: 'row', gap: 28 }}&gt;&#10;    &lt;Box style={{ flex: 3, justifyContent: 'center', alignItems: 'center' }}&gt;&#10;      &lt;svg width={560} height={380} viewBox='0 0 560 380'&gt;&#10;        &lt;rect x='20' y='30' width='220' height='320' rx='14' fill='#F7F9FC' stroke='#D6DCE5' strokeWidth='2' /&gt;&#10;        &lt;text x='130' y='62' textAnchor='middle' fill='#8B97A8' fontSize='16'&gt;The real city&lt;/text&gt;&#10;        &lt;path d='M40 90 L90 130 L70 180 L140 210 L120 270 L200 300 L180 330' fill='none' stroke='#8B97A8' strokeWidth='2' /&gt;&#10;        &lt;path d='M120 90 L180 140 L150 200 L230 250 L210 320' fill='none' stroke='#8B97A8' strokeWidth='2' /&gt;&#10;        &lt;path d='M60 200 L110 170 L160 240 L130 300' fill='none' stroke='#8B97A8' strokeWidth='2' /&gt;&#10;        &lt;circle cx='90' cy='130' r='6' fill='#8B97A8' /&gt;&#10;        &lt;circle cx='180' cy='140' r='6' fill='#8B97A8' /&gt;&#10;        &lt;circle cx='120' cy='270' r='6' fill='#8B97A8' /&gt;&#10;        &lt;rect x='320' y='30' width='220' height='320' rx='14' fill='#E8EFF8' stroke='#3D7BD9' strokeWidth='2' /&gt;&#10;        &lt;text x='430' y='62' textAnchor='middle' fill='#1E4FA8' fontSize='16' fontWeight='bold'&gt;The map (model)&lt;/text&gt;&#10;        &lt;line x1='350' y1='120' x2='510' y2='120' stroke='#1E4FA8' strokeWidth='4' /&gt;&#10;        &lt;line x1='350' y1='230' x2='510' y2='230' stroke='#1E4FA8' strokeWidth='4' /&gt;&#10;        &lt;line x1='430' y1='100' x2='430' y2='330' stroke='#1E4FA8' strokeWidth='4' /&gt;&#10;        &lt;circle cx='350' cy='120' r='10' fill='#FFC107' /&gt;&#10;        &lt;text x='350' y='100' textAnchor='middle' fill='#4A5568' fontSize='13'&gt;Library&lt;/text&gt;&#10;        &lt;circle cx='510' cy='230' r='10' fill='#FFC107' /&gt;&#10;        &lt;text x='510' y='258' textAnchor='middle' fill='#4A5568' fontSize='13'&gt;Canteen&lt;/text&gt;&#10;        &lt;circle cx='430' cy='330' r='10' fill='#FFC107' /&gt;&#10;        &lt;text x='430' y='356' textAnchor='middle' fill='#4A5568' fontSize='13'&gt;Dorm&lt;/text&gt;&#10;        &lt;polygon points='285,180 300,190 285,200' fill='#3D7BD9' /&gt;&#10;        &lt;line x1='245' y1='190' x2='298' y2='190' stroke='#3D7BD9' strokeWidth='3' /&gt;&#10;      &lt;/svg&gt;&#10;    &lt;/Box&gt;&#10;    &lt;Box style={{ flex: 2, flexDirection: 'column', gap: 16, justifyContent: 'center' }}&gt;&#10;      &lt;Text style={{ fontSize: 22, fontWeight: 'bold', color: '#0E3F8C', lineHeight: 1.35 }}&gt;A model keeps only what matters for a purpose.&lt;/Text&gt;&#10;      &lt;Text style={{ fontSize: 17, color: '#4A5568', lineHeight: 1.6 }}&gt;A map drops buildings and trees to keep roads and landmarks. A class diagram drops code details to keep concepts and relationships.&lt;/Text&gt;&#10;      &lt;Box style={{ padding: '16px 18px', background: '#F7F9FC', borderRadius: 10, border: '1px solid #E5E7EB' }}&gt;&#10;        &lt;Text style={{ fontSize: 15, color: '#4A5568', lineHeight: 1.5 }}&gt;&lt;span style={{ fontWeight: 'bold', color: '#1A2230' }}&gt;Key idea:&lt;/span&gt; there is no &quot;perfect&quot; model — only a model that is useful for the question you are asking.&lt;/Text&gt;&#10;      &lt;/Box&gt;&#10;    &lt;/Box&gt;&#10;  &lt;/Box&gt;&#10;  &lt;Box style={{ height: 40, padding: '0 40px', flexDirection: 'row', alignItems: 'center', justifyContent: 'space-between' }}&gt;&#10;    &lt;Text style={{ fontSize: 13, color: '#8B97A8' }}&gt;ISAD · Fall 2026&lt;/Text&gt;&#10;    &lt;Text style={{ fontSize: 14, color: '#1E4FA8', fontWeight: 'bold' }}&gt;21 / 38&lt;/Text&gt;&#10;  &lt;/Box&gt;&#10;&lt;/Slide&gt;"/>
+        <p:cNvPr id="253" name=""/>
         <p:cNvGrpSpPr/>
         <p:nvPr/>
       </p:nvGrpSpPr>
@@ -9258,7 +9474,10 @@
         </p:spPr>
         <p:txBody>
           <a:bodyPr/>
-          <a:p/>
+          <a:p>
+            <a:pPr/>
+            <a:endParaRPr/>
+          </a:p>
         </p:txBody>
       </p:sp>
       <p:sp>
@@ -9282,7 +9501,10 @@
         </p:spPr>
         <p:txBody>
           <a:bodyPr/>
-          <a:p/>
+          <a:p>
+            <a:pPr/>
+            <a:endParaRPr/>
+          </a:p>
         </p:txBody>
       </p:sp>
       <p:sp>
@@ -9523,7 +9745,10 @@
         </p:spPr>
         <p:txBody>
           <a:bodyPr/>
-          <a:p/>
+          <a:p>
+            <a:pPr/>
+            <a:endParaRPr/>
+          </a:p>
         </p:txBody>
       </p:sp>
       <p:sp>
@@ -9653,7 +9878,7 @@
   <p:cSld>
     <p:spTree>
       <p:nvGrpSpPr>
-        <p:cNvPr id="266" name="" descr="&lt;Slide style={{ background: '#FFFFFF', padding: 0 }}&gt;&#10;  &lt;Box style={{ height: 72, background: '#1E4FA8', padding: '0 40px', flexDirection: 'row', alignItems: 'center', justifyContent: 'space-between' }}&gt;&#10;    &lt;Text style={{ fontSize: 15, color: '#B9CDF0', letterSpacing: 1 }}&gt;ISAD · INFORMATION SYSTEMS ANALYSIS &amp;amp; DESIGN&lt;/Text&gt;&#10;    &lt;Text style={{ fontSize: 15, color: '#B9CDF0' }}&gt;W01 · INTRODUCTION&lt;/Text&gt;&#10;  &lt;/Box&gt;&#10;  &lt;Box style={{ padding: '24px 40px 0 40px' }}&gt;&#10;    &lt;Text style={{ fontSize: 34, fontWeight: 'bold', color: '#0E3F8C' }}&gt;Waterfall vs. Iterative&lt;/Text&gt;&#10;  &lt;/Box&gt;&#10;  &lt;Box style={{ flex: 1, padding: '18px 40px 0 40px', flexDirection: 'row', gap: 28 }}&gt;&#10;    &lt;Box style={{ flex: 3, padding: '22px 24px', background: '#F7F9FC', borderRadius: 12, border: '1px solid #E5E7EB', flexDirection: 'column' }}&gt;&#10;      &lt;Text style={{ fontSize: 20, fontWeight: 'bold', color: '#8B97A8', marginBottom: 12 }}&gt;Waterfall — one long pass&lt;/Text&gt;&#10;      &lt;Box style={{ flexDirection: 'row', alignItems: 'center', gap: 6, flexWrap: 'wrap' }}&gt;&#10;        {['Req', 'Analysis', 'Design', 'Code', 'Test', 'Ship'].map((s, i) =&gt; (&#10;          &lt;Box key={s} style={{ flexDirection: 'row', alignItems: 'center', gap: 6 }}&gt;&#10;            &lt;Box style={{ padding: '10px 14px', borderRadius: 8, background: '#FFFFFF', border: '1px solid #D6DCE5' }}&gt;&#10;              &lt;Text style={{ fontSize: 15, color: '#4A5568', fontWeight: '600' }}&gt;{s}&lt;/Text&gt;&#10;            &lt;/Box&gt;&#10;            {i &lt; 5 ? &lt;Text style={{ fontSize: 18, color: '#8B97A8' }}&gt;→&lt;/Text&gt; : null}&#10;          &lt;/Box&gt;&#10;        ))}&#10;      &lt;/Box&gt;&#10;      &lt;Text style={{ fontSize: 15, color: '#4A5568', lineHeight: 1.55, marginTop: 14 }}&gt;Each step finishes before the next begins. Cheaper to run, but mistakes surface very late.&lt;/Text&gt;&#10;    &lt;/Box&gt;&#10;    &lt;Box style={{ flex: 2, padding: '22px 24px', background: '#0E3F8C', borderRadius: 12, flexDirection: 'column', gap: 12, justifyContent: 'center' }}&gt;&#10;      &lt;Text style={{ fontSize: 20, fontWeight: 'bold', color: '#FFFFFF' }}&gt;Iterative — small loops&lt;/Text&gt;&#10;      &lt;Text style={{ fontSize: 16, color: '#C5D4EA', lineHeight: 1.55 }}&gt;Build a thin slice, get feedback, refine, repeat. Mistakes surface early, while they are cheap.&lt;/Text&gt;&#10;      &lt;Box style={{ padding: '10px 14px', background: '#FFC107', borderRadius: 8, alignSelf: 'flex-start' }}&gt;&#10;        &lt;Text style={{ fontSize: 15, fontWeight: 'bold', color: '#0E3F8C' }}&gt;This course uses this one&lt;/Text&gt;&#10;      &lt;/Box&gt;&#10;    &lt;/Box&gt;&#10;  &lt;/Box&gt;&#10;  &lt;Box style={{ height: 40, padding: '0 40px', flexDirection: 'row', alignItems: 'center', justifyContent: 'space-between' }}&gt;&#10;    &lt;Text style={{ fontSize: 13, color: '#8B97A8' }}&gt;CampusBites will grow milestone by milestone — iteratively.&lt;/Text&gt;&#10;    &lt;Text style={{ fontSize: 14, color: '#1E4FA8', fontWeight: 'bold' }}&gt;22 / 38&lt;/Text&gt;&#10;  &lt;/Box&gt;&#10;&lt;/Slide&gt;"/>
+        <p:cNvPr id="266" name=""/>
         <p:cNvGrpSpPr/>
         <p:nvPr/>
       </p:nvGrpSpPr>
@@ -9686,7 +9911,10 @@
         </p:spPr>
         <p:txBody>
           <a:bodyPr/>
-          <a:p/>
+          <a:p>
+            <a:pPr/>
+            <a:endParaRPr/>
+          </a:p>
         </p:txBody>
       </p:sp>
       <p:sp>
@@ -9710,7 +9938,10 @@
         </p:spPr>
         <p:txBody>
           <a:bodyPr/>
-          <a:p/>
+          <a:p>
+            <a:pPr/>
+            <a:endParaRPr/>
+          </a:p>
         </p:txBody>
       </p:sp>
       <p:sp>
@@ -9846,7 +10077,10 @@
         </p:spPr>
         <p:txBody>
           <a:bodyPr/>
-          <a:p/>
+          <a:p>
+            <a:pPr/>
+            <a:endParaRPr/>
+          </a:p>
         </p:txBody>
       </p:sp>
       <p:sp>
@@ -9912,7 +10146,10 @@
         </p:spPr>
         <p:txBody>
           <a:bodyPr/>
-          <a:p/>
+          <a:p>
+            <a:pPr/>
+            <a:endParaRPr/>
+          </a:p>
         </p:txBody>
       </p:sp>
       <p:sp>
@@ -10013,7 +10250,10 @@
         </p:spPr>
         <p:txBody>
           <a:bodyPr/>
-          <a:p/>
+          <a:p>
+            <a:pPr/>
+            <a:endParaRPr/>
+          </a:p>
         </p:txBody>
       </p:sp>
       <p:sp>
@@ -10114,7 +10354,10 @@
         </p:spPr>
         <p:txBody>
           <a:bodyPr/>
-          <a:p/>
+          <a:p>
+            <a:pPr/>
+            <a:endParaRPr/>
+          </a:p>
         </p:txBody>
       </p:sp>
       <p:sp>
@@ -10215,7 +10458,10 @@
         </p:spPr>
         <p:txBody>
           <a:bodyPr/>
-          <a:p/>
+          <a:p>
+            <a:pPr/>
+            <a:endParaRPr/>
+          </a:p>
         </p:txBody>
       </p:sp>
       <p:sp>
@@ -10316,7 +10562,10 @@
         </p:spPr>
         <p:txBody>
           <a:bodyPr/>
-          <a:p/>
+          <a:p>
+            <a:pPr/>
+            <a:endParaRPr/>
+          </a:p>
         </p:txBody>
       </p:sp>
       <p:sp>
@@ -10417,7 +10666,10 @@
         </p:spPr>
         <p:txBody>
           <a:bodyPr/>
-          <a:p/>
+          <a:p>
+            <a:pPr/>
+            <a:endParaRPr/>
+          </a:p>
         </p:txBody>
       </p:sp>
       <p:sp>
@@ -10513,7 +10765,10 @@
         </p:spPr>
         <p:txBody>
           <a:bodyPr/>
-          <a:p/>
+          <a:p>
+            <a:pPr/>
+            <a:endParaRPr/>
+          </a:p>
         </p:txBody>
       </p:sp>
       <p:sp>
@@ -10611,7 +10866,10 @@
         </p:spPr>
         <p:txBody>
           <a:bodyPr/>
-          <a:p/>
+          <a:p>
+            <a:pPr/>
+            <a:endParaRPr/>
+          </a:p>
         </p:txBody>
       </p:sp>
       <p:sp>
@@ -10729,7 +10987,7 @@
   <p:cSld>
     <p:spTree>
       <p:nvGrpSpPr>
-        <p:cNvPr id="299" name="" descr="&lt;Slide style={{ background: '#0E3F8C', padding: 0 }}&gt;&#10;  &lt;Box style={{ flexDirection: 'row', height: '100%', position: 'relative' }}&gt;&#10;    &lt;Box style={{ position: 'absolute', top: 0, left: 0, right: 0, height: 8, background: '#1E4FA8' }} /&gt;&#10;    &lt;Box style={{ width: 300, justifyContent: 'center', alignItems: 'center', borderRight: '1px solid #2B5793' }}&gt;&#10;      &lt;Text style={{ fontSize: 220, fontWeight: 'bold', color: '#3D7BD9', fontFamily: 'Georgia, serif', lineHeight: 1 }}&gt;05&lt;/Text&gt;&#10;    &lt;/Box&gt;&#10;    &lt;Box style={{ flex: 1, padding: '70px 64px', flexDirection: 'column', justifyContent: 'center' }}&gt;&#10;      &lt;Text style={{ fontSize: 15, color: '#7FA2D6', letterSpacing: 2, marginBottom: 18 }}&gt;PART 1 · LECTURE&lt;/Text&gt;&#10;      &lt;Text style={{ fontSize: 48, fontWeight: 'bold', color: '#FFFFFF', lineHeight: 1.18 }}&gt;The OOAD Roadmap&lt;/Text&gt;&#10;      &lt;Box style={{ width: 64, height: 4, background: '#FFC107', marginTop: 26, marginBottom: 26 }} /&gt;&#10;      &lt;Box style={{ flexDirection: 'column', gap: 12 }}&gt;&#10;        {[&#10;          'Four modules from foundations to patterns',&#10;          'Models → principles → patterns → architecture',&#10;          'Why patterns matter in the first place',&#10;        ].map((t) =&gt; (&#10;          &lt;Box key={t} style={{ flexDirection: 'row', alignItems: 'center', gap: 12 }}&gt;&#10;            &lt;Box style={{ width: 8, height: 8, borderRadius: 4, background: '#3D7BD9' }} /&gt;&#10;            &lt;Text style={{ fontSize: 20, color: '#C5D4EA' }}&gt;{t}&lt;/Text&gt;&#10;          &lt;/Box&gt;&#10;        ))}&#10;      &lt;/Box&gt;&#10;    &lt;/Box&gt;&#10;  &lt;/Box&gt;&#10;&lt;/Slide&gt;"/>
+        <p:cNvPr id="299" name=""/>
         <p:cNvGrpSpPr/>
         <p:nvPr/>
       </p:nvGrpSpPr>
@@ -10762,7 +11020,10 @@
         </p:spPr>
         <p:txBody>
           <a:bodyPr/>
-          <a:p/>
+          <a:p>
+            <a:pPr/>
+            <a:endParaRPr/>
+          </a:p>
         </p:txBody>
       </p:sp>
       <p:sp>
@@ -10802,7 +11063,10 @@
         </p:spPr>
         <p:txBody>
           <a:bodyPr/>
-          <a:p/>
+          <a:p>
+            <a:pPr/>
+            <a:endParaRPr/>
+          </a:p>
         </p:txBody>
       </p:sp>
       <p:sp>
@@ -10931,7 +11195,10 @@
         </p:spPr>
         <p:txBody>
           <a:bodyPr/>
-          <a:p/>
+          <a:p>
+            <a:pPr/>
+            <a:endParaRPr/>
+          </a:p>
         </p:txBody>
       </p:sp>
       <p:sp>
@@ -10957,7 +11224,10 @@
         </p:spPr>
         <p:txBody>
           <a:bodyPr/>
-          <a:p/>
+          <a:p>
+            <a:pPr/>
+            <a:endParaRPr/>
+          </a:p>
         </p:txBody>
       </p:sp>
       <p:sp>
@@ -11018,7 +11288,10 @@
         </p:spPr>
         <p:txBody>
           <a:bodyPr/>
-          <a:p/>
+          <a:p>
+            <a:pPr/>
+            <a:endParaRPr/>
+          </a:p>
         </p:txBody>
       </p:sp>
       <p:sp>
@@ -11079,7 +11352,10 @@
         </p:spPr>
         <p:txBody>
           <a:bodyPr/>
-          <a:p/>
+          <a:p>
+            <a:pPr/>
+            <a:endParaRPr/>
+          </a:p>
         </p:txBody>
       </p:sp>
       <p:sp>
@@ -11138,7 +11414,10 @@
         </p:spPr>
         <p:txBody>
           <a:bodyPr/>
-          <a:p/>
+          <a:p>
+            <a:pPr/>
+            <a:endParaRPr/>
+          </a:p>
         </p:txBody>
       </p:sp>
     </p:spTree>
@@ -11151,7 +11430,7 @@
   <p:cSld>
     <p:spTree>
       <p:nvGrpSpPr>
-        <p:cNvPr id="313" name="" descr="&lt;Slide style={{ background: '#FFFFFF', padding: 0 }}&gt;&#10;  &lt;Box style={{ padding: '26px 40px 8px 40px', flexDirection: 'row', alignItems: 'center', justifyContent: 'space-between' }}&gt;&#10;    &lt;Text style={{ fontSize: 34, fontWeight: 'bold', color: '#0E3F8C' }}&gt;The Course Roadmap — Four Modules&lt;/Text&gt;&#10;    &lt;Text style={{ fontSize: 14, color: '#1E4FA8', fontWeight: 'bold' }}&gt;24 / 38&lt;/Text&gt;&#10;  &lt;/Box&gt;&#10;  &lt;Box style={{ flex: 1, padding: '10px 40px 0 40px', justifyContent: 'center', alignItems: 'center' }}&gt;&#10;    &lt;svg width={1180} height={460} viewBox='0 0 1180 460'&gt;&#10;      &lt;rect x='20' y='30' width='250' height='400' rx='16' fill='#E8EFF8' stroke='#3D7BD9' strokeWidth='2' /&gt;&#10;      &lt;text x='145' y='76' textAnchor='middle' fill='#1E4FA8' fontSize='20' fontWeight='bold'&gt;MODULE A&lt;/text&gt;&#10;      &lt;text x='145' y='130' textAnchor='middle' fill='#0E3F8C' fontSize='28' fontWeight='bold'&gt;Foundations&lt;/text&gt;&#10;      &lt;text x='145' y='170' textAnchor='middle' fill='#8B97A8' fontSize='16'&gt;Weeks 1–3&lt;/text&gt;&#10;      &lt;text x='145' y='240' textAnchor='middle' fill='#4A5568' fontSize='17'&gt;OO concepts&lt;/text&gt;&#10;      &lt;text x='145' y='268' textAnchor='middle' fill='#4A5568' fontSize='17'&gt;UML essentials&lt;/text&gt;&#10;      &lt;text x='145' y='296' textAnchor='middle' fill='#4A5568' fontSize='17'&gt;modelling workflow&lt;/text&gt;&#10;      &lt;rect x='310' y='30' width='250' height='400' rx='16' fill='#F0F5FC' stroke='#1E4FA8' strokeWidth='2' /&gt;&#10;      &lt;text x='435' y='76' textAnchor='middle' fill='#1E4FA8' fontSize='20' fontWeight='bold'&gt;MODULE B&lt;/text&gt;&#10;      &lt;text x='435' y='130' textAnchor='middle' fill='#0E3F8C' fontSize='28' fontWeight='bold'&gt;Analysis&lt;/text&gt;&#10;      &lt;text x='435' y='170' textAnchor='middle' fill='#8B97A8' fontSize='16'&gt;Weeks 4–9&lt;/text&gt;&#10;      &lt;text x='435' y='240' textAnchor='middle' fill='#4A5568' fontSize='17'&gt;use cases&lt;/text&gt;&#10;      &lt;text x='435' y='268' textAnchor='middle' fill='#4A5568' fontSize='17'&gt;domain model&lt;/text&gt;&#10;      &lt;text x='435' y='296' textAnchor='middle' fill='#4A5568' fontSize='17'&gt;behavior models&lt;/text&gt;&#10;      &lt;rect x='600' y='30' width='250' height='400' rx='16' fill='#E8EFF8' stroke='#1E4FA8' strokeWidth='2' /&gt;&#10;      &lt;text x='725' y='76' textAnchor='middle' fill='#1E4FA8' fontSize='20' fontWeight='bold'&gt;MODULE C&lt;/text&gt;&#10;      &lt;text x='725' y='130' textAnchor='middle' fill='#0E3F8C' fontSize='28' fontWeight='bold'&gt;Design&lt;/text&gt;&#10;      &lt;text x='725' y='170' textAnchor='middle' fill='#8B97A8' fontSize='16'&gt;Weeks 10–15&lt;/text&gt;&#10;      &lt;text x='725' y='240' textAnchor='middle' fill='#4A5568' fontSize='17'&gt;GRASP &amp;amp;amp; SOLID&lt;/text&gt;&#10;      &lt;text x='725' y='268' textAnchor='middle' fill='#4A5568' fontSize='17'&gt;GoF patterns&lt;/text&gt;&#10;      &lt;text x='725' y='296' textAnchor='middle' fill='#4A5568' fontSize='17'&gt;design class diagram&lt;/text&gt;&#10;      &lt;rect x='890' y='30' width='270' height='400' rx='16' fill='#0E3F8C' /&gt;&#10;      &lt;text x='1025' y='76' textAnchor='middle' fill='#FFC107' fontSize='20' fontWeight='bold'&gt;MODULE D&lt;/text&gt;&#10;      &lt;text x='1025' y='130' textAnchor='middle' fill='#FFFFFF' fontSize='28' fontWeight='bold'&gt;Wrap-up&lt;/text&gt;&#10;      &lt;text x='1025' y='170' textAnchor='middle' fill='#B9CDF0' fontSize='16'&gt;Week 16&lt;/text&gt;&#10;      &lt;text x='1025' y='240' textAnchor='middle' fill='#C5D4EA' fontSize='17'&gt;architecture&lt;/text&gt;&#10;      &lt;text x='1025' y='268' textAnchor='middle' fill='#C5D4EA' fontSize='17'&gt;MVC &amp;amp;amp; layers&lt;/text&gt;&#10;      &lt;text x='1025' y='296' textAnchor='middle' fill='#C5D4EA' fontSize='17'&gt;final defense&lt;/text&gt;&#10;      &lt;polygon points='282,230 300,230 300,215 312,230 300,245 300,230' fill='#3D7BD9' /&gt;&#10;      &lt;polygon points='572,230 590,230 590,215 602,230 590,245 590,230' fill='#3D7BD9' /&gt;&#10;      &lt;polygon points='862,230 880,230 880,215 892,230 880,245 880,230' fill='#3D7BD9' /&gt;&#10;    &lt;/svg&gt;&#10;  &lt;/Box&gt;&#10;  &lt;Box style={{ height: 52, background: '#0E3F8C', padding: '0 40px', flexDirection: 'row', alignItems: 'center', justifyContent: 'center' }}&gt;&#10;    &lt;Text style={{ fontSize: 17, color: '#FFFFFF', fontWeight: '600' }}&gt;Every module feeds the running project CampusBites.&lt;/Text&gt;&#10;  &lt;/Box&gt;&#10;&lt;/Slide&gt;"/>
+        <p:cNvPr id="313" name=""/>
         <p:cNvGrpSpPr/>
         <p:nvPr/>
       </p:nvGrpSpPr>
@@ -11184,7 +11463,10 @@
         </p:spPr>
         <p:txBody>
           <a:bodyPr/>
-          <a:p/>
+          <a:p>
+            <a:pPr/>
+            <a:endParaRPr/>
+          </a:p>
         </p:txBody>
       </p:sp>
       <p:sp>
@@ -11309,7 +11591,10 @@
         </p:spPr>
         <p:txBody>
           <a:bodyPr/>
-          <a:p/>
+          <a:p>
+            <a:pPr/>
+            <a:endParaRPr/>
+          </a:p>
         </p:txBody>
       </p:sp>
       <p:sp>
@@ -11357,7 +11642,7 @@
   <p:cSld>
     <p:spTree>
       <p:nvGrpSpPr>
-        <p:cNvPr id="320" name="" descr="&lt;Slide style={{ background: '#FFFFFF', padding: 0 }}&gt;&#10;  &lt;Box style={{ height: 72, background: '#1E4FA8', padding: '0 40px', flexDirection: 'row', alignItems: 'center', justifyContent: 'space-between' }}&gt;&#10;    &lt;Text style={{ fontSize: 15, color: '#B9CDF0', letterSpacing: 1 }}&gt;ISAD · INFORMATION SYSTEMS ANALYSIS &amp;amp; DESIGN&lt;/Text&gt;&#10;    &lt;Text style={{ fontSize: 15, color: '#B9CDF0' }}&gt;W01 · INTRODUCTION&lt;/Text&gt;&#10;  &lt;/Box&gt;&#10;  &lt;Box style={{ padding: '20px 40px 4px 40px', flexDirection: 'row', alignItems: 'center', justifyContent: 'space-between' }}&gt;&#10;    &lt;Text style={{ fontSize: 33, fontWeight: 'bold', color: '#0E3F8C' }}&gt;Semester Calendar — 16 Weeks at a Glance&lt;/Text&gt;&#10;    &lt;Text style={{ fontSize: 14, color: '#1E4FA8', fontWeight: 'bold' }}&gt;25 / 38&lt;/Text&gt;&#10;  &lt;/Box&gt;&#10;  &lt;Box style={{ flex: 1, padding: '10px 40px 12px 40px' }}&gt;&#10;    &lt;Table&#10;      style={{ width: '100%', height: '100%' }}&#10;      defaultTextStyle={{ fontSize: 13, textAlign: 'left', color: '#1A2230' }}&#10;      defaultCellStyle={{&#10;        border: {&#10;          left: { width: 1, color: '#E5E7EB' },&#10;          right: { width: 1, color: '#E5E7EB' },&#10;          top: { width: 1, color: '#E5E7EB' },&#10;          bottom: { width: 1, color: '#E5E7EB' },&#10;        },&#10;      }}&#10;      cells={[&#10;        [&#10;          { text: 'Wk', textStyle: { bold: true, color: '#FFFFFF', textAlign: 'center' }, cellStyle: { background: { color: '#0E3F8C' } } },&#10;          { text: 'Module', textStyle: { bold: true, color: '#FFFFFF', textAlign: 'center' }, cellStyle: { background: { color: '#0E3F8C' } } },&#10;          { text: 'Topic (lecture → lab)', textStyle: { bold: true, color: '#FFFFFF', textAlign: 'left' }, cellStyle: { background: { color: '#0E3F8C' } } },&#10;          { text: 'Milestone / review', textStyle: { bold: true, color: '#FFFFFF', textAlign: 'left' }, cellStyle: { background: { color: '#0E3F8C' } } },&#10;        ],&#10;        [&#10;          { text: 'W1', textStyle: { bold: true, color: '#1E4FA8', textAlign: 'center' }, cellStyle: { background: { color: '#F0F5FC' } } },&#10;          { text: 'A', textStyle: { bold: true, color: '#1E4FA8', textAlign: 'center' }, cellStyle: { background: { color: '#F0F5FC' } } },&#10;          { text: 'Introduction: systems, analysts &amp; OOAD roadmap', textStyle: { color: '#4A5568' }, cellStyle: { background: { color: '#F0F5FC' } } },&#10;          { text: 'Course kickoff', textStyle: { color: '#8B97A8' }, cellStyle: { background: { color: '#F0F5FC' } } },&#10;        ],&#10;        [&#10;          { text: 'W2', textStyle: { bold: true, color: '#1E4FA8', textAlign: 'center' } },&#10;          { text: 'A', textStyle: { bold: true, color: '#1E4FA8', textAlign: 'center' } },&#10;          { text: 'OO foundations · project kickoff', textStyle: { color: '#4A5568' } },&#10;          { text: 'M0 — Fri Sep 11', textStyle: { bold: true, color: '#D9534F' } },&#10;        ],&#10;        [&#10;          { text: 'W3', textStyle: { bold: true, color: '#1E4FA8', textAlign: 'center' }, cellStyle: { background: { color: '#F7F9FC' } } },&#10;          { text: 'A', textStyle: { bold: true, color: '#1E4FA8', textAlign: 'center' }, cellStyle: { background: { color: '#F7F9FC' } } },&#10;          { text: 'UML essentials &amp; modeling workflow', textStyle: { color: '#4A5568' }, cellStyle: { background: { color: '#F7F9FC' } } },&#10;          { text: '—', textStyle: { color: '#8B97A8' }, cellStyle: { background: { color: '#F7F9FC' } } },&#10;        ],&#10;        [&#10;          { text: 'W4', textStyle: { bold: true, color: '#3D7BD9', textAlign: 'center' } },&#10;          { text: 'B', textStyle: { bold: true, color: '#3D7BD9', textAlign: 'center' } },&#10;          { text: 'Requirements &amp; use case modeling', textStyle: { color: '#4A5568' } },&#10;          { text: 'Requirements pack issued', textStyle: { color: '#8B97A8' } },&#10;        ],&#10;        [&#10;          { text: 'W5', textStyle: { bold: true, color: '#3D7BD9', textAlign: 'center' }, cellStyle: { background: { color: '#F7F9FC' } } },&#10;          { text: 'B', textStyle: { bold: true, color: '#3D7BD9', textAlign: 'center' }, cellStyle: { background: { color: '#F7F9FC' } } },&#10;          { text: 'Use case specification &amp; scenarios', textStyle: { color: '#4A5568' }, cellStyle: { background: { color: '#F7F9FC' } } },&#10;          { text: 'M1 — Sun Oct 4', textStyle: { bold: true, color: '#D9534F' }, cellStyle: { background: { color: '#F7F9FC' } } },&#10;        ],&#10;        [&#10;          { text: 'W6', textStyle: { bold: true, color: '#3D7BD9', textAlign: 'center' } },&#10;          { text: 'B', textStyle: { bold: true, color: '#3D7BD9', textAlign: 'center' } },&#10;          { text: 'Domain modeling: classes &amp; attributes', textStyle: { color: '#4A5568' } },&#10;          { text: 'ΔC1 announced', textStyle: { color: '#8B97A8' } },&#10;        ],&#10;        [&#10;          { text: 'W7', textStyle: { bold: true, color: '#3D7BD9', textAlign: 'center' }, cellStyle: { background: { color: '#F7F9FC' } } },&#10;          { text: 'B', textStyle: { bold: true, color: '#3D7BD9', textAlign: 'center' }, cellStyle: { background: { color: '#F7F9FC' } } },&#10;          { text: 'Domain relationships (association, aggregation)', textStyle: { color: '#4A5568' }, cellStyle: { background: { color: '#F7F9FC' } } },&#10;          { text: '—', textStyle: { color: '#8B97A8' }, cellStyle: { background: { color: '#F7F9FC' } } },&#10;        ],&#10;        [&#10;          { text: 'W8', textStyle: { bold: true, color: '#3D7BD9', textAlign: 'center' } },&#10;          { text: 'B', textStyle: { bold: true, color: '#3D7BD9', textAlign: 'center' } },&#10;          { text: 'Behavior modeling I: sequence diagrams', textStyle: { color: '#4A5568' } },&#10;          { text: 'M2 — Sun Oct 25', textStyle: { bold: true, color: '#D9534F' } },&#10;        ],&#10;        [&#10;          { text: 'W9', textStyle: { bold: true, color: '#3D7BD9', textAlign: 'center' }, cellStyle: { background: { color: '#F7F9FC' } } },&#10;          { text: 'B', textStyle: { bold: true, color: '#3D7BD9', textAlign: 'center' }, cellStyle: { background: { color: '#F7F9FC' } } },&#10;          { text: 'Behavior modeling II: state &amp; activity', textStyle: { color: '#4A5568' }, cellStyle: { background: { color: '#F7F9FC' } } },&#10;          { text: 'Mid-term review', textStyle: { bold: true, color: '#1E4FA8' }, cellStyle: { background: { color: '#F7F9FC' } } },&#10;        ],&#10;        [&#10;          { text: 'W10', textStyle: { bold: true, color: '#1E4FA8', textAlign: 'center' } },&#10;          { text: 'C', textStyle: { bold: true, color: '#1E4FA8', textAlign: 'center' } },&#10;          { text: 'From analysis to design: design class diagram', textStyle: { color: '#4A5568' } },&#10;          { text: 'ΔC2 announced', textStyle: { color: '#8B97A8' } },&#10;        ],&#10;        [&#10;          { text: 'W11', textStyle: { bold: true, color: '#1E4FA8', textAlign: 'center' }, cellStyle: { background: { color: '#F7F9FC' } } },&#10;          { text: 'C', textStyle: { bold: true, color: '#1E4FA8', textAlign: 'center' }, cellStyle: { background: { color: '#F7F9FC' } } },&#10;          { text: 'Design principles I: GRASP', textStyle: { color: '#4A5568' }, cellStyle: { background: { color: '#F7F9FC' } } },&#10;          { text: '—', textStyle: { color: '#8B97A8' }, cellStyle: { background: { color: '#F7F9FC' } } },&#10;        ],&#10;        [&#10;          { text: 'W12', textStyle: { bold: true, color: '#1E4FA8', textAlign: 'center' } },&#10;          { text: 'C', textStyle: { bold: true, color: '#1E4FA8', textAlign: 'center' } },&#10;          { text: 'Design principles II: SOLID', textStyle: { color: '#4A5568' } },&#10;          { text: 'M3 — Sun Nov 22', textStyle: { bold: true, color: '#D9534F' } },&#10;        ],&#10;        [&#10;          { text: 'W13', textStyle: { bold: true, color: '#1E4FA8', textAlign: 'center' }, cellStyle: { background: { color: '#F7F9FC' } } },&#10;          { text: 'C', textStyle: { bold: true, color: '#1E4FA8', textAlign: 'center' }, cellStyle: { background: { color: '#F7F9FC' } } },&#10;          { text: 'Design patterns I: creational', textStyle: { color: '#4A5568' }, cellStyle: { background: { color: '#F7F9FC' } } },&#10;          { text: 'ΔC3 announced', textStyle: { color: '#8B97A8' }, cellStyle: { background: { color: '#F7F9FC' } } },&#10;        ],&#10;        [&#10;          { text: 'W14', textStyle: { bold: true, color: '#1E4FA8', textAlign: 'center' } },&#10;          { text: 'C', textStyle: { bold: true, color: '#1E4FA8', textAlign: 'center' } },&#10;          { text: 'Design patterns II: structural', textStyle: { color: '#4A5568' } },&#10;          { text: 'M4 — Sun Dec 6', textStyle: { bold: true, color: '#D9534F' } },&#10;        ],&#10;        [&#10;          { text: 'W15', textStyle: { bold: true, color: '#1E4FA8', textAlign: 'center' }, cellStyle: { background: { color: '#F7F9FC' } } },&#10;          { text: 'C', textStyle: { bold: true, color: '#1E4FA8', textAlign: 'center' }, cellStyle: { background: { color: '#F7F9FC' } } },&#10;          { text: 'Design patterns III: behavioral', textStyle: { color: '#4A5568' }, cellStyle: { background: { color: '#F7F9FC' } } },&#10;          { text: 'Defense rehearsal', textStyle: { color: '#8B97A8' }, cellStyle: { background: { color: '#F7F9FC' } } },&#10;        ],&#10;        [&#10;          { text: 'W16', textStyle: { bold: true, color: '#FFC107', textAlign: 'center' }, cellStyle: { background: { color: '#0E3F8C' } } },&#10;          { text: 'D', textStyle: { bold: true, color: '#FFC107', textAlign: 'center' }, cellStyle: { background: { color: '#0E3F8C' } } },&#10;          { text: 'Architecture patterns · course review', textStyle: { color: '#C5D4EA' }, cellStyle: { background: { color: '#0E3F8C' } } },&#10;          { text: 'Final defense + M5 — Dec 20', textStyle: { bold: true, color: '#FFC107' }, cellStyle: { background: { color: '#0E3F8C' } } },&#10;        ],&#10;      ]}&#10;    /&gt;&#10;  &lt;/Box&gt;&#10;  &lt;Box style={{ height: 40, padding: '0 40px', flexDirection: 'row', alignItems: 'center', justifyContent: 'space-between' }}&gt;&#10;    &lt;Text style={{ fontSize: 13, color: '#8B97A8' }}&gt;Module A · Foundations (W1–3) → B · Analysis (W4–9) → C · Design (W10–15) → D · Wrap-up (W16)&lt;/Text&gt;&#10;    &lt;Text style={{ fontSize: 14, color: '#1E4FA8', fontWeight: 'bold' }}&gt;25 / 38&lt;/Text&gt;&#10;  &lt;/Box&gt;&#10;&lt;/Slide&gt;"/>
+        <p:cNvPr id="320" name=""/>
         <p:cNvGrpSpPr/>
         <p:nvPr/>
       </p:nvGrpSpPr>
@@ -11390,7 +11675,10 @@
         </p:spPr>
         <p:txBody>
           <a:bodyPr/>
-          <a:p/>
+          <a:p>
+            <a:pPr/>
+            <a:endParaRPr/>
+          </a:p>
         </p:txBody>
       </p:sp>
       <p:sp>
@@ -11414,7 +11702,10 @@
         </p:spPr>
         <p:txBody>
           <a:bodyPr/>
-          <a:p/>
+          <a:p>
+            <a:pPr/>
+            <a:endParaRPr/>
+          </a:p>
         </p:txBody>
       </p:sp>
       <p:sp>
@@ -14575,7 +14866,7 @@
   <p:cSld>
     <p:spTree>
       <p:nvGrpSpPr>
-        <p:cNvPr id="330" name="" descr="&lt;Slide style={{ background: '#FFFFFF', padding: 0 }}&gt;&#10;  &lt;Box style={{ height: 72, background: '#1E4FA8', padding: '0 40px', flexDirection: 'row', alignItems: 'center', justifyContent: 'space-between' }}&gt;&#10;    &lt;Text style={{ fontSize: 15, color: '#B9CDF0', letterSpacing: 1 }}&gt;ISAD · INFORMATION SYSTEMS ANALYSIS &amp;amp; DESIGN&lt;/Text&gt;&#10;    &lt;Text style={{ fontSize: 15, color: '#B9CDF0' }}&gt;W01 · INTRODUCTION&lt;/Text&gt;&#10;  &lt;/Box&gt;&#10;  &lt;Box style={{ padding: '24px 40px 0 40px' }}&gt;&#10;    &lt;Text style={{ fontSize: 34, fontWeight: 'bold', color: '#0E3F8C' }}&gt;From Models to Principles to Patterns&lt;/Text&gt;&#10;  &lt;/Box&gt;&#10;  &lt;Box style={{ flex: 1, padding: '18px 40px 0 40px', flexDirection: 'row', gap: 28 }}&gt;&#10;    &lt;Box style={{ flex: 3, justifyContent: 'center', alignItems: 'center' }}&gt;&#10;      &lt;svg width={540} height={420} viewBox='0 0 540 420'&gt;&#10;        &lt;rect x='120' y='20' width='300' height='70' rx='12' fill='#E8EFF8' stroke='#3D7BD9' strokeWidth='2' /&gt;&#10;        &lt;text x='270' y='50' textAnchor='middle' fill='#0E3F8C' fontSize='21' fontWeight='bold'&gt;Analysis Models&lt;/text&gt;&#10;        &lt;text x='270' y='74' textAnchor='middle' fill='#8B97A8' fontSize='14'&gt;describe the problem&lt;/text&gt;&#10;        &lt;line x1='270' y1='90' x2='270' y2='120' stroke='#3D7BD9' strokeWidth='3' /&gt;&#10;        &lt;polygon points='263,115 270,128 277,115' fill='#3D7BD9' /&gt;&#10;        &lt;rect x='120' y='128' width='300' height='70' rx='12' fill='#F0F5FC' stroke='#1E4FA8' strokeWidth='2' /&gt;&#10;        &lt;text x='270' y='158' textAnchor='middle' fill='#0E3F8C' fontSize='21' fontWeight='bold'&gt;GRASP &amp;amp;amp; SOLID&lt;/text&gt;&#10;        &lt;text x='270' y='182' textAnchor='middle' fill='#8B97A8' fontSize='14'&gt;principles for good design&lt;/text&gt;&#10;        &lt;line x1='270' y1='198' x2='270' y2='228' stroke='#3D7BD9' strokeWidth='3' /&gt;&#10;        &lt;polygon points='263,223 270,236 277,223' fill='#3D7BD9' /&gt;&#10;        &lt;rect x='120' y='236' width='300' height='70' rx='12' fill='#E8EFF8' stroke='#1E4FA8' strokeWidth='2' /&gt;&#10;        &lt;text x='270' y='266' textAnchor='middle' fill='#0E3F8C' fontSize='21' fontWeight='bold'&gt;GoF Patterns&lt;/text&gt;&#10;        &lt;text x='270' y='290' textAnchor='middle' fill='#8B97A8' fontSize='14'&gt;reusable solutions&lt;/text&gt;&#10;        &lt;line x1='270' y1='306' x2='270' y2='336' stroke='#3D7BD9' strokeWidth='3' /&gt;&#10;        &lt;polygon points='263,331 270,344 277,331' fill='#3D7BD9' /&gt;&#10;        &lt;rect x='120' y='344' width='300' height='70' rx='12' fill='#0E3F8C' /&gt;&#10;        &lt;text x='270' y='374' textAnchor='middle' fill='#FFFFFF' fontSize='21' fontWeight='bold'&gt;Architecture&lt;/text&gt;&#10;        &lt;text x='270' y='398' textAnchor='middle' fill='#B9CDF0' fontSize='14'&gt;the whole structure&lt;/text&gt;&#10;      &lt;/svg&gt;&#10;    &lt;/Box&gt;&#10;    &lt;Box style={{ flex: 2, flexDirection: 'column', gap: 14, justifyContent: 'center' }}&gt;&#10;      {[&#10;        ['First you describe', 'Analysis models capture what the system must do, in language stakeholders understand.'],&#10;        ['Then you decide', 'Principles (GRASP, SOLID) guide how responsibilities are assigned — not by accident, but by reason.'],&#10;        ['Then you reuse', 'Design patterns are proven answers to recurring problems. You learn to recognise, then apply them.'],&#10;        ['Finally you assemble', 'Architecture puts the pieces together — MVC, layers, and how they talk.'],&#10;      ].map(([t, d], i) =&gt; (&#10;        &lt;Box key={t} style={{ flexDirection: 'row', gap: 12, alignItems: 'flex-start' }}&gt;&#10;          &lt;Box style={{ width: 28, height: 28, borderRadius: 14, background: i === 3 ? '#0E3F8C' : '#E8EFF8', justifyContent: 'center', alignItems: 'center' }}&gt;&#10;            &lt;Text style={{ fontSize: 15, fontWeight: 'bold', color: i === 3 ? '#FFFFFF' : '#1E4FA8' }}&gt;{i + 1}&lt;/Text&gt;&#10;          &lt;/Box&gt;&#10;          &lt;Box style={{ flexDirection: 'column', gap: 3 }}&gt;&#10;            &lt;Text style={{ fontSize: 17, fontWeight: 'bold', color: '#1A2230' }}&gt;{t}&lt;/Text&gt;&#10;            &lt;Text style={{ fontSize: 14, color: '#4A5568', lineHeight: 1.5 }}&gt;{d}&lt;/Text&gt;&#10;          &lt;/Box&gt;&#10;        &lt;/Box&gt;&#10;      ))}&#10;    &lt;/Box&gt;&#10;  &lt;/Box&gt;&#10;  &lt;Box style={{ height: 40, padding: '0 40px', flexDirection: 'row', alignItems: 'center', justifyContent: 'space-between' }}&gt;&#10;    &lt;Text style={{ fontSize: 13, color: '#8B97A8' }}&gt;ISAD · Fall 2026&lt;/Text&gt;&#10;    &lt;Text style={{ fontSize: 14, color: '#1E4FA8', fontWeight: 'bold' }}&gt;26 / 38&lt;/Text&gt;&#10;  &lt;/Box&gt;&#10;&lt;/Slide&gt;"/>
+        <p:cNvPr id="330" name=""/>
         <p:cNvGrpSpPr/>
         <p:nvPr/>
       </p:nvGrpSpPr>
@@ -14608,7 +14899,10 @@
         </p:spPr>
         <p:txBody>
           <a:bodyPr/>
-          <a:p/>
+          <a:p>
+            <a:pPr/>
+            <a:endParaRPr/>
+          </a:p>
         </p:txBody>
       </p:sp>
       <p:sp>
@@ -14632,7 +14926,10 @@
         </p:spPr>
         <p:txBody>
           <a:bodyPr/>
-          <a:p/>
+          <a:p>
+            <a:pPr/>
+            <a:endParaRPr/>
+          </a:p>
         </p:txBody>
       </p:sp>
       <p:sp>
@@ -14794,7 +15091,10 @@
         </p:spPr>
         <p:txBody>
           <a:bodyPr/>
-          <a:p/>
+          <a:p>
+            <a:pPr/>
+            <a:endParaRPr/>
+          </a:p>
         </p:txBody>
       </p:sp>
       <p:sp>
@@ -14927,7 +15227,10 @@
         </p:spPr>
         <p:txBody>
           <a:bodyPr/>
-          <a:p/>
+          <a:p>
+            <a:pPr/>
+            <a:endParaRPr/>
+          </a:p>
         </p:txBody>
       </p:sp>
       <p:sp>
@@ -15060,7 +15363,10 @@
         </p:spPr>
         <p:txBody>
           <a:bodyPr/>
-          <a:p/>
+          <a:p>
+            <a:pPr/>
+            <a:endParaRPr/>
+          </a:p>
         </p:txBody>
       </p:sp>
       <p:sp>
@@ -15193,7 +15499,10 @@
         </p:spPr>
         <p:txBody>
           <a:bodyPr/>
-          <a:p/>
+          <a:p>
+            <a:pPr/>
+            <a:endParaRPr/>
+          </a:p>
         </p:txBody>
       </p:sp>
       <p:sp>
@@ -15383,7 +15692,7 @@
   <p:cSld>
     <p:spTree>
       <p:nvGrpSpPr>
-        <p:cNvPr id="355" name="" descr="&lt;Slide style={{ background: '#FFFFFF', padding: 0 }}&gt;&#10;  &lt;Box style={{ height: 72, background: '#1E4FA8', padding: '0 40px', flexDirection: 'row', alignItems: 'center', justifyContent: 'space-between' }}&gt;&#10;    &lt;Text style={{ fontSize: 15, color: '#B9CDF0', letterSpacing: 1 }}&gt;ISAD · INFORMATION SYSTEMS ANALYSIS &amp;amp; DESIGN&lt;/Text&gt;&#10;    &lt;Text style={{ fontSize: 15, color: '#B9CDF0' }}&gt;W01 · INTRODUCTION&lt;/Text&gt;&#10;  &lt;/Box&gt;&#10;  &lt;Box style={{ padding: '24px 40px 0 40px' }}&gt;&#10;    &lt;Text style={{ fontSize: 34, fontWeight: 'bold', color: '#0E3F8C' }}&gt;Why Patterns Matter — A Teaser&lt;/Text&gt;&#10;  &lt;/Box&gt;&#10;  &lt;Box style={{ flex: 1, padding: '18px 40px 0 40px', flexDirection: 'row', gap: 28 }}&gt;&#10;    &lt;Box style={{ flex: 3, flexDirection: 'column', gap: 14 }}&gt;&#10;      &lt;Box style={{ flex: 1, padding: '18px 20px', background: '#FDF3F3', borderRadius: 12, border: '1px solid #D9534F', flexDirection: 'column' }}&gt;&#10;        &lt;Box style={{ flexDirection: 'row', alignItems: 'center', gap: 10, marginBottom: 10 }}&gt;&#10;          &lt;FAIcon name='times-circle' style={{ fill: '#D9534F', width: 22, height: 22 }} /&gt;&#10;          &lt;Text style={{ fontSize: 17, fontWeight: 'bold', color: '#D9534F' }}&gt;Adding a payment type = editing the if-else chain&lt;/Text&gt;&#10;        &lt;/Box&gt;&#10;        &lt;CodeBlock theme='one-dark-pro' code={`if type = CARD    -&gt; chargeCard(order)&#10;if type = WECHAT  -&gt; chargeWechat(order)&#10;if type = ALIPAY  -&gt; chargeAlipay(order)&#10;otherwise         -&gt; refuse: no such type`} language='text' width={440} fontSize={13} /&gt;&#10;      &lt;/Box&gt;&#10;    &lt;/Box&gt;&#10;    &lt;Box style={{ flex: 2, padding: '24px 22px', background: '#0E3F8C', borderRadius: 12, flexDirection: 'column', justifyContent: 'center', gap: 14 }}&gt;&#10;      &lt;FAIcon name='check-circle' style={{ fill: '#FFC107', width: 34, height: 34 }} /&gt;&#10;      &lt;Text style={{ fontSize: 21, fontWeight: 'bold', color: '#FFFFFF', lineHeight: 1.35 }}&gt;A pattern turns &quot;many if-else branches&quot; into &quot;one stable line&quot;.&lt;/Text&gt;&#10;      &lt;Text style={{ fontSize: 16, color: '#C5D4EA', lineHeight: 1.55 }}&gt;New payment types plug in without touching existing code. This is what we train all semester — and it is what employers ask about.&lt;/Text&gt;&#10;    &lt;/Box&gt;&#10;  &lt;/Box&gt;&#10;  &lt;Box style={{ height: 40, padding: '0 40px', flexDirection: 'row', alignItems: 'center', justifyContent: 'space-between' }}&gt;&#10;    &lt;Text style={{ fontSize: 13, color: '#8B97A8' }}&gt;Full treatment in Weeks 13–15. Today we only see the destination.&lt;/Text&gt;&#10;    &lt;Text style={{ fontSize: 14, color: '#1E4FA8', fontWeight: 'bold' }}&gt;27 / 38&lt;/Text&gt;&#10;  &lt;/Box&gt;&#10;&lt;/Slide&gt;"/>
+        <p:cNvPr id="355" name=""/>
         <p:cNvGrpSpPr/>
         <p:nvPr/>
       </p:nvGrpSpPr>
@@ -15416,7 +15725,10 @@
         </p:spPr>
         <p:txBody>
           <a:bodyPr/>
-          <a:p/>
+          <a:p>
+            <a:pPr/>
+            <a:endParaRPr/>
+          </a:p>
         </p:txBody>
       </p:sp>
       <p:sp>
@@ -15440,7 +15752,10 @@
         </p:spPr>
         <p:txBody>
           <a:bodyPr/>
-          <a:p/>
+          <a:p>
+            <a:pPr/>
+            <a:endParaRPr/>
+          </a:p>
         </p:txBody>
       </p:sp>
       <p:sp>
@@ -15576,7 +15891,10 @@
         </p:spPr>
         <p:txBody>
           <a:bodyPr/>
-          <a:p/>
+          <a:p>
+            <a:pPr/>
+            <a:endParaRPr/>
+          </a:p>
         </p:txBody>
       </p:sp>
       <p:pic>
@@ -15668,7 +15986,10 @@
         </p:spPr>
         <p:txBody>
           <a:bodyPr/>
-          <a:p/>
+          <a:p>
+            <a:pPr/>
+            <a:endParaRPr/>
+          </a:p>
         </p:txBody>
       </p:sp>
       <p:pic>
@@ -15869,7 +16190,10 @@
         </p:spPr>
         <p:txBody>
           <a:bodyPr/>
-          <a:p/>
+          <a:p>
+            <a:pPr/>
+            <a:endParaRPr/>
+          </a:p>
         </p:txBody>
       </p:sp>
       <p:sp>
@@ -15918,7 +16242,7 @@
   <p:cSld>
     <p:spTree>
       <p:nvGrpSpPr>
-        <p:cNvPr id="372" name="" descr="&lt;Slide style={{ background: '#FFFFFF', padding: 0 }}&gt;&#10;  &lt;Box style={{ height: 72, background: '#1E4FA8', padding: '0 40px', flexDirection: 'row', alignItems: 'center', justifyContent: 'space-between' }}&gt;&#10;    &lt;Text style={{ fontSize: 15, color: '#B9CDF0', letterSpacing: 1 }}&gt;ISAD · INFORMATION SYSTEMS ANALYSIS &amp;amp; DESIGN&lt;/Text&gt;&#10;    &lt;Text style={{ fontSize: 15, color: '#B9CDF0' }}&gt;W01 · INTRODUCTION&lt;/Text&gt;&#10;  &lt;/Box&gt;&#10;  &lt;Box style={{ padding: '24px 40px 0 40px' }}&gt;&#10;    &lt;Text style={{ fontSize: 34, fontWeight: 'bold', color: '#0E3F8C' }}&gt;How This Course Relates to SE1&lt;/Text&gt;&#10;  &lt;/Box&gt;&#10;  &lt;Box style={{ flex: 1, padding: '18px 40px 0 40px', flexDirection: 'column', gap: 16 }}&gt;&#10;    &lt;Box style={{ flex: 1, padding: '20px 24px', background: '#F7F9FC', borderRadius: 12, border: '1px solid #E5E7EB', flexDirection: 'column', gap: 10, justifyContent: 'center' }}&gt;&#10;      &lt;Box style={{ flexDirection: 'row', alignItems: 'center', gap: 10 }}&gt;&#10;        &lt;FAIcon name='book' style={{ fill: '#8B97A8', width: 24, height: 24 }} /&gt;&#10;        &lt;Text style={{ fontSize: 20, fontWeight: 'bold', color: '#4A5568' }}&gt;SE1 — the whole landscape&lt;/Text&gt;&#10;      &lt;/Box&gt;&#10;      &lt;Text style={{ fontSize: 16, color: '#4A5568', lineHeight: 1.55 }}&gt;You walked the full life cycle: process models, agile, requirements, analysis, design, testing, architecture — one overview of everything.&lt;/Text&gt;&#10;    &lt;/Box&gt;&#10;    &lt;Box style={{ flex: 1, padding: '20px 24px', background: '#0E3F8C', borderRadius: 12, flexDirection: 'column', gap: 10, justifyContent: 'center' }}&gt;&#10;      &lt;Box style={{ flexDirection: 'row', alignItems: 'center', gap: 10 }}&gt;&#10;        &lt;FAIcon name='search' style={{ fill: '#FFC107', width: 24, height: 24 }} /&gt;&#10;        &lt;Text style={{ fontSize: 20, fontWeight: 'bold', color: '#FFFFFF' }}&gt;This course — the deep dive&lt;/Text&gt;&#10;      &lt;/Box&gt;&#10;      &lt;Text style={{ fontSize: 16, color: '#C5D4EA', lineHeight: 1.55 }}&gt;We zoom into analysis &amp;amp; design and go deep: use cases, domain models, sequence diagrams, GRASP, SOLID and the GoF patterns — the skills that separate analysts from coders.&lt;/Text&gt;&#10;    &lt;/Box&gt;&#10;  &lt;/Box&gt;&#10;  &lt;Box style={{ height: 40, padding: '0 40px', flexDirection: 'row', alignItems: 'center', justifyContent: 'space-between' }}&gt;&#10;    &lt;Text style={{ fontSize: 13, color: '#8B97A8' }}&gt;ISAD · Fall 2026&lt;/Text&gt;&#10;    &lt;Text style={{ fontSize: 14, color: '#1E4FA8', fontWeight: 'bold' }}&gt;28 / 38&lt;/Text&gt;&#10;  &lt;/Box&gt;&#10;&lt;/Slide&gt;"/>
+        <p:cNvPr id="372" name=""/>
         <p:cNvGrpSpPr/>
         <p:nvPr/>
       </p:nvGrpSpPr>
@@ -15951,7 +16275,10 @@
         </p:spPr>
         <p:txBody>
           <a:bodyPr/>
-          <a:p/>
+          <a:p>
+            <a:pPr/>
+            <a:endParaRPr/>
+          </a:p>
         </p:txBody>
       </p:sp>
       <p:sp>
@@ -15975,7 +16302,10 @@
         </p:spPr>
         <p:txBody>
           <a:bodyPr/>
-          <a:p/>
+          <a:p>
+            <a:pPr/>
+            <a:endParaRPr/>
+          </a:p>
         </p:txBody>
       </p:sp>
       <p:sp>
@@ -16111,7 +16441,10 @@
         </p:spPr>
         <p:txBody>
           <a:bodyPr/>
-          <a:p/>
+          <a:p>
+            <a:pPr/>
+            <a:endParaRPr/>
+          </a:p>
         </p:txBody>
       </p:sp>
       <p:pic>
@@ -16238,7 +16571,10 @@
         </p:spPr>
         <p:txBody>
           <a:bodyPr/>
-          <a:p/>
+          <a:p>
+            <a:pPr/>
+            <a:endParaRPr/>
+          </a:p>
         </p:txBody>
       </p:sp>
       <p:pic>
@@ -16424,7 +16760,7 @@
   <p:cSld>
     <p:spTree>
       <p:nvGrpSpPr>
-        <p:cNvPr id="388" name="" descr="&lt;Slide style={{ background: '#0E3F8C', padding: 0 }}&gt;&#10;  &lt;Box style={{ flexDirection: 'row', height: '100%', position: 'relative' }}&gt;&#10;    &lt;Box style={{ position: 'absolute', top: 0, left: 0, right: 0, height: 8, background: '#1E4FA8' }} /&gt;&#10;    &lt;Box style={{ width: 300, justifyContent: 'center', alignItems: 'center', borderRight: '1px solid #2B5793' }}&gt;&#10;      &lt;Text style={{ fontSize: 220, fontWeight: 'bold', color: '#3D7BD9', fontFamily: 'Georgia, serif', lineHeight: 1 }}&gt;06&lt;/Text&gt;&#10;    &lt;/Box&gt;&#10;    &lt;Box style={{ flex: 1, padding: '70px 64px', flexDirection: 'column', justifyContent: 'center' }}&gt;&#10;      &lt;Text style={{ fontSize: 15, color: '#7FA2D6', letterSpacing: 2, marginBottom: 18 }}&gt;PART 2 · LAB&lt;/Text&gt;&#10;      &lt;Text style={{ fontSize: 48, fontWeight: 'bold', color: '#FFFFFF', lineHeight: 1.18 }}&gt;Lab — Reading UML&lt;br /&gt;&amp;amp; Exercises&lt;/Text&gt;&#10;      &lt;Box style={{ width: 64, height: 4, background: '#FFC107', marginTop: 26, marginBottom: 26 }} /&gt;&#10;      &lt;Box style={{ flexDirection: 'column', gap: 12 }}&gt;&#10;        {[&#10;          'Guided demo: read a real UML model set',&#10;          'Three hands-on exercises',&#10;          'Homework and M0 kickoff',&#10;        ].map((t) =&gt; (&#10;          &lt;Box key={t} style={{ flexDirection: 'row', alignItems: 'center', gap: 12 }}&gt;&#10;            &lt;Box style={{ width: 8, height: 8, borderRadius: 4, background: '#3D7BD9' }} /&gt;&#10;            &lt;Text style={{ fontSize: 20, color: '#C5D4EA' }}&gt;{t}&lt;/Text&gt;&#10;          &lt;/Box&gt;&#10;        ))}&#10;      &lt;/Box&gt;&#10;    &lt;/Box&gt;&#10;  &lt;/Box&gt;&#10;&lt;/Slide&gt;"/>
+        <p:cNvPr id="388" name=""/>
         <p:cNvGrpSpPr/>
         <p:nvPr/>
       </p:nvGrpSpPr>
@@ -16457,7 +16793,10 @@
         </p:spPr>
         <p:txBody>
           <a:bodyPr/>
-          <a:p/>
+          <a:p>
+            <a:pPr/>
+            <a:endParaRPr/>
+          </a:p>
         </p:txBody>
       </p:sp>
       <p:sp>
@@ -16497,7 +16836,10 @@
         </p:spPr>
         <p:txBody>
           <a:bodyPr/>
-          <a:p/>
+          <a:p>
+            <a:pPr/>
+            <a:endParaRPr/>
+          </a:p>
         </p:txBody>
       </p:sp>
       <p:sp>
@@ -16644,7 +16986,10 @@
         </p:spPr>
         <p:txBody>
           <a:bodyPr/>
-          <a:p/>
+          <a:p>
+            <a:pPr/>
+            <a:endParaRPr/>
+          </a:p>
         </p:txBody>
       </p:sp>
       <p:sp>
@@ -16670,7 +17015,10 @@
         </p:spPr>
         <p:txBody>
           <a:bodyPr/>
-          <a:p/>
+          <a:p>
+            <a:pPr/>
+            <a:endParaRPr/>
+          </a:p>
         </p:txBody>
       </p:sp>
       <p:sp>
@@ -16731,7 +17079,10 @@
         </p:spPr>
         <p:txBody>
           <a:bodyPr/>
-          <a:p/>
+          <a:p>
+            <a:pPr/>
+            <a:endParaRPr/>
+          </a:p>
         </p:txBody>
       </p:sp>
       <p:sp>
@@ -16792,7 +17143,10 @@
         </p:spPr>
         <p:txBody>
           <a:bodyPr/>
-          <a:p/>
+          <a:p>
+            <a:pPr/>
+            <a:endParaRPr/>
+          </a:p>
         </p:txBody>
       </p:sp>
       <p:sp>
@@ -16851,7 +17205,10 @@
         </p:spPr>
         <p:txBody>
           <a:bodyPr/>
-          <a:p/>
+          <a:p>
+            <a:pPr/>
+            <a:endParaRPr/>
+          </a:p>
         </p:txBody>
       </p:sp>
     </p:spTree>
@@ -16864,7 +17221,7 @@
   <p:cSld>
     <p:spTree>
       <p:nvGrpSpPr>
-        <p:cNvPr id="402" name="" descr="&lt;Slide style={{ background: '#0E3F8C', padding: 0 }}&gt;&#10;  &lt;Box style={{ flexDirection: 'row', height: '100%', position: 'relative' }}&gt;&#10;    &lt;Box style={{ position: 'absolute', top: 0, left: 0, right: 0, height: 8, background: '#1E4FA8' }} /&gt;&#10;    &lt;Box style={{ width: 300, justifyContent: 'center', alignItems: 'center', borderRight: '1px solid #2B5793' }}&gt;&#10;      &lt;Text style={{ fontSize: 220, fontWeight: 'bold', color: '#3D7BD9', fontFamily: 'Georgia, serif', lineHeight: 1 }}&gt;01&lt;/Text&gt;&#10;    &lt;/Box&gt;&#10;    &lt;Box style={{ flex: 1, padding: '70px 64px', flexDirection: 'column', justifyContent: 'center' }}&gt;&#10;      &lt;Text style={{ fontSize: 15, color: '#7FA2D6', letterSpacing: 2, marginBottom: 18 }}&gt;PART 1 · LECTURE&lt;/Text&gt;&#10;      &lt;Text style={{ fontSize: 48, fontWeight: 'bold', color: '#FFFFFF', lineHeight: 1.18 }}&gt;Welcome &amp;amp;&lt;br /&gt;Course Overview&lt;/Text&gt;&#10;      &lt;Box style={{ width: 64, height: 4, background: '#FFC107', marginTop: 26, marginBottom: 26 }} /&gt;&#10;      &lt;Box style={{ flexDirection: 'column', gap: 12 }}&gt;&#10;        {[&#10;          'How this course is organised — 4 hours, 2 blocks',&#10;          'Assessment: project + defense, no written exam',&#10;          'The running project: CampusBites',&#10;        ].map((t) =&gt; (&#10;          &lt;Box key={t} style={{ flexDirection: 'row', alignItems: 'center', gap: 12 }}&gt;&#10;            &lt;Box style={{ width: 8, height: 8, borderRadius: 4, background: '#3D7BD9' }} /&gt;&#10;            &lt;Text style={{ fontSize: 20, color: '#C5D4EA' }}&gt;{t}&lt;/Text&gt;&#10;          &lt;/Box&gt;&#10;        ))}&#10;      &lt;/Box&gt;&#10;    &lt;/Box&gt;&#10;  &lt;/Box&gt;&#10;&lt;/Slide&gt;"/>
+        <p:cNvPr id="402" name=""/>
         <p:cNvGrpSpPr/>
         <p:nvPr/>
       </p:nvGrpSpPr>
@@ -16897,7 +17254,10 @@
         </p:spPr>
         <p:txBody>
           <a:bodyPr/>
-          <a:p/>
+          <a:p>
+            <a:pPr/>
+            <a:endParaRPr/>
+          </a:p>
         </p:txBody>
       </p:sp>
       <p:sp>
@@ -16937,7 +17297,10 @@
         </p:spPr>
         <p:txBody>
           <a:bodyPr/>
-          <a:p/>
+          <a:p>
+            <a:pPr/>
+            <a:endParaRPr/>
+          </a:p>
         </p:txBody>
       </p:sp>
       <p:sp>
@@ -17084,7 +17447,10 @@
         </p:spPr>
         <p:txBody>
           <a:bodyPr/>
-          <a:p/>
+          <a:p>
+            <a:pPr/>
+            <a:endParaRPr/>
+          </a:p>
         </p:txBody>
       </p:sp>
       <p:sp>
@@ -17110,7 +17476,10 @@
         </p:spPr>
         <p:txBody>
           <a:bodyPr/>
-          <a:p/>
+          <a:p>
+            <a:pPr/>
+            <a:endParaRPr/>
+          </a:p>
         </p:txBody>
       </p:sp>
       <p:sp>
@@ -17171,7 +17540,10 @@
         </p:spPr>
         <p:txBody>
           <a:bodyPr/>
-          <a:p/>
+          <a:p>
+            <a:pPr/>
+            <a:endParaRPr/>
+          </a:p>
         </p:txBody>
       </p:sp>
       <p:sp>
@@ -17232,7 +17604,10 @@
         </p:spPr>
         <p:txBody>
           <a:bodyPr/>
-          <a:p/>
+          <a:p>
+            <a:pPr/>
+            <a:endParaRPr/>
+          </a:p>
         </p:txBody>
       </p:sp>
       <p:sp>
@@ -17291,7 +17666,10 @@
         </p:spPr>
         <p:txBody>
           <a:bodyPr/>
-          <a:p/>
+          <a:p>
+            <a:pPr/>
+            <a:endParaRPr/>
+          </a:p>
         </p:txBody>
       </p:sp>
     </p:spTree>
@@ -17304,7 +17682,7 @@
   <p:cSld>
     <p:spTree>
       <p:nvGrpSpPr>
-        <p:cNvPr id="416" name="" descr="&lt;Slide style={{ background: '#FFFFFF', padding: 0 }}&gt;&#10;  &lt;Box style={{ padding: '26px 40px 8px 40px', flexDirection: 'row', alignItems: 'center', justifyContent: 'space-between' }}&gt;&#10;    &lt;Text style={{ fontSize: 34, fontWeight: 'bold', color: '#0E3F8C' }}&gt;A First Look — Three Kinds of UML Models&lt;/Text&gt;&#10;    &lt;Text style={{ fontSize: 14, color: '#1E4FA8', fontWeight: 'bold' }}&gt;30 / 38&lt;/Text&gt;&#10;  &lt;/Box&gt;&#10;  &lt;Box style={{ flex: 1, padding: '10px 40px 0 40px', flexDirection: 'row', gap: 22 }}&gt;&#10;    &lt;Box style={{ flex: 1, padding: '18px 16px', background: '#F7F9FC', borderRadius: 12, border: '1px solid #E5E7EB', flexDirection: 'column', gap: 10 }}&gt;&#10;      &lt;Text style={{ fontSize: 18, fontWeight: 'bold', color: '#0E3F8C', textAlign: 'center' }}&gt;Use Case — what the system does&lt;/Text&gt;&#10;      &lt;svg width={330} height={230} viewBox='0 0 330 230'&gt;&#10;        &lt;circle cx='60' cy='80' r='18' fill='none' stroke='#1E4FA8' strokeWidth='3' /&gt;&#10;        &lt;line x1='60' y1='98' x2='60' y2='160' stroke='#1E4FA8' strokeWidth='3' /&gt;&#10;        &lt;line x1='60' y1='118' x2='28' y2='140' stroke='#1E4FA8' strokeWidth='3' /&gt;&#10;        &lt;line x1='60' y1='118' x2='92' y2='140' stroke='#1E4FA8' strokeWidth='3' /&gt;&#10;        &lt;line x1='60' y1='160' x2='38' y2='195' stroke='#1E4FA8' strokeWidth='3' /&gt;&#10;        &lt;line x1='60' y1='160' x2='82' y2='195' stroke='#1E4FA8' strokeWidth='3' /&gt;&#10;        &lt;text x='60' y='215' textAnchor='middle' fill='#8B97A8' fontSize='14'&gt;Customer&lt;/text&gt;&#10;        &lt;line x1='78' y1='80' x2='130' y2='80' stroke='#3D7BD9' strokeWidth='2' /&gt;&#10;        &lt;ellipse cx='210' cy='80' rx='80' ry='26' fill='#E8EFF8' stroke='#3D7BD9' strokeWidth='2' /&gt;&#10;        &lt;text x='210' y='86' textAnchor='middle' fill='#0E3F8C' fontSize='15' fontWeight='bold'&gt;Place Order&lt;/text&gt;&#10;      &lt;/svg&gt;&#10;    &lt;/Box&gt;&#10;    &lt;Box style={{ flex: 1, padding: '18px 16px', background: '#F7F9FC', borderRadius: 12, border: '1px solid #E5E7EB', flexDirection: 'column', gap: 10 }}&gt;&#10;      &lt;Text style={{ fontSize: 18, fontWeight: 'bold', color: '#0E3F8C', textAlign: 'center' }}&gt;Domain Model — the concepts&lt;/Text&gt;&#10;      &lt;svg width={330} height={230} viewBox='0 0 330 230'&gt;&#10;        &lt;rect x='30' y='60' width='110' height='70' rx='8' fill='#E8EFF8' stroke='#1E4FA8' strokeWidth='2' /&gt;&#10;        &lt;text x='85' y='90' textAnchor='middle' fill='#0E3F8C' fontSize='16' fontWeight='bold'&gt;Order&lt;/text&gt;&#10;        &lt;text x='85' y='112' textAnchor='middle' fill='#8B97A8' fontSize='12'&gt;total, status&lt;/text&gt;&#10;        &lt;rect x='190' y='60' width='110' height='70' rx='8' fill='#E8EFF8' stroke='#1E4FA8' strokeWidth='2' /&gt;&#10;        &lt;text x='245' y='90' textAnchor='middle' fill='#0E3F8C' fontSize='16' fontWeight='bold'&gt;Customer&lt;/text&gt;&#10;        &lt;text x='245' y='112' textAnchor='middle' fill='#8B97A8' fontSize='12'&gt;name, id&lt;/text&gt;&#10;        &lt;line x1='140' y1='95' x2='190' y2='95' stroke='#3D7BD9' strokeWidth='2' /&gt;&#10;        &lt;text x='165' y='88' textAnchor='middle' fill='#3D7BD9' fontSize='12'&gt;1&lt;/text&gt;&#10;        &lt;text x='165' y='118' textAnchor='middle' fill='#3D7BD9' fontSize='12'&gt;*&lt;/text&gt;&#10;        &lt;text x='165' y='150' textAnchor='middle' fill='#8B97A8' fontSize='14'&gt;places&lt;/text&gt;&#10;      &lt;/svg&gt;&#10;    &lt;/Box&gt;&#10;    &lt;Box style={{ flex: 1, padding: '18px 16px', background: '#F7F9FC', borderRadius: 12, border: '1px solid #E5E7EB', flexDirection: 'column', gap: 10 }}&gt;&#10;      &lt;Text style={{ fontSize: 18, fontWeight: 'bold', color: '#0E3F8C', textAlign: 'center' }}&gt;Sequence — how it happens&lt;/Text&gt;&#10;      &lt;svg width={330} height={230} viewBox='0 0 330 230'&gt;&#10;        &lt;line x1='70' y1='40' x2='70' y2='200' stroke='#1E4FA8' strokeWidth='2' /&gt;&#10;        &lt;line x1='250' y1='40' x2='250' y2='200' stroke='#1E4FA8' strokeWidth='2' /&gt;&#10;        &lt;rect x='40' y='20' width='60' height='22' rx='4' fill='#E8EFF8' stroke='#3D7BD9' /&gt;&#10;        &lt;text x='70' y='35' textAnchor='middle' fill='#0E3F8C' fontSize='11'&gt;App&lt;/text&gt;&#10;        &lt;rect x='220' y='20' width='60' height='22' rx='4' fill='#E8EFF8' stroke='#3D7BD9' /&gt;&#10;        &lt;text x='250' y='35' textAnchor='middle' fill='#0E3F8C' fontSize='11'&gt;Server&lt;/text&gt;&#10;        &lt;line x1='70' y1='70' x2='250' y2='70' stroke='#3D7BD9' strokeWidth='2' /&gt;&#10;        &lt;polygon points='245,65 255,70 245,75' fill='#3D7BD9' /&gt;&#10;        &lt;text x='160' y='62' textAnchor='middle' fill='#3D7BD9' fontSize='12'&gt;placeOrder()&lt;/text&gt;&#10;        &lt;line x1='250' y1='110' x2='70' y2='110' stroke='#3D7BD9' strokeWidth='2' strokeDasharray='6 4' /&gt;&#10;        &lt;polygon points='80,105 70,110 80,115' fill='#3D7BD9' /&gt;&#10;        &lt;text x='160' y='102' textAnchor='middle' fill='#3D7BD9' fontSize='12'&gt;order confirmed&lt;/text&gt;&#10;      &lt;/svg&gt;&#10;    &lt;/Box&gt;&#10;  &lt;/Box&gt;&#10;  &lt;Box style={{ height: 52, background: '#0E3F8C', padding: '0 40px', flexDirection: 'row', alignItems: 'center', justifyContent: 'center' }}&gt;&#10;    &lt;Text style={{ fontSize: 17, color: '#FFFFFF', fontWeight: '600' }}&gt;Three views of the same system — each answers a different question. That is the whole trick.&lt;/Text&gt;&#10;  &lt;/Box&gt;&#10;&lt;/Slide&gt;"/>
+        <p:cNvPr id="416" name=""/>
         <p:cNvGrpSpPr/>
         <p:nvPr/>
       </p:nvGrpSpPr>
@@ -17337,7 +17715,10 @@
         </p:spPr>
         <p:txBody>
           <a:bodyPr/>
-          <a:p/>
+          <a:p>
+            <a:pPr/>
+            <a:endParaRPr/>
+          </a:p>
         </p:txBody>
       </p:sp>
       <p:sp>
@@ -17438,7 +17819,10 @@
         </p:spPr>
         <p:txBody>
           <a:bodyPr/>
-          <a:p/>
+          <a:p>
+            <a:pPr/>
+            <a:endParaRPr/>
+          </a:p>
         </p:txBody>
       </p:sp>
       <p:sp>
@@ -17535,7 +17919,10 @@
         </p:spPr>
         <p:txBody>
           <a:bodyPr/>
-          <a:p/>
+          <a:p>
+            <a:pPr/>
+            <a:endParaRPr/>
+          </a:p>
         </p:txBody>
       </p:sp>
       <p:sp>
@@ -17632,7 +18019,10 @@
         </p:spPr>
         <p:txBody>
           <a:bodyPr/>
-          <a:p/>
+          <a:p>
+            <a:pPr/>
+            <a:endParaRPr/>
+          </a:p>
         </p:txBody>
       </p:sp>
       <p:sp>
@@ -17722,7 +18112,10 @@
         </p:spPr>
         <p:txBody>
           <a:bodyPr/>
-          <a:p/>
+          <a:p>
+            <a:pPr/>
+            <a:endParaRPr/>
+          </a:p>
         </p:txBody>
       </p:sp>
       <p:sp>
@@ -17770,7 +18163,7 @@
   <p:cSld>
     <p:spTree>
       <p:nvGrpSpPr>
-        <p:cNvPr id="431" name="" descr="&lt;Slide style={{ background: '#FFFFFF', padding: 0 }}&gt;&#10;  &lt;Box style={{ height: 72, background: '#1E4FA8', padding: '0 40px', flexDirection: 'row', alignItems: 'center', justifyContent: 'space-between' }}&gt;&#10;    &lt;Text style={{ fontSize: 15, color: '#B9CDF0', letterSpacing: 1 }}&gt;ISAD · INFORMATION SYSTEMS ANALYSIS &amp;amp; DESIGN&lt;/Text&gt;&#10;    &lt;Text style={{ fontSize: 15, color: '#B9CDF0' }}&gt;W01 · INTRODUCTION&lt;/Text&gt;&#10;  &lt;/Box&gt;&#10;  &lt;Box style={{ padding: '24px 40px 0 40px' }}&gt;&#10;    &lt;Text style={{ fontSize: 34, fontWeight: 'bold', color: '#0E3F8C' }}&gt;Guided Demo — The Vending Machine (Analysis)&lt;/Text&gt;&#10;  &lt;/Box&gt;&#10;  &lt;Box style={{ flex: 1, padding: '18px 40px 0 40px', flexDirection: 'row', gap: 28 }}&gt;&#10;    &lt;Box style={{ flex: 3, justifyContent: 'center', alignItems: 'center' }}&gt;&#10;      &lt;svg width={560} height={400} viewBox='0 0 560 400'&gt;&#10;        &lt;rect x='210' y='150' width='150' height='90' rx='10' fill='#1E4FA8' /&gt;&#10;        &lt;text x='285' y='186' textAnchor='middle' fill='#FFFFFF' fontSize='18' fontWeight='bold'&gt;VendingMachine&lt;/text&gt;&#10;        &lt;text x='285' y='214' textAnchor='middle' fill='#B9CDF0' fontSize='13'&gt;location, stock&lt;/text&gt;&#10;        &lt;rect x='20' y='150' width='120' height='70' rx='10' fill='#E8EFF8' stroke='#3D7BD9' strokeWidth='2' /&gt;&#10;        &lt;text x='80' y='182' textAnchor='middle' fill='#0E3F8C' fontSize='17' fontWeight='bold'&gt;Product&lt;/text&gt;&#10;        &lt;text x='80' y='204' textAnchor='middle' fill='#8B97A8' fontSize='12'&gt;name, price&lt;/text&gt;&#10;        &lt;rect x='215' y='28' width='140' height='70' rx='10' fill='#E8EFF8' stroke='#3D7BD9' strokeWidth='2' /&gt;&#10;        &lt;text x='285' y='60' textAnchor='middle' fill='#0E3F8C' fontSize='17' fontWeight='bold'&gt;Coin&lt;/text&gt;&#10;        &lt;text x='285' y='82' textAnchor='middle' fill='#8B97A8' fontSize='12'&gt;value&lt;/text&gt;&#10;        &lt;rect x='420' y='150' width='120' height='70' rx='10' fill='#E8EFF8' stroke='#3D7BD9' strokeWidth='2' /&gt;&#10;        &lt;text x='480' y='182' textAnchor='middle' fill='#0E3F8C' fontSize='17' fontWeight='bold'&gt;Transaction&lt;/text&gt;&#10;        &lt;text x='480' y='204' textAnchor='middle' fill='#8B97A8' fontSize='12'&gt;time, change&lt;/text&gt;&#10;        &lt;line x1='140' y1='185' x2='210' y2='185' stroke='#3D7BD9' strokeWidth='2' /&gt;&#10;        &lt;text x='175' y='176' textAnchor='middle' fill='#3D7BD9' fontSize='13'&gt;0..*&lt;/text&gt;&#10;        &lt;text x='175' y='205' textAnchor='middle' fill='#8B97A8' fontSize='13'&gt;stocks&lt;/text&gt;&#10;        &lt;line x1='285' y1='98' x2='285' y2='150' stroke='#3D7BD9' strokeWidth='2' /&gt;&#10;        &lt;text x='300' y='128' textAnchor='middle' fill='#8B97A8' fontSize='13'&gt;accepts&lt;/text&gt;&#10;        &lt;line x1='360' y1='195' x2='420' y2='195' stroke='#3D7BD9' strokeWidth='2' /&gt;&#10;        &lt;text x='390' y='186' textAnchor='middle' fill='#3D7BD9' fontSize='13'&gt;1..*&lt;/text&gt;&#10;        &lt;text x='390' y='215' textAnchor='middle' fill='#8B97A8' fontSize='13'&gt;records&lt;/text&gt;&#10;        &lt;text x='285' y='330' textAnchor='middle' fill='#8B97A8' fontSize='15'&gt;A domain model: concepts + relationships, no code.&lt;/text&gt;&#10;      &lt;/svg&gt;&#10;    &lt;/Box&gt;&#10;    &lt;Box style={{ flex: 2, flexDirection: 'column', gap: 14, justifyContent: 'center' }}&gt;&#10;      &lt;Text style={{ fontSize: 19, fontWeight: 'bold', color: '#0E3F8C', lineHeight: 1.35 }}&gt;How to read it — three questions&lt;/Text&gt;&#10;      {[&#10;        ['1 · What concepts exist?', 'VendingMachine, Product, Coin, Transaction — each is a box.'],&#10;        ['2 · How are they related?', 'The lines and the numbers (1, 0..*) tell you who holds what.'],&#10;        ['3 · What does each hold?', 'The attributes — location, price, value — are what we must remember.'],&#10;      ].map(([t, d]) =&gt; (&#10;        &lt;Box key={t} style={{ flexDirection: 'row', gap: 12, alignItems: 'flex-start' }}&gt;&#10;          &lt;FAIcon name='search' style={{ fill: '#1E4FA8', width: 20, height: 20 }} /&gt;&#10;          &lt;Box style={{ flexDirection: 'column', gap: 3 }}&gt;&#10;            &lt;Text style={{ fontSize: 16, fontWeight: 'bold', color: '#1A2230' }}&gt;{t}&lt;/Text&gt;&#10;            &lt;Text style={{ fontSize: 14, color: '#4A5568', lineHeight: 1.5 }}&gt;{d}&lt;/Text&gt;&#10;          &lt;/Box&gt;&#10;        &lt;/Box&gt;&#10;      ))}&#10;      &lt;Box style={{ padding: '12px 16px', background: '#F7F9FC', borderRadius: 8, border: '1px solid #E5E7EB' }}&gt;&#10;        &lt;Text style={{ fontSize: 14, color: '#4A5568', lineHeight: 1.5 }}&gt;&lt;span style={{ fontWeight: 'bold', color: '#1A2230' }}&gt;Notice:&lt;/span&gt; no methods, no if-else, no &quot;how&quot;. Analysis answers &lt;span style={{ fontWeight: 'bold' }}&gt;what&lt;/span&gt;, not how.&lt;/Text&gt;&#10;      &lt;/Box&gt;&#10;    &lt;/Box&gt;&#10;  &lt;/Box&gt;&#10;  &lt;Box style={{ height: 40, padding: '0 40px', flexDirection: 'row', alignItems: 'center', justifyContent: 'space-between' }}&gt;&#10;    &lt;Text style={{ fontSize: 13, color: '#8B97A8' }}&gt;ISAD · Fall 2026&lt;/Text&gt;&#10;    &lt;Text style={{ fontSize: 14, color: '#1E4FA8', fontWeight: 'bold' }}&gt;31 / 38&lt;/Text&gt;&#10;  &lt;/Box&gt;&#10;&lt;/Slide&gt;"/>
+        <p:cNvPr id="431" name=""/>
         <p:cNvGrpSpPr/>
         <p:nvPr/>
       </p:nvGrpSpPr>
@@ -17803,7 +18196,10 @@
         </p:spPr>
         <p:txBody>
           <a:bodyPr/>
-          <a:p/>
+          <a:p>
+            <a:pPr/>
+            <a:endParaRPr/>
+          </a:p>
         </p:txBody>
       </p:sp>
       <p:sp>
@@ -17827,7 +18223,10 @@
         </p:spPr>
         <p:txBody>
           <a:bodyPr/>
-          <a:p/>
+          <a:p>
+            <a:pPr/>
+            <a:endParaRPr/>
+          </a:p>
         </p:txBody>
       </p:sp>
       <p:sp>
@@ -18334,7 +18733,10 @@
         </p:spPr>
         <p:txBody>
           <a:bodyPr/>
-          <a:p/>
+          <a:p>
+            <a:pPr/>
+            <a:endParaRPr/>
+          </a:p>
         </p:txBody>
       </p:sp>
       <p:sp>
@@ -18484,7 +18886,7 @@
   <p:cSld>
     <p:spTree>
       <p:nvGrpSpPr>
-        <p:cNvPr id="452" name="" descr="&lt;Slide style={{ background: '#FFFFFF', padding: 0 }}&gt;&#10;  &lt;Box style={{ height: 72, background: '#1E4FA8', padding: '0 40px', flexDirection: 'row', alignItems: 'center', justifyContent: 'space-between' }}&gt;&#10;    &lt;Text style={{ fontSize: 15, color: '#B9CDF0', letterSpacing: 1 }}&gt;ISAD · INFORMATION SYSTEMS ANALYSIS &amp;amp; DESIGN&lt;/Text&gt;&#10;    &lt;Text style={{ fontSize: 15, color: '#B9CDF0' }}&gt;W01 · INTRODUCTION&lt;/Text&gt;&#10;  &lt;/Box&gt;&#10;  &lt;Box style={{ padding: '24px 40px 0 40px' }}&gt;&#10;    &lt;Text style={{ fontSize: 34, fontWeight: 'bold', color: '#0E3F8C' }}&gt;Guided Demo — From Analysis to Design&lt;/Text&gt;&#10;  &lt;/Box&gt;&#10;  &lt;Box style={{ flex: 1, padding: '18px 40px 0 40px', flexDirection: 'row', gap: 28 }}&gt;&#10;    &lt;Box style={{ flex: 3, justifyContent: 'center', alignItems: 'center' }}&gt;&#10;      &lt;svg width={560} height={400} viewBox='0 0 560 400'&gt;&#10;        &lt;rect x='200' y='90' width='170' height='100' rx='10' fill='#1E4FA8' /&gt;&#10;        &lt;text x='285' y='122' textAnchor='middle' fill='#FFFFFF' fontSize='17' fontWeight='bold'&gt;VendingMachine&lt;/text&gt;&#10;        &lt;text x='285' y='146' textAnchor='middle' fill='#B9CDF0' fontSize='13'&gt;- stock: Map&lt;/text&gt;&#10;        &lt;text x='285' y='168' textAnchor='middle' fill='#B9CDF0' fontSize='13'&gt;+ sellProduct()&lt;/text&gt;&#10;        &lt;rect x='30' y='280' width='150' height='60' rx='10' fill='#E8EFF8' stroke='#3D7BD9' strokeWidth='2' /&gt;&#10;        &lt;text x='105' y='306' textAnchor='middle' fill='#0E3F8C' fontSize='15' fontWeight='bold'&gt;«interface»&lt;/text&gt;&#10;        &lt;text x='105' y='326' textAnchor='middle' fill='#0E3F8C' fontSize='15' fontWeight='bold'&gt;Payment&lt;/text&gt;&#10;        &lt;rect x='260' y='300' width='140' height='70' rx='10' fill='#E8EFF8' stroke='#3D7BD9' strokeWidth='2' /&gt;&#10;        &lt;text x='330' y='326' textAnchor='middle' fill='#0E3F8C' fontSize='15' fontWeight='bold'&gt;CardPayment&lt;/text&gt;&#10;        &lt;text x='330' y='348' textAnchor='middle' fill='#8B97A8' fontSize='12'&gt;+ pay()&lt;/text&gt;&#10;        &lt;rect x='420' y='300' width='130' height='70' rx='10' fill='#E8EFF8' stroke='#3D7BD9' strokeWidth='2' /&gt;&#10;        &lt;text x='485' y='326' textAnchor='middle' fill='#0E3F8C' fontSize='15' fontWeight='bold'&gt;CashPayment&lt;/text&gt;&#10;        &lt;text x='485' y='348' textAnchor='middle' fill='#8B97A8' fontSize='12'&gt;+ pay()&lt;/text&gt;&#10;        &lt;line x1='285' y1='190' x2='150' y2='280' stroke='#3D7BD9' strokeWidth='2' strokeDasharray='6 4' /&gt;&#10;        &lt;polygon points='150,278 160,290 158,276' fill='#3D7BD9' /&gt;&#10;        &lt;line x1='160' y1='310' x2='260' y2='318' stroke='#3D7BD9' strokeWidth='2' /&gt;&#10;        &lt;polygon points='258,312 268,319 258,324' fill='#3D7BD9' /&gt;&#10;        &lt;line x1='160' y1='330' x2='420' y2='322' stroke='#3D7BD9' strokeWidth='2' /&gt;&#10;        &lt;polygon points='418,316 428,322 418,328' fill='#3D7BD9' /&gt;&#10;        &lt;text x='200' y='262' textAnchor='middle' fill='#8B97A8' fontSize='14'&gt;depends on (dashed arrow)&lt;/text&gt;&#10;        &lt;text x='340' y='388' textAnchor='middle' fill='#8B97A8' fontSize='14'&gt;Same concepts — now with methods, interfaces, responsibilities.&lt;/text&gt;&#10;      &lt;/svg&gt;&#10;    &lt;/Box&gt;&#10;    &lt;Box style={{ flex: 2, flexDirection: 'column', gap: 14, justifyContent: 'center' }}&gt;&#10;      &lt;Text style={{ fontSize: 19, fontWeight: 'bold', color: '#0E3F8C', lineHeight: 1.35 }}&gt;What changed in the jump&lt;/Text&gt;&#10;      {[&#10;        ['Methods appeared', 'Concepts now have behaviour — sellProduct(), pay().'],&#10;        ['An interface appeared', 'Payment hides &quot;card vs. cash&quot; behind one contract — that is a pattern in the making.'],&#10;        ['Responsibility moved', 'Each class knows its own job; nothing does everything.'],&#10;      ].map(([t, d]) =&gt; (&#10;        &lt;Box key={t} style={{ flexDirection: 'row', gap: 12, alignItems: 'flex-start' }}&gt;&#10;          &lt;FAIcon name='arrow-right' style={{ fill: '#1E4FA8', width: 18, height: 18 }} /&gt;&#10;          &lt;Box style={{ flexDirection: 'column', gap: 3 }}&gt;&#10;            &lt;Text style={{ fontSize: 16, fontWeight: 'bold', color: '#1A2230' }}&gt;{t}&lt;/Text&gt;&#10;            &lt;Text style={{ fontSize: 14, color: '#4A5568', lineHeight: 1.5 }}&gt;{d}&lt;/Text&gt;&#10;          &lt;/Box&gt;&#10;        &lt;/Box&gt;&#10;      ))}&#10;      &lt;Box style={{ padding: '12px 16px', background: '#F7F9FC', borderRadius: 8, border: '1px solid #E5E7EB' }}&gt;&#10;        &lt;Text style={{ fontSize: 14, color: '#4A5568', lineHeight: 1.5 }}&gt;&lt;span style={{ fontWeight: 'bold', color: '#1A2230' }}&gt;The whole course&lt;/span&gt; is this jump — done carefully, with principles and patterns.&lt;/Text&gt;&#10;      &lt;/Box&gt;&#10;    &lt;/Box&gt;&#10;  &lt;/Box&gt;&#10;  &lt;Box style={{ height: 40, padding: '0 40px', flexDirection: 'row', alignItems: 'center', justifyContent: 'space-between' }}&gt;&#10;    &lt;Text style={{ fontSize: 13, color: '#8B97A8' }}&gt;ISAD · Fall 2026&lt;/Text&gt;&#10;    &lt;Text style={{ fontSize: 14, color: '#1E4FA8', fontWeight: 'bold' }}&gt;32 / 38&lt;/Text&gt;&#10;  &lt;/Box&gt;&#10;&lt;/Slide&gt;"/>
+        <p:cNvPr id="452" name=""/>
         <p:cNvGrpSpPr/>
         <p:nvPr/>
       </p:nvGrpSpPr>
@@ -18517,7 +18919,10 @@
         </p:spPr>
         <p:txBody>
           <a:bodyPr/>
-          <a:p/>
+          <a:p>
+            <a:pPr/>
+            <a:endParaRPr/>
+          </a:p>
         </p:txBody>
       </p:sp>
       <p:sp>
@@ -18541,7 +18946,10 @@
         </p:spPr>
         <p:txBody>
           <a:bodyPr/>
-          <a:p/>
+          <a:p>
+            <a:pPr/>
+            <a:endParaRPr/>
+          </a:p>
         </p:txBody>
       </p:sp>
       <p:sp>
@@ -19048,7 +19456,10 @@
         </p:spPr>
         <p:txBody>
           <a:bodyPr/>
-          <a:p/>
+          <a:p>
+            <a:pPr/>
+            <a:endParaRPr/>
+          </a:p>
         </p:txBody>
       </p:sp>
       <p:sp>
@@ -19178,7 +19589,7 @@
   <p:cSld>
     <p:spTree>
       <p:nvGrpSpPr>
-        <p:cNvPr id="473" name="" descr="&lt;Slide style={{ background: '#FFFFFF', padding: 0 }}&gt;&#10;  &lt;Box style={{ height: 72, background: '#1E4FA8', padding: '0 40px', flexDirection: 'row', alignItems: 'center', justifyContent: 'space-between' }}&gt;&#10;    &lt;Text style={{ fontSize: 15, color: '#B9CDF0', letterSpacing: 1 }}&gt;ISAD · INFORMATION SYSTEMS ANALYSIS &amp;amp; DESIGN&lt;/Text&gt;&#10;    &lt;Text style={{ fontSize: 15, color: '#B9CDF0' }}&gt;W01 · LAB&lt;/Text&gt;&#10;  &lt;/Box&gt;&#10;  &lt;Box style={{ padding: '24px 40px 0 40px' }}&gt;&#10;    &lt;Text style={{ fontSize: 34, fontWeight: 'bold', color: '#0E3F8C' }}&gt;Exercise 1.1 — Analysis or Design?&lt;/Text&gt;&#10;  &lt;/Box&gt;&#10;  &lt;Box style={{ flex: 1, padding: '18px 40px 0 40px', flexDirection: 'row', gap: 28 }}&gt;&#10;    &lt;Box style={{ width: 320, padding: '28px 24px', background: '#0E3F8C', borderRadius: 12, flexDirection: 'column', justifyContent: 'center', gap: 12 }}&gt;&#10;      &lt;Text style={{ fontSize: 22, fontWeight: 'bold', color: '#FFFFFF' }}&gt;Your task&lt;/Text&gt;&#10;      &lt;Text style={{ fontSize: 16, color: '#C5D4EA', lineHeight: 1.55 }}&gt;For each statement, decide: is it an &lt;span style={{ fontWeight: 'bold', color: '#FFC107' }}&gt;analysis&lt;/span&gt; concern (what) or a &lt;span style={{ fontWeight: 'bold', color: '#FFC107' }}&gt;design&lt;/span&gt; concern (how)? Justify in one sentence.&lt;/Text&gt;&#10;      &lt;Box style={{ padding: '12px 16px', background: '#1E4FA8', borderRadius: 8 }}&gt;&#10;        &lt;Text style={{ fontSize: 14, color: '#B9CDF0', lineHeight: 1.5 }}&gt;Rule of thumb: does it talk about the problem, or the solution?&lt;/Text&gt;&#10;      &lt;/Box&gt;&#10;    &lt;/Box&gt;&#10;    &lt;Box style={{ flex: 1, flexDirection: 'column', gap: 12, justifyContent: 'center' }}&gt;&#10;      {[&#10;        'A customer can pay by card or by cash.',&#10;        'We should use the Strategy pattern for payment.',&#10;        'An order has a status that changes over time.',&#10;        'The Order class should expose a cancel() method.',&#10;        'The system must notify the courier when an order is ready.',&#10;      ].map((s, i) =&gt; (&#10;        &lt;Box key={i} style={{ flexDirection: 'row', gap: 14, alignItems: 'center', padding: '13px 18px', background: '#F7F9FC', borderRadius: 10, border: '1px solid #E5E7EB' }}&gt;&#10;          &lt;Box style={{ width: 30, height: 30, borderRadius: 15, background: '#1E4FA8', justifyContent: 'center', alignItems: 'center' }}&gt;&#10;            &lt;Text style={{ fontSize: 15, fontWeight: 'bold', color: '#FFFFFF' }}&gt;{i + 1}&lt;/Text&gt;&#10;          &lt;/Box&gt;&#10;          &lt;Text style={{ flex: 1, fontSize: 16, color: '#1A2230' }}&gt;{s}&lt;/Text&gt;&#10;        &lt;/Box&gt;&#10;      ))}&#10;    &lt;/Box&gt;&#10;  &lt;/Box&gt;&#10;  &lt;Box style={{ height: 40, padding: '0 40px', flexDirection: 'row', alignItems: 'center', justifyContent: 'space-between' }}&gt;&#10;    &lt;Text style={{ fontSize: 13, color: '#8B97A8' }}&gt;Answers discussed in class.&lt;/Text&gt;&#10;    &lt;Text style={{ fontSize: 14, color: '#1E4FA8', fontWeight: 'bold' }}&gt;33 / 38&lt;/Text&gt;&#10;  &lt;/Box&gt;&#10;&lt;/Slide&gt;"/>
+        <p:cNvPr id="473" name=""/>
         <p:cNvGrpSpPr/>
         <p:nvPr/>
       </p:nvGrpSpPr>
@@ -19211,7 +19622,10 @@
         </p:spPr>
         <p:txBody>
           <a:bodyPr/>
-          <a:p/>
+          <a:p>
+            <a:pPr/>
+            <a:endParaRPr/>
+          </a:p>
         </p:txBody>
       </p:sp>
       <p:sp>
@@ -19235,7 +19649,10 @@
         </p:spPr>
         <p:txBody>
           <a:bodyPr/>
-          <a:p/>
+          <a:p>
+            <a:pPr/>
+            <a:endParaRPr/>
+          </a:p>
         </p:txBody>
       </p:sp>
       <p:sp>
@@ -19366,7 +19783,10 @@
         </p:spPr>
         <p:txBody>
           <a:bodyPr/>
-          <a:p/>
+          <a:p>
+            <a:pPr/>
+            <a:endParaRPr/>
+          </a:p>
         </p:txBody>
       </p:sp>
       <p:sp>
@@ -19504,7 +19924,10 @@
         </p:spPr>
         <p:txBody>
           <a:bodyPr/>
-          <a:p/>
+          <a:p>
+            <a:pPr/>
+            <a:endParaRPr/>
+          </a:p>
         </p:txBody>
       </p:sp>
       <p:sp>
@@ -19572,7 +19995,10 @@
         </p:spPr>
         <p:txBody>
           <a:bodyPr/>
-          <a:p/>
+          <a:p>
+            <a:pPr/>
+            <a:endParaRPr/>
+          </a:p>
         </p:txBody>
       </p:sp>
       <p:sp>
@@ -19598,7 +20024,10 @@
         </p:spPr>
         <p:txBody>
           <a:bodyPr/>
-          <a:p/>
+          <a:p>
+            <a:pPr/>
+            <a:endParaRPr/>
+          </a:p>
         </p:txBody>
       </p:sp>
       <p:sp>
@@ -19699,7 +20128,10 @@
         </p:spPr>
         <p:txBody>
           <a:bodyPr/>
-          <a:p/>
+          <a:p>
+            <a:pPr/>
+            <a:endParaRPr/>
+          </a:p>
         </p:txBody>
       </p:sp>
       <p:sp>
@@ -19725,7 +20157,10 @@
         </p:spPr>
         <p:txBody>
           <a:bodyPr/>
-          <a:p/>
+          <a:p>
+            <a:pPr/>
+            <a:endParaRPr/>
+          </a:p>
         </p:txBody>
       </p:sp>
       <p:sp>
@@ -19826,7 +20261,10 @@
         </p:spPr>
         <p:txBody>
           <a:bodyPr/>
-          <a:p/>
+          <a:p>
+            <a:pPr/>
+            <a:endParaRPr/>
+          </a:p>
         </p:txBody>
       </p:sp>
       <p:sp>
@@ -19852,7 +20290,10 @@
         </p:spPr>
         <p:txBody>
           <a:bodyPr/>
-          <a:p/>
+          <a:p>
+            <a:pPr/>
+            <a:endParaRPr/>
+          </a:p>
         </p:txBody>
       </p:sp>
       <p:sp>
@@ -19953,7 +20394,10 @@
         </p:spPr>
         <p:txBody>
           <a:bodyPr/>
-          <a:p/>
+          <a:p>
+            <a:pPr/>
+            <a:endParaRPr/>
+          </a:p>
         </p:txBody>
       </p:sp>
       <p:sp>
@@ -19979,7 +20423,10 @@
         </p:spPr>
         <p:txBody>
           <a:bodyPr/>
-          <a:p/>
+          <a:p>
+            <a:pPr/>
+            <a:endParaRPr/>
+          </a:p>
         </p:txBody>
       </p:sp>
       <p:sp>
@@ -20080,7 +20527,10 @@
         </p:spPr>
         <p:txBody>
           <a:bodyPr/>
-          <a:p/>
+          <a:p>
+            <a:pPr/>
+            <a:endParaRPr/>
+          </a:p>
         </p:txBody>
       </p:sp>
       <p:sp>
@@ -20106,7 +20556,10 @@
         </p:spPr>
         <p:txBody>
           <a:bodyPr/>
-          <a:p/>
+          <a:p>
+            <a:pPr/>
+            <a:endParaRPr/>
+          </a:p>
         </p:txBody>
       </p:sp>
       <p:sp>
@@ -20259,7 +20712,7 @@
   <p:cSld>
     <p:spTree>
       <p:nvGrpSpPr>
-        <p:cNvPr id="506" name="" descr="&lt;Slide style={{ background: '#FFFFFF', padding: 0 }}&gt;&#10;  &lt;Box style={{ height: 72, background: '#1E4FA8', padding: '0 40px', flexDirection: 'row', alignItems: 'center', justifyContent: 'space-between' }}&gt;&#10;    &lt;Text style={{ fontSize: 15, color: '#B9CDF0', letterSpacing: 1 }}&gt;ISAD · INFORMATION SYSTEMS ANALYSIS &amp;amp; DESIGN&lt;/Text&gt;&#10;    &lt;Text style={{ fontSize: 15, color: '#B9CDF0' }}&gt;W01 · LAB&lt;/Text&gt;&#10;  &lt;/Box&gt;&#10;  &lt;Box style={{ padding: '24px 40px 0 40px' }}&gt;&#10;    &lt;Text style={{ fontSize: 34, fontWeight: 'bold', color: '#0E3F8C' }}&gt;Exercise 1.2 — Stakeholders of CampusBites&lt;/Text&gt;&#10;  &lt;/Box&gt;&#10;  &lt;Box style={{ flex: 1, padding: '18px 40px 0 40px', flexDirection: 'row', gap: 28 }}&gt;&#10;    &lt;Box style={{ width: 320, padding: '28px 24px', background: '#0E3F8C', borderRadius: 12, flexDirection: 'column', justifyContent: 'center', gap: 12 }}&gt;&#10;      &lt;FAIcon name='users' style={{ fill: '#FFC107', width: 36, height: 36 }} /&gt;&#10;      &lt;Text style={{ fontSize: 22, fontWeight: 'bold', color: '#FFFFFF', lineHeight: 1.35 }}&gt;Who has a stake in the food-ordering platform?&lt;/Text&gt;&#10;      &lt;Text style={{ fontSize: 16, color: '#C5D4EA', lineHeight: 1.55 }}&gt;A stakeholder is anyone the system affects — or who affects it. List every group you can think of, then mark which are &lt;span style={{ fontWeight: 'bold', color: '#FFFFFF' }}&gt;users&lt;/span&gt;.&lt;/Text&gt;&#10;    &lt;/Box&gt;&#10;    &lt;Box style={{ flex: 1, flexDirection: 'column', gap: 12, justifyContent: 'center' }}&gt;&#10;      &lt;Box style={{ padding: '14px 18px', background: '#F7F9FC', borderRadius: 10, border: '1px solid #E5E7EB', flexDirection: 'row', alignItems: 'center', gap: 12 }}&gt;&#10;        &lt;FAIcon name='lightbulb' style={{ fill: '#FFC107', width: 22, height: 22 }} /&gt;&#10;        &lt;Text style={{ fontSize: 15, color: '#4A5568', lineHeight: 1.5 }}&gt;Seed the list, then go wider: who is &lt;span style={{ fontWeight: 'bold', color: '#1A2230' }}&gt;indirectly&lt;/span&gt; affected?&lt;/Text&gt;&#10;      &lt;/Box&gt;&#10;      {[&#10;        ['user', 'Students — they order food'],&#10;        ['briefcase', 'Restaurants — they receive and fulfil orders'],&#10;        ['user', 'Couriers — they deliver'],&#10;        ['cog', 'University admin — campus rules and contracts'],&#10;        ['dollar', 'Payment providers — they move the money'],&#10;      ].map(([icon, t]) =&gt; (&#10;        &lt;Box key={t} style={{ flexDirection: 'row', gap: 14, alignItems: 'center', padding: '13px 18px', background: '#F7F9FC', borderRadius: 10, border: '1px solid #E5E7EB' }}&gt;&#10;          &lt;FAIcon name={icon} style={{ fill: '#1E4FA8', width: 22, height: 22 }} /&gt;&#10;          &lt;Text style={{ flex: 1, fontSize: 16, color: '#1A2230' }}&gt;{t}&lt;/Text&gt;&#10;        &lt;/Box&gt;&#10;      ))}&#10;    &lt;/Box&gt;&#10;  &lt;/Box&gt;&#10;  &lt;Box style={{ height: 40, padding: '0 40px', flexDirection: 'row', alignItems: 'center', justifyContent: 'space-between' }}&gt;&#10;    &lt;Text style={{ fontSize: 13, color: '#8B97A8' }}&gt;This list becomes your actor list in Week 4.&lt;/Text&gt;&#10;    &lt;Text style={{ fontSize: 14, color: '#1E4FA8', fontWeight: 'bold' }}&gt;34 / 38&lt;/Text&gt;&#10;  &lt;/Box&gt;&#10;&lt;/Slide&gt;"/>
+        <p:cNvPr id="506" name=""/>
         <p:cNvGrpSpPr/>
         <p:nvPr/>
       </p:nvGrpSpPr>
@@ -20292,7 +20745,10 @@
         </p:spPr>
         <p:txBody>
           <a:bodyPr/>
-          <a:p/>
+          <a:p>
+            <a:pPr/>
+            <a:endParaRPr/>
+          </a:p>
         </p:txBody>
       </p:sp>
       <p:sp>
@@ -20316,7 +20772,10 @@
         </p:spPr>
         <p:txBody>
           <a:bodyPr/>
-          <a:p/>
+          <a:p>
+            <a:pPr/>
+            <a:endParaRPr/>
+          </a:p>
         </p:txBody>
       </p:sp>
       <p:sp>
@@ -20447,7 +20906,10 @@
         </p:spPr>
         <p:txBody>
           <a:bodyPr/>
-          <a:p/>
+          <a:p>
+            <a:pPr/>
+            <a:endParaRPr/>
+          </a:p>
         </p:txBody>
       </p:sp>
       <p:pic>
@@ -20603,7 +21065,10 @@
         </p:spPr>
         <p:txBody>
           <a:bodyPr/>
-          <a:p/>
+          <a:p>
+            <a:pPr/>
+            <a:endParaRPr/>
+          </a:p>
         </p:txBody>
       </p:sp>
       <p:pic>
@@ -20720,7 +21185,10 @@
         </p:spPr>
         <p:txBody>
           <a:bodyPr/>
-          <a:p/>
+          <a:p>
+            <a:pPr/>
+            <a:endParaRPr/>
+          </a:p>
         </p:txBody>
       </p:sp>
       <p:pic>
@@ -20817,7 +21285,10 @@
         </p:spPr>
         <p:txBody>
           <a:bodyPr/>
-          <a:p/>
+          <a:p>
+            <a:pPr/>
+            <a:endParaRPr/>
+          </a:p>
         </p:txBody>
       </p:sp>
       <p:pic>
@@ -20914,7 +21385,10 @@
         </p:spPr>
         <p:txBody>
           <a:bodyPr/>
-          <a:p/>
+          <a:p>
+            <a:pPr/>
+            <a:endParaRPr/>
+          </a:p>
         </p:txBody>
       </p:sp>
       <p:pic>
@@ -21011,7 +21485,10 @@
         </p:spPr>
         <p:txBody>
           <a:bodyPr/>
-          <a:p/>
+          <a:p>
+            <a:pPr/>
+            <a:endParaRPr/>
+          </a:p>
         </p:txBody>
       </p:sp>
       <p:pic>
@@ -21108,7 +21585,10 @@
         </p:spPr>
         <p:txBody>
           <a:bodyPr/>
-          <a:p/>
+          <a:p>
+            <a:pPr/>
+            <a:endParaRPr/>
+          </a:p>
         </p:txBody>
       </p:sp>
       <p:pic>
@@ -21257,7 +21737,7 @@
   <p:cSld>
     <p:spTree>
       <p:nvGrpSpPr>
-        <p:cNvPr id="536" name="" descr="&lt;Slide style={{ background: '#FFFFFF', padding: 0 }}&gt;&#10;  &lt;Box style={{ height: 72, background: '#1E4FA8', padding: '0 40px', flexDirection: 'row', alignItems: 'center', justifyContent: 'space-between' }}&gt;&#10;    &lt;Text style={{ fontSize: 15, color: '#B9CDF0', letterSpacing: 1 }}&gt;ISAD · INFORMATION SYSTEMS ANALYSIS &amp;amp; DESIGN&lt;/Text&gt;&#10;    &lt;Text style={{ fontSize: 15, color: '#B9CDF0' }}&gt;W01 · LAB&lt;/Text&gt;&#10;  &lt;/Box&gt;&#10;  &lt;Box style={{ padding: '24px 40px 0 40px' }}&gt;&#10;    &lt;Text style={{ fontSize: 34, fontWeight: 'bold', color: '#0E3F8C' }}&gt;Exercise 1.3 — Systems Around Your Campus&lt;/Text&gt;&#10;  &lt;/Box&gt;&#10;  &lt;Box style={{ flex: 1, padding: '18px 40px 0 40px', flexDirection: 'row', gap: 28 }}&gt;&#10;    &lt;Box style={{ width: 320, padding: '28px 24px', background: '#0E3F8C', borderRadius: 12, flexDirection: 'column', justifyContent: 'center', gap: 12 }}&gt;&#10;      &lt;Text style={{ fontSize: 22, fontWeight: 'bold', color: '#FFFFFF', lineHeight: 1.35 }}&gt;Which campus processes are information systems — and which are not (yet)?&lt;/Text&gt;&#10;      &lt;Text style={{ fontSize: 16, color: '#C5D4EA', lineHeight: 1.55 }}&gt;For each, check the four elements. If one is missing, it is not yet an IS.&lt;/Text&gt;&#10;    &lt;/Box&gt;&#10;    &lt;Box style={{ flex: 1, flexDirection: 'column', gap: 12, justifyContent: 'center' }}&gt;&#10;      &lt;Box style={{ padding: '14px 18px', background: '#F0F5FC', borderRadius: 10, border: '1px solid #3D7BD9', flexDirection: 'column', gap: 6 }}&gt;&#10;        &lt;Box style={{ flexDirection: 'row', alignItems: 'center', gap: 10 }}&gt;&#10;          &lt;FAIcon name='check-circle' style={{ fill: '#1E4FA8', width: 22, height: 22 }} /&gt;&#10;          &lt;Text style={{ fontSize: 17, fontWeight: 'bold', color: '#0E3F8C' }}&gt;Already information systems&lt;/Text&gt;&#10;        &lt;/Box&gt;&#10;        &lt;Text style={{ fontSize: 15, color: '#4A5568', lineHeight: 1.5 }}&gt;Course registration · library borrowing · campus card top-up · exam timetable.&lt;/Text&gt;&#10;      &lt;/Box&gt;&#10;      &lt;Box style={{ padding: '14px 18px', background: '#FDF3F3', borderRadius: 10, border: '1px solid #D9534F', flexDirection: 'column', gap: 6 }}&gt;&#10;        &lt;Box style={{ flexDirection: 'row', alignItems: 'center', gap: 10 }}&gt;&#10;          &lt;FAIcon name='times-circle' style={{ fill: '#D9534F', width: 22, height: 22 }} /&gt;&#10;          &lt;Text style={{ fontSize: 17, fontWeight: 'bold', color: '#D9534F' }}&gt;Not yet (a gap to analyse)&lt;/Text&gt;&#10;        &lt;/Box&gt;&#10;        &lt;Text style={{ fontSize: 15, color: '#4A5568', lineHeight: 1.5 }}&gt;Canteen queue · lost-and-found · study-room seat grabbing — think of one more from your own day.&lt;/Text&gt;&#10;      &lt;/Box&gt;&#10;    &lt;/Box&gt;&#10;  &lt;/Box&gt;&#10;  &lt;Box style={{ height: 40, padding: '0 40px', flexDirection: 'row', alignItems: 'center', justifyContent: 'space-between' }}&gt;&#10;    &lt;Text style={{ fontSize: 13, color: '#8B97A8' }}&gt;Every gap is a candidate system someone could build.&lt;/Text&gt;&#10;    &lt;Text style={{ fontSize: 14, color: '#1E4FA8', fontWeight: 'bold' }}&gt;35 / 38&lt;/Text&gt;&#10;  &lt;/Box&gt;&#10;&lt;/Slide&gt;"/>
+        <p:cNvPr id="536" name=""/>
         <p:cNvGrpSpPr/>
         <p:nvPr/>
       </p:nvGrpSpPr>
@@ -21290,7 +21770,10 @@
         </p:spPr>
         <p:txBody>
           <a:bodyPr/>
-          <a:p/>
+          <a:p>
+            <a:pPr/>
+            <a:endParaRPr/>
+          </a:p>
         </p:txBody>
       </p:sp>
       <p:sp>
@@ -21314,7 +21797,10 @@
         </p:spPr>
         <p:txBody>
           <a:bodyPr/>
-          <a:p/>
+          <a:p>
+            <a:pPr/>
+            <a:endParaRPr/>
+          </a:p>
         </p:txBody>
       </p:sp>
       <p:sp>
@@ -21445,7 +21931,10 @@
         </p:spPr>
         <p:txBody>
           <a:bodyPr/>
-          <a:p/>
+          <a:p>
+            <a:pPr/>
+            <a:endParaRPr/>
+          </a:p>
         </p:txBody>
       </p:sp>
       <p:sp>
@@ -21550,7 +22039,10 @@
         </p:spPr>
         <p:txBody>
           <a:bodyPr/>
-          <a:p/>
+          <a:p>
+            <a:pPr/>
+            <a:endParaRPr/>
+          </a:p>
         </p:txBody>
       </p:sp>
       <p:pic>
@@ -21682,7 +22174,10 @@
         </p:spPr>
         <p:txBody>
           <a:bodyPr/>
-          <a:p/>
+          <a:p>
+            <a:pPr/>
+            <a:endParaRPr/>
+          </a:p>
         </p:txBody>
       </p:sp>
       <p:pic>
@@ -21866,7 +22361,7 @@
   <p:cSld>
     <p:spTree>
       <p:nvGrpSpPr>
-        <p:cNvPr id="555" name="" descr="&lt;Slide style={{ background: '#FFFFFF', padding: 0 }}&gt;&#10;  &lt;Box style={{ height: 72, background: '#1E4FA8', padding: '0 40px', flexDirection: 'row', alignItems: 'center', justifyContent: 'space-between' }}&gt;&#10;    &lt;Text style={{ fontSize: 15, color: '#B9CDF0', letterSpacing: 1 }}&gt;ISAD · INFORMATION SYSTEMS ANALYSIS &amp;amp; DESIGN&lt;/Text&gt;&#10;    &lt;Text style={{ fontSize: 15, color: '#B9CDF0' }}&gt;W01 · HOMEWORK&lt;/Text&gt;&#10;  &lt;/Box&gt;&#10;  &lt;Box style={{ padding: '24px 40px 0 40px' }}&gt;&#10;    &lt;Text style={{ fontSize: 34, fontWeight: 'bold', color: '#0E3F8C' }}&gt;Homework for Week 1&lt;/Text&gt;&#10;  &lt;/Box&gt;&#10;  &lt;Box style={{ padding: '14px 40px 0 40px' }}&gt;&#10;    &lt;Box style={{ flexDirection: 'row', alignItems: 'center', gap: 12, padding: '12px 18px', background: '#E8EFF8', borderRadius: 10, borderLeft: '4px solid #1E4FA8' }}&gt;&#10;      &lt;FAIcon name=&quot;wrench&quot; style={{ fill: '#1E4FA8', width: 20, height: 20 }} /&gt;&#10;      &lt;Text style={{ fontSize: 16, fontWeight: 'bold', color: '#0E3F8C' }}&gt;First: set up your toolchain&lt;/Text&gt;&#10;      &lt;Text style={{ fontSize: 15, color: '#4A5568' }}&gt;draw.io · PlantUML · Git &amp;amp; GitHub · VS Code · Markdown&lt;/Text&gt;&#10;      &lt;Text style={{ fontSize: 14, color: '#1E4FA8', fontWeight: 'bold' }}&gt;Lab Guide §1&lt;/Text&gt;&#10;    &lt;/Box&gt;&#10;  &lt;/Box&gt;&#10;  &lt;Box style={{ flex: 1, padding: '16px 40px 0 40px', flexDirection: 'row', gap: 28 }}&gt;&#10;    &lt;Box style={{ width: 300, padding: '28px 24px', background: '#0E3F8C', borderRadius: 12, flexDirection: 'column', justifyContent: 'center', gap: 14 }}&gt;&#10;      &lt;Text style={{ fontSize: 22, fontWeight: 'bold', color: '#FFFFFF', lineHeight: 1.35 }}&gt;Read first, then write&lt;/Text&gt;&#10;      &lt;Text style={{ fontSize: 16, color: '#C5D4EA', lineHeight: 1.55 }}&gt;The project documents and the Lab Guide define everything that follows. Read them before the next class.&lt;/Text&gt;&#10;    &lt;/Box&gt;&#10;    &lt;Box style={{ flex: 1, flexDirection: 'column', gap: 12, justifyContent: 'center' }}&gt;&#10;      {[&#10;        ['book', 'Read the Project Guidebook', 'Milestones, submission rules, grading — handed out today.'],&#10;        ['calendar', 'Read the Deadline Schedule', 'All hard deadlines with dates. First: M0 due Fri Sep 11.'],&#10;        ['file-text', 'Read Larman Ch. 1–2', 'Skim — it frames the next two weeks.'],&#10;        ['edit', 'Write a 150-word paragraph', '&quot;One information system I use daily, and what would break if the analyst had failed.&quot;'],&#10;      ].map(([icon, t, d]) =&gt; (&#10;        &lt;Box key={t} style={{ flexDirection: 'row', gap: 14, alignItems: 'center', padding: '14px 18px', background: '#F7F9FC', borderRadius: 10, border: '1px solid #E5E7EB' }}&gt;&#10;          &lt;Box style={{ width: 44, height: 44, borderRadius: 10, background: '#E8EFF8', justifyContent: 'center', alignItems: 'center' }}&gt;&#10;            &lt;FAIcon name={icon} style={{ fill: '#1E4FA8', width: 22, height: 22 }} /&gt;&#10;          &lt;/Box&gt;&#10;          &lt;Box style={{ flexDirection: 'column', gap: 3 }}&gt;&#10;            &lt;Text style={{ fontSize: 17, fontWeight: 'bold', color: '#1A2230' }}&gt;{t}&lt;/Text&gt;&#10;            &lt;Text style={{ fontSize: 14, color: '#4A5568', lineHeight: 1.5 }}&gt;{d}&lt;/Text&gt;&#10;          &lt;/Box&gt;&#10;        &lt;/Box&gt;&#10;      ))}&#10;    &lt;/Box&gt;&#10;  &lt;/Box&gt;&#10;  &lt;Box style={{ height: 40, padding: '0 40px', flexDirection: 'row', alignItems: 'center', justifyContent: 'space-between' }}&gt;&#10;    &lt;Text style={{ fontSize: 13, color: '#8B97A8' }}&gt;ISAD · Fall 2026&lt;/Text&gt;&#10;    &lt;Text style={{ fontSize: 14, color: '#1E4FA8', fontWeight: 'bold' }}&gt;36 / 38&lt;/Text&gt;&#10;  &lt;/Box&gt;&#10;&lt;/Slide&gt;"/>
+        <p:cNvPr id="555" name=""/>
         <p:cNvGrpSpPr/>
         <p:nvPr/>
       </p:nvGrpSpPr>
@@ -21899,7 +22394,10 @@
         </p:spPr>
         <p:txBody>
           <a:bodyPr/>
-          <a:p/>
+          <a:p>
+            <a:pPr/>
+            <a:endParaRPr/>
+          </a:p>
         </p:txBody>
       </p:sp>
       <p:sp>
@@ -21923,7 +22421,10 @@
         </p:spPr>
         <p:txBody>
           <a:bodyPr/>
-          <a:p/>
+          <a:p>
+            <a:pPr/>
+            <a:endParaRPr/>
+          </a:p>
         </p:txBody>
       </p:sp>
       <p:sp>
@@ -22054,7 +22555,10 @@
         </p:spPr>
         <p:txBody>
           <a:bodyPr/>
-          <a:p/>
+          <a:p>
+            <a:pPr/>
+            <a:endParaRPr/>
+          </a:p>
         </p:txBody>
       </p:sp>
       <p:sp>
@@ -22111,7 +22615,10 @@
         </p:spPr>
         <p:txBody>
           <a:bodyPr/>
-          <a:p/>
+          <a:p>
+            <a:pPr/>
+            <a:endParaRPr/>
+          </a:p>
         </p:txBody>
       </p:sp>
       <p:pic>
@@ -22273,7 +22780,10 @@
         </p:spPr>
         <p:txBody>
           <a:bodyPr/>
-          <a:p/>
+          <a:p>
+            <a:pPr/>
+            <a:endParaRPr/>
+          </a:p>
         </p:txBody>
       </p:sp>
       <p:sp>
@@ -22376,7 +22886,10 @@
         </p:spPr>
         <p:txBody>
           <a:bodyPr/>
-          <a:p/>
+          <a:p>
+            <a:pPr/>
+            <a:endParaRPr/>
+          </a:p>
         </p:txBody>
       </p:sp>
       <p:sp>
@@ -22402,7 +22915,10 @@
         </p:spPr>
         <p:txBody>
           <a:bodyPr/>
-          <a:p/>
+          <a:p>
+            <a:pPr/>
+            <a:endParaRPr/>
+          </a:p>
         </p:txBody>
       </p:sp>
       <p:pic>
@@ -22534,7 +23050,10 @@
         </p:spPr>
         <p:txBody>
           <a:bodyPr/>
-          <a:p/>
+          <a:p>
+            <a:pPr/>
+            <a:endParaRPr/>
+          </a:p>
         </p:txBody>
       </p:sp>
       <p:sp>
@@ -22560,7 +23079,10 @@
         </p:spPr>
         <p:txBody>
           <a:bodyPr/>
-          <a:p/>
+          <a:p>
+            <a:pPr/>
+            <a:endParaRPr/>
+          </a:p>
         </p:txBody>
       </p:sp>
       <p:pic>
@@ -22692,7 +23214,10 @@
         </p:spPr>
         <p:txBody>
           <a:bodyPr/>
-          <a:p/>
+          <a:p>
+            <a:pPr/>
+            <a:endParaRPr/>
+          </a:p>
         </p:txBody>
       </p:sp>
       <p:sp>
@@ -22718,7 +23243,10 @@
         </p:spPr>
         <p:txBody>
           <a:bodyPr/>
-          <a:p/>
+          <a:p>
+            <a:pPr/>
+            <a:endParaRPr/>
+          </a:p>
         </p:txBody>
       </p:sp>
       <p:pic>
@@ -22850,7 +23378,10 @@
         </p:spPr>
         <p:txBody>
           <a:bodyPr/>
-          <a:p/>
+          <a:p>
+            <a:pPr/>
+            <a:endParaRPr/>
+          </a:p>
         </p:txBody>
       </p:sp>
       <p:sp>
@@ -22876,7 +23407,10 @@
         </p:spPr>
         <p:txBody>
           <a:bodyPr/>
-          <a:p/>
+          <a:p>
+            <a:pPr/>
+            <a:endParaRPr/>
+          </a:p>
         </p:txBody>
       </p:sp>
       <p:pic>
@@ -23060,7 +23594,7 @@
   <p:cSld>
     <p:spTree>
       <p:nvGrpSpPr>
-        <p:cNvPr id="592" name="" descr="&lt;Slide style={{ background: '#FFFFFF', padding: 0 }}&gt;&#10;  &lt;Box style={{ height: 72, background: '#1E4FA8', padding: '0 40px', flexDirection: 'row', alignItems: 'center', justifyContent: 'space-between' }}&gt;&#10;    &lt;Text style={{ fontSize: 15, color: '#B9CDF0', letterSpacing: 1 }}&gt;ISAD · INFORMATION SYSTEMS ANALYSIS &amp;amp; DESIGN&lt;/Text&gt;&#10;    &lt;Text style={{ fontSize: 15, color: '#B9CDF0' }}&gt;W01 · PROJECT&lt;/Text&gt;&#10;  &lt;/Box&gt;&#10;  &lt;Box style={{ padding: '24px 40px 0 40px' }}&gt;&#10;    &lt;Text style={{ fontSize: 34, fontWeight: 'bold', color: '#0E3F8C' }}&gt;Getting Ready for M0 — Kickoff&lt;/Text&gt;&#10;  &lt;/Box&gt;&#10;  &lt;Box style={{ flex: 1, padding: '18px 40px 0 40px', flexDirection: 'row', gap: 28 }}&gt;&#10;    &lt;Box style={{ flex: 3, flexDirection: 'column', gap: 12, justifyContent: 'center' }}&gt;&#10;      &lt;Text style={{ fontSize: 18, fontWeight: 'bold', color: '#1A2230', marginBottom: 4 }}&gt;The M0 checklist (pass / fail)&lt;/Text&gt;&#10;      {[&#10;        'Confirm the team of four and agree on roles.',&#10;        'Draft a team charter — Appendix A of the Guidebook.',&#10;        'List the stakeholders (from Exercise 1.2).',&#10;        'Write a one-paragraph project vision.',&#10;        'Create a GitHub repo and share it with the instructor.',&#10;      ].map((s, i) =&gt; (&#10;        &lt;Box key={i} style={{ flexDirection: 'row', gap: 14, alignItems: 'center', padding: '13px 18px', background: '#F7F9FC', borderRadius: 10, border: '1px solid #E5E7EB' }}&gt;&#10;          &lt;Box style={{ width: 28, height: 28, borderRadius: 8, background: '#1E4FA8', justifyContent: 'center', alignItems: 'center' }}&gt;&#10;            &lt;FAIcon name='check' style={{ fill: '#FFFFFF', width: 15, height: 15 }} /&gt;&#10;          &lt;/Box&gt;&#10;          &lt;Text style={{ flex: 1, fontSize: 15, color: '#1A2230' }}&gt;{s}&lt;/Text&gt;&#10;        &lt;/Box&gt;&#10;      ))}&#10;    &lt;/Box&gt;&#10;    &lt;Box style={{ flex: 2, padding: '28px 24px', background: '#0E3F8C', borderRadius: 12, flexDirection: 'column', justifyContent: 'center', gap: 12 }}&gt;&#10;      &lt;Text style={{ fontSize: 16, color: '#B9CDF0', letterSpacing: 1 }}&gt;M0 DUE&lt;/Text&gt;&#10;      &lt;Text style={{ fontSize: 44, fontWeight: 'bold', color: '#FFC107', lineHeight: 1.1 }}&gt;Fri, Sep 11&lt;/Text&gt;&#10;      &lt;Text style={{ fontSize: 15, color: '#C5D4EA', lineHeight: 1.5 }}&gt;Submit by pushing to GitHub and tagging the commit &lt;span style={{ fontWeight: 'bold', color: '#FFFFFF' }}&gt;m0&lt;/span&gt;. Full protocol in the Deadline Guide.&lt;/Text&gt;&#10;    &lt;/Box&gt;&#10;  &lt;/Box&gt;&#10;  &lt;Box style={{ height: 40, padding: '0 40px', flexDirection: 'row', alignItems: 'center', justifyContent: 'space-between' }}&gt;&#10;    &lt;Text style={{ fontSize: 13, color: '#8B97A8' }}&gt;ISAD · Fall 2026&lt;/Text&gt;&#10;    &lt;Text style={{ fontSize: 14, color: '#1E4FA8', fontWeight: 'bold' }}&gt;37 / 38&lt;/Text&gt;&#10;  &lt;/Box&gt;&#10;&lt;/Slide&gt;"/>
+        <p:cNvPr id="592" name=""/>
         <p:cNvGrpSpPr/>
         <p:nvPr/>
       </p:nvGrpSpPr>
@@ -23093,7 +23627,10 @@
         </p:spPr>
         <p:txBody>
           <a:bodyPr/>
-          <a:p/>
+          <a:p>
+            <a:pPr/>
+            <a:endParaRPr/>
+          </a:p>
         </p:txBody>
       </p:sp>
       <p:sp>
@@ -23117,7 +23654,10 @@
         </p:spPr>
         <p:txBody>
           <a:bodyPr/>
-          <a:p/>
+          <a:p>
+            <a:pPr/>
+            <a:endParaRPr/>
+          </a:p>
         </p:txBody>
       </p:sp>
       <p:sp>
@@ -23288,7 +23828,10 @@
         </p:spPr>
         <p:txBody>
           <a:bodyPr/>
-          <a:p/>
+          <a:p>
+            <a:pPr/>
+            <a:endParaRPr/>
+          </a:p>
         </p:txBody>
       </p:sp>
       <p:sp>
@@ -23314,7 +23857,10 @@
         </p:spPr>
         <p:txBody>
           <a:bodyPr/>
-          <a:p/>
+          <a:p>
+            <a:pPr/>
+            <a:endParaRPr/>
+          </a:p>
         </p:txBody>
       </p:sp>
       <p:pic>
@@ -23411,7 +23957,10 @@
         </p:spPr>
         <p:txBody>
           <a:bodyPr/>
-          <a:p/>
+          <a:p>
+            <a:pPr/>
+            <a:endParaRPr/>
+          </a:p>
         </p:txBody>
       </p:sp>
       <p:sp>
@@ -23437,7 +23986,10 @@
         </p:spPr>
         <p:txBody>
           <a:bodyPr/>
-          <a:p/>
+          <a:p>
+            <a:pPr/>
+            <a:endParaRPr/>
+          </a:p>
         </p:txBody>
       </p:sp>
       <p:pic>
@@ -23534,7 +24086,10 @@
         </p:spPr>
         <p:txBody>
           <a:bodyPr/>
-          <a:p/>
+          <a:p>
+            <a:pPr/>
+            <a:endParaRPr/>
+          </a:p>
         </p:txBody>
       </p:sp>
       <p:sp>
@@ -23560,7 +24115,10 @@
         </p:spPr>
         <p:txBody>
           <a:bodyPr/>
-          <a:p/>
+          <a:p>
+            <a:pPr/>
+            <a:endParaRPr/>
+          </a:p>
         </p:txBody>
       </p:sp>
       <p:pic>
@@ -23657,7 +24215,10 @@
         </p:spPr>
         <p:txBody>
           <a:bodyPr/>
-          <a:p/>
+          <a:p>
+            <a:pPr/>
+            <a:endParaRPr/>
+          </a:p>
         </p:txBody>
       </p:sp>
       <p:sp>
@@ -23683,7 +24244,10 @@
         </p:spPr>
         <p:txBody>
           <a:bodyPr/>
-          <a:p/>
+          <a:p>
+            <a:pPr/>
+            <a:endParaRPr/>
+          </a:p>
         </p:txBody>
       </p:sp>
       <p:pic>
@@ -23780,7 +24344,10 @@
         </p:spPr>
         <p:txBody>
           <a:bodyPr/>
-          <a:p/>
+          <a:p>
+            <a:pPr/>
+            <a:endParaRPr/>
+          </a:p>
         </p:txBody>
       </p:sp>
       <p:sp>
@@ -23806,7 +24373,10 @@
         </p:spPr>
         <p:txBody>
           <a:bodyPr/>
-          <a:p/>
+          <a:p>
+            <a:pPr/>
+            <a:endParaRPr/>
+          </a:p>
         </p:txBody>
       </p:sp>
       <p:pic>
@@ -23898,7 +24468,10 @@
         </p:spPr>
         <p:txBody>
           <a:bodyPr/>
-          <a:p/>
+          <a:p>
+            <a:pPr/>
+            <a:endParaRPr/>
+          </a:p>
         </p:txBody>
       </p:sp>
       <p:sp>
@@ -24108,7 +24681,7 @@
   <p:cSld>
     <p:spTree>
       <p:nvGrpSpPr>
-        <p:cNvPr id="625" name="" descr="&lt;Slide style={{ background: '#0E3F8C', padding: 0 }}&gt;&#10;  &lt;Box style={{ flexDirection: 'column', height: '100%', justifyContent: 'center', padding: '0 80px', position: 'relative' }}&gt;&#10;    &lt;Box style={{ position: 'absolute', top: 0, left: 0, right: 0, height: 8, background: '#1E4FA8' }} /&gt;&#10;    &lt;Text style={{ fontSize: 15, color: '#7FA2D6', letterSpacing: 2, marginBottom: 22 }}&gt;WEEK 01 · WRAP-UP&lt;/Text&gt;&#10;    &lt;Text style={{ fontSize: 52, fontWeight: 'bold', color: '#FFFFFF', fontFamily: 'Georgia, serif', lineHeight: 1.15 }}&gt;You can now see&lt;br /&gt;where we are going.&lt;/Text&gt;&#10;    &lt;Box style={{ width: 88, height: 5, background: '#FFC107', marginTop: 28, marginBottom: 26 }} /&gt;&#10;    &lt;Box style={{ flexDirection: 'column', gap: 12 }}&gt;&#10;      {[&#10;        'An information system = people + process + data + technology.',&#10;        'The analyst is the bridge between business and technology.',&#10;        'Analysis answers WHAT, design answers HOW — and WHAT comes first.',&#10;        'Next week: object-oriented foundations &amp; the CampusBites kickoff.',&#10;      ].map((t) =&gt; (&#10;        &lt;Box key={t} style={{ flexDirection: 'row', alignItems: 'center', gap: 12 }}&gt;&#10;          &lt;Box style={{ width: 8, height: 8, borderRadius: 4, background: '#3D7BD9' }} /&gt;&#10;          &lt;Text style={{ fontSize: 19, color: '#C5D4EA' }}&gt;{t}&lt;/Text&gt;&#10;        &lt;/Box&gt;&#10;      ))}&#10;    &lt;/Box&gt;&#10;    &lt;Box style={{ position: 'absolute', bottom: 46, left: 80, right: 80, flexDirection: 'row', justifyContent: 'space-between', alignItems: 'center', borderTop: '1px solid #2B5793', paddingTop: 18 }}&gt;&#10;      &lt;Text style={{ fontSize: 17, color: '#C5D4EA' }}&gt;Questions? Ask now — or email any time.&lt;/Text&gt;&#10;      &lt;Text style={{ fontSize: 17, color: '#C5D4EA' }}&gt;Ren Zheng · Fall 2026&lt;/Text&gt;&#10;    &lt;/Box&gt;&#10;  &lt;/Box&gt;&#10;&lt;/Slide&gt;"/>
+        <p:cNvPr id="625" name=""/>
         <p:cNvGrpSpPr/>
         <p:nvPr/>
       </p:nvGrpSpPr>
@@ -24141,7 +24714,10 @@
         </p:spPr>
         <p:txBody>
           <a:bodyPr/>
-          <a:p/>
+          <a:p>
+            <a:pPr/>
+            <a:endParaRPr/>
+          </a:p>
         </p:txBody>
       </p:sp>
       <p:sp>
@@ -24253,7 +24829,10 @@
         </p:spPr>
         <p:txBody>
           <a:bodyPr/>
-          <a:p/>
+          <a:p>
+            <a:pPr/>
+            <a:endParaRPr/>
+          </a:p>
         </p:txBody>
       </p:sp>
       <p:sp>
@@ -24279,7 +24858,10 @@
         </p:spPr>
         <p:txBody>
           <a:bodyPr/>
-          <a:p/>
+          <a:p>
+            <a:pPr/>
+            <a:endParaRPr/>
+          </a:p>
         </p:txBody>
       </p:sp>
       <p:sp>
@@ -24340,7 +24922,10 @@
         </p:spPr>
         <p:txBody>
           <a:bodyPr/>
-          <a:p/>
+          <a:p>
+            <a:pPr/>
+            <a:endParaRPr/>
+          </a:p>
         </p:txBody>
       </p:sp>
       <p:sp>
@@ -24401,7 +24986,10 @@
         </p:spPr>
         <p:txBody>
           <a:bodyPr/>
-          <a:p/>
+          <a:p>
+            <a:pPr/>
+            <a:endParaRPr/>
+          </a:p>
         </p:txBody>
       </p:sp>
       <p:sp>
@@ -24462,7 +25050,10 @@
         </p:spPr>
         <p:txBody>
           <a:bodyPr/>
-          <a:p/>
+          <a:p>
+            <a:pPr/>
+            <a:endParaRPr/>
+          </a:p>
         </p:txBody>
       </p:sp>
       <p:sp>
@@ -24521,7 +25112,10 @@
         </p:spPr>
         <p:txBody>
           <a:bodyPr/>
-          <a:p/>
+          <a:p>
+            <a:pPr/>
+            <a:endParaRPr/>
+          </a:p>
         </p:txBody>
       </p:sp>
       <p:sp>
@@ -24561,7 +25155,10 @@
         </p:spPr>
         <p:txBody>
           <a:bodyPr/>
-          <a:p/>
+          <a:p>
+            <a:pPr/>
+            <a:endParaRPr/>
+          </a:p>
         </p:txBody>
       </p:sp>
       <p:sp>
@@ -24644,7 +25241,7 @@
   <p:cSld>
     <p:spTree>
       <p:nvGrpSpPr>
-        <p:cNvPr id="642" name="" descr="&lt;Slide style={{ background: '#FFFFFF', padding: 0 }}&gt;&#10;  &lt;Box style={{ height: 72, background: '#1E4FA8', padding: '0 40px', flexDirection: 'row', alignItems: 'center', justifyContent: 'space-between' }}&gt;&#10;    &lt;Text style={{ fontSize: 15, color: '#B9CDF0', letterSpacing: 1 }}&gt;ISAD · INFORMATION SYSTEMS ANALYSIS &amp;amp; DESIGN&lt;/Text&gt;&#10;    &lt;Text style={{ fontSize: 15, color: '#B9CDF0' }}&gt;W01 · INTRODUCTION&lt;/Text&gt;&#10;  &lt;/Box&gt;&#10;  &lt;Box style={{ padding: '24px 40px 0 40px' }}&gt;&#10;    &lt;Text style={{ fontSize: 34, fontWeight: 'bold', color: '#0E3F8C' }}&gt;Course Logistics&lt;/Text&gt;&#10;  &lt;/Box&gt;&#10;  &lt;Box style={{ flex: 1, padding: '18px 40px 0 40px', flexDirection: 'row', gap: 28 }}&gt;&#10;    &lt;Box style={{ flex: 3, padding: '24px 28px', background: '#F7F9FC', borderRadius: 12, border: '1px solid #E5E7EB', flexDirection: 'column' }}&gt;&#10;      &lt;Box style={{ flexDirection: 'row', alignItems: 'center', gap: 12, marginBottom: 18 }}&gt;&#10;        &lt;FAIcon name='clock' style={{ fill: '#1E4FA8', width: 26, height: 26 }} /&gt;&#10;        &lt;Text style={{ fontSize: 24, fontWeight: 'bold', color: '#1A2230' }}&gt;Four Consecutive Hours / Week&lt;/Text&gt;&#10;      &lt;/Box&gt;&#10;      &lt;Box style={{ flexDirection: 'row', gap: 20 }}&gt;&#10;        &lt;Box style={{ flex: 1, padding: '20px', background: '#FFFFFF', borderRadius: 10, border: '1px solid #D6DCE5', flexDirection: 'column', gap: 10 }}&gt;&#10;          &lt;Box style={{ padding: '4px 12px', background: '#E8EFF8', borderRadius: 12, alignSelf: 'flex-start' }}&gt;&#10;            &lt;Text style={{ fontSize: 14, fontWeight: 'bold', color: '#1E4FA8' }}&gt;PART 1 · 2H&lt;/Text&gt;&#10;          &lt;/Box&gt;&#10;          &lt;Text style={{ fontSize: 22, fontWeight: 'bold', color: '#0E3F8C' }}&gt;Lecture&lt;/Text&gt;&#10;          &lt;Text style={{ fontSize: 16, color: '#4A5568', lineHeight: 1.55 }}&gt;Concepts, terminology and worked examples. Slides + whiteboard.&lt;/Text&gt;&#10;        &lt;/Box&gt;&#10;        &lt;Box style={{ flex: 1, padding: '20px', background: '#FFFFFF', borderRadius: 10, border: '1px solid #D6DCE5', flexDirection: 'column', gap: 10 }}&gt;&#10;          &lt;Box style={{ padding: '4px 12px', background: '#E8EFF8', borderRadius: 12, alignSelf: 'flex-start' }}&gt;&#10;            &lt;Text style={{ fontSize: 14, fontWeight: 'bold', color: '#1E4FA8' }}&gt;PART 2 · 2H&lt;/Text&gt;&#10;          &lt;/Box&gt;&#10;          &lt;Text style={{ fontSize: 22, fontWeight: 'bold', color: '#0E3F8C' }}&gt;Lab&lt;/Text&gt;&#10;          &lt;Text style={{ fontSize: 16, color: '#4A5568', lineHeight: 1.55 }}&gt;Guided demo (~25 min) then hands-on lab work (~90 min) tied to CampusBites.&lt;/Text&gt;&#10;        &lt;/Box&gt;&#10;      &lt;/Box&gt;&#10;    &lt;/Box&gt;&#10;    &lt;Box style={{ flex: 2, padding: '24px 24px', background: '#0E3F8C', borderRadius: 12, flexDirection: 'column', gap: 14, justifyContent: 'center' }}&gt;&#10;      &lt;Text style={{ fontSize: 18, fontWeight: 'bold', color: '#FFFFFF', marginBottom: 6 }}&gt;At a Glance&lt;/Text&gt;&#10;      {[&#10;        ['16', 'weeks'],&#10;        ['32 + 32', 'lecture + lab hours'],&#10;        ['EN', 'all materials in English'],&#10;        ['Larman', 'primary textbook'],&#10;      ].map(([v, k]) =&gt; (&#10;        &lt;Box key={k} style={{ flexDirection: 'row', alignItems: 'baseline', gap: 10, borderBottom: '1px solid #2B5793', paddingBottom: 10 }}&gt;&#10;          &lt;Text style={{ fontSize: 24, fontWeight: 'bold', color: '#FFC107' }}&gt;{v}&lt;/Text&gt;&#10;          &lt;Text style={{ fontSize: 16, color: '#C5D4EA' }}&gt;{k}&lt;/Text&gt;&#10;        &lt;/Box&gt;&#10;      ))}&#10;    &lt;/Box&gt;&#10;  &lt;/Box&gt;&#10;  &lt;Box style={{ height: 40, padding: '0 40px', flexDirection: 'row', alignItems: 'center', justifyContent: 'space-between' }}&gt;&#10;    &lt;Text style={{ fontSize: 13, color: '#8B97A8' }}&gt;ISAD · Fall 2026&lt;/Text&gt;&#10;    &lt;Text style={{ fontSize: 14, color: '#1E4FA8', fontWeight: 'bold' }}&gt;04 / 38&lt;/Text&gt;&#10;  &lt;/Box&gt;&#10;&lt;/Slide&gt;"/>
+        <p:cNvPr id="642" name=""/>
         <p:cNvGrpSpPr/>
         <p:nvPr/>
       </p:nvGrpSpPr>
@@ -24677,7 +25274,10 @@
         </p:spPr>
         <p:txBody>
           <a:bodyPr/>
-          <a:p/>
+          <a:p>
+            <a:pPr/>
+            <a:endParaRPr/>
+          </a:p>
         </p:txBody>
       </p:sp>
       <p:sp>
@@ -24701,7 +25301,10 @@
         </p:spPr>
         <p:txBody>
           <a:bodyPr/>
-          <a:p/>
+          <a:p>
+            <a:pPr/>
+            <a:endParaRPr/>
+          </a:p>
         </p:txBody>
       </p:sp>
       <p:sp>
@@ -24837,7 +25440,10 @@
         </p:spPr>
         <p:txBody>
           <a:bodyPr/>
-          <a:p/>
+          <a:p>
+            <a:pPr/>
+            <a:endParaRPr/>
+          </a:p>
         </p:txBody>
       </p:sp>
       <p:pic>
@@ -24934,7 +25540,10 @@
         </p:spPr>
         <p:txBody>
           <a:bodyPr/>
-          <a:p/>
+          <a:p>
+            <a:pPr/>
+            <a:endParaRPr/>
+          </a:p>
         </p:txBody>
       </p:sp>
       <p:sp>
@@ -24960,7 +25569,10 @@
         </p:spPr>
         <p:txBody>
           <a:bodyPr/>
-          <a:p/>
+          <a:p>
+            <a:pPr/>
+            <a:endParaRPr/>
+          </a:p>
         </p:txBody>
       </p:sp>
       <p:sp>
@@ -25098,7 +25710,10 @@
         </p:spPr>
         <p:txBody>
           <a:bodyPr/>
-          <a:p/>
+          <a:p>
+            <a:pPr/>
+            <a:endParaRPr/>
+          </a:p>
         </p:txBody>
       </p:sp>
       <p:sp>
@@ -25124,7 +25739,10 @@
         </p:spPr>
         <p:txBody>
           <a:bodyPr/>
-          <a:p/>
+          <a:p>
+            <a:pPr/>
+            <a:endParaRPr/>
+          </a:p>
         </p:txBody>
       </p:sp>
       <p:sp>
@@ -25257,7 +25875,10 @@
         </p:spPr>
         <p:txBody>
           <a:bodyPr/>
-          <a:p/>
+          <a:p>
+            <a:pPr/>
+            <a:endParaRPr/>
+          </a:p>
         </p:txBody>
       </p:sp>
       <p:sp>
@@ -25332,7 +25953,10 @@
         </p:spPr>
         <p:txBody>
           <a:bodyPr/>
-          <a:p/>
+          <a:p>
+            <a:pPr/>
+            <a:endParaRPr/>
+          </a:p>
         </p:txBody>
       </p:sp>
       <p:sp>
@@ -25442,7 +26066,10 @@
         </p:spPr>
         <p:txBody>
           <a:bodyPr/>
-          <a:p/>
+          <a:p>
+            <a:pPr/>
+            <a:endParaRPr/>
+          </a:p>
         </p:txBody>
       </p:sp>
       <p:sp>
@@ -25552,7 +26179,10 @@
         </p:spPr>
         <p:txBody>
           <a:bodyPr/>
-          <a:p/>
+          <a:p>
+            <a:pPr/>
+            <a:endParaRPr/>
+          </a:p>
         </p:txBody>
       </p:sp>
       <p:sp>
@@ -25662,7 +26292,10 @@
         </p:spPr>
         <p:txBody>
           <a:bodyPr/>
-          <a:p/>
+          <a:p>
+            <a:pPr/>
+            <a:endParaRPr/>
+          </a:p>
         </p:txBody>
       </p:sp>
       <p:sp>
@@ -25815,7 +26448,7 @@
   <p:cSld>
     <p:spTree>
       <p:nvGrpSpPr>
-        <p:cNvPr id="677" name="" descr="&lt;Slide style={{ background: '#FFFFFF', padding: 0 }}&gt;&#10;  &lt;Box style={{ height: 72, background: '#1E4FA8', padding: '0 40px', flexDirection: 'row', alignItems: 'center', justifyContent: 'space-between' }}&gt;&#10;    &lt;Text style={{ fontSize: 15, color: '#B9CDF0', letterSpacing: 1 }}&gt;ISAD · INFORMATION SYSTEMS ANALYSIS &amp;amp; DESIGN&lt;/Text&gt;&#10;    &lt;Text style={{ fontSize: 15, color: '#B9CDF0' }}&gt;W01 · INTRODUCTION&lt;/Text&gt;&#10;  &lt;/Box&gt;&#10;  &lt;Box style={{ padding: '24px 40px 0 40px' }}&gt;&#10;    &lt;Text style={{ fontSize: 34, fontWeight: 'bold', color: '#0E3F8C' }}&gt;Assessment — No Written Exam&lt;/Text&gt;&#10;  &lt;/Box&gt;&#10;  &lt;Box style={{ padding: '8px 40px 0 40px' }}&gt;&#10;    &lt;Box style={{ padding: '10px 18px', background: '#E8EFF8', borderRadius: 8 }}&gt;&#10;      &lt;Text style={{ fontSize: 16, color: '#0E3F8C', fontWeight: 'bold' }}&gt;Course grade = Formative assessment (40 points × 100%) + Summative assessment (100 points × 60%)&lt;/Text&gt;&#10;    &lt;/Box&gt;&#10;  &lt;/Box&gt;&#10;  &lt;Box style={{ flex: 1, padding: '18px 40px 0 40px', flexDirection: 'row', gap: 28, alignItems: 'stretch' }}&gt;&#10;    {[&#10;      { n: '40', pct: ' pts', t: 'Formative', d: 'Attendance 0 · Class participation 10 · Level-3 project 20 · Assignments 10. Built all semester long, counted in full.', hl: true },&#10;      { n: '60', pct: ' pts', t: 'Summative', d: 'Final defense in W16, scored out of 100 × 60%: walkthrough 30 · individual Q&amp;A 55 · English 10 · reflection 5.', hl: false },&#10;      { n: '+5', pct: '', t: 'Bonus', d: 'Extra patterns, exceptional refactoring, outstanding documentation. Course total capped at 100.', hl: false },&#10;    ].map((c, i) =&gt; (&#10;      &lt;Box key={c.t} style={{ flex: 1, padding: '24px 22px', background: i === 0 ? '#0E3F8C' : '#F7F9FC', borderRadius: 12, border: i === 0 ? '1px solid #0E3F8C' : '1px solid #E5E7EB', flexDirection: 'column' }}&gt;&#10;        &lt;Box style={{ flexDirection: 'row', alignItems: 'baseline', marginBottom: 12 }}&gt;&#10;          &lt;Text style={{ fontSize: 64, fontWeight: 'bold', color: i === 0 ? '#FFC107' : '#1E4FA8', lineHeight: 1 }}&gt;{c.n}&lt;/Text&gt;&#10;          &lt;Text style={{ fontSize: 26, fontWeight: 'bold', color: i === 0 ? '#FFC107' : '#1E4FA8' }}&gt;{c.pct}&lt;/Text&gt;&#10;        &lt;/Box&gt;&#10;        &lt;Text style={{ fontSize: 22, fontWeight: 'bold', color: i === 0 ? '#FFFFFF' : '#1A2230', marginBottom: 10 }}&gt;{c.t}&lt;/Text&gt;&#10;        &lt;Text style={{ fontSize: 15, color: i === 0 ? '#C5D4EA' : '#4A5568', lineHeight: 1.55 }}&gt;{c.d}&lt;/Text&gt;&#10;      &lt;/Box&gt;&#10;    ))}&#10;  &lt;/Box&gt;&#10;  &lt;Box style={{ height: 40, padding: '0 40px', flexDirection: 'row', alignItems: 'center', justifyContent: 'space-between' }}&gt;&#10;    &lt;Text style={{ fontSize: 13, color: '#8B97A8' }}&gt;Formative 40 pts counted in full + defense score × 60% — no written exam&lt;/Text&gt;&#10;    &lt;Text style={{ fontSize: 14, color: '#1E4FA8', fontWeight: 'bold' }}&gt;05 / 38&lt;/Text&gt;&#10;  &lt;/Box&gt;&#10;&lt;/Slide&gt;"/>
+        <p:cNvPr id="677" name=""/>
         <p:cNvGrpSpPr/>
         <p:nvPr/>
       </p:nvGrpSpPr>
@@ -25848,7 +26481,10 @@
         </p:spPr>
         <p:txBody>
           <a:bodyPr/>
-          <a:p/>
+          <a:p>
+            <a:pPr/>
+            <a:endParaRPr/>
+          </a:p>
         </p:txBody>
       </p:sp>
       <p:sp>
@@ -25872,7 +26508,10 @@
         </p:spPr>
         <p:txBody>
           <a:bodyPr/>
-          <a:p/>
+          <a:p>
+            <a:pPr/>
+            <a:endParaRPr/>
+          </a:p>
         </p:txBody>
       </p:sp>
       <p:sp>
@@ -26003,7 +26642,10 @@
         </p:spPr>
         <p:txBody>
           <a:bodyPr/>
-          <a:p/>
+          <a:p>
+            <a:pPr/>
+            <a:endParaRPr/>
+          </a:p>
         </p:txBody>
       </p:sp>
       <p:sp>
@@ -26069,7 +26711,10 @@
         </p:spPr>
         <p:txBody>
           <a:bodyPr/>
-          <a:p/>
+          <a:p>
+            <a:pPr/>
+            <a:endParaRPr/>
+          </a:p>
         </p:txBody>
       </p:sp>
       <p:sp>
@@ -26242,7 +26887,10 @@
         </p:spPr>
         <p:txBody>
           <a:bodyPr/>
-          <a:p/>
+          <a:p>
+            <a:pPr/>
+            <a:endParaRPr/>
+          </a:p>
         </p:txBody>
       </p:sp>
       <p:sp>
@@ -26415,7 +27063,10 @@
         </p:spPr>
         <p:txBody>
           <a:bodyPr/>
-          <a:p/>
+          <a:p>
+            <a:pPr/>
+            <a:endParaRPr/>
+          </a:p>
         </p:txBody>
       </p:sp>
       <p:sp>
@@ -26626,7 +27277,7 @@
   <p:cSld>
     <p:spTree>
       <p:nvGrpSpPr>
-        <p:cNvPr id="702" name="" descr="&lt;Slide style={{ background: '#FFFFFF', padding: 0 }}&gt;&#10;  &lt;Box style={{ height: 72, background: '#1E4FA8', padding: '0 40px', flexDirection: 'row', alignItems: 'center', justifyContent: 'space-between' }}&gt;&#10;    &lt;Text style={{ fontSize: 15, color: '#B9CDF0', letterSpacing: 1 }}&gt;ISAD · INFORMATION SYSTEMS ANALYSIS &amp;amp; DESIGN&lt;/Text&gt;&#10;    &lt;Text style={{ fontSize: 15, color: '#B9CDF0' }}&gt;W01 · INTRODUCTION&lt;/Text&gt;&#10;  &lt;/Box&gt;&#10;  &lt;Box style={{ padding: '22px 40px 0 40px' }}&gt;&#10;    &lt;Text style={{ fontSize: 33, fontWeight: 'bold', color: '#0E3F8C' }}&gt;Assessment in Detail&lt;/Text&gt;&#10;  &lt;/Box&gt;&#10;  &lt;Box style={{ flex: 1, padding: '16px 40px 0 40px', flexDirection: 'row', gap: 22, alignItems: 'stretch' }}&gt;&#10;    &lt;Box style={{ flex: 1, padding: '18px 18px', background: '#F7F9FC', borderRadius: 12, border: '1px solid #E5E7EB', flexDirection: 'column' }}&gt;&#10;      &lt;Box style={{ flexDirection: 'row', alignItems: 'baseline', marginBottom: 12 }}&gt;&#10;        &lt;Text style={{ fontSize: 40, fontWeight: 'bold', color: '#0E3F8C', lineHeight: 1 }}&gt;40&lt;/Text&gt;&#10;        &lt;Text style={{ fontSize: 20, fontWeight: 'bold', color: '#0E3F8C' }}&gt; pts&lt;/Text&gt;&#10;        &lt;Text style={{ fontSize: 18, fontWeight: 'bold', color: '#1A2230', marginLeft: 10 }}&gt;Formative × 100%&lt;/Text&gt;&#10;      &lt;/Box&gt;&#10;      {[&#10;        ['F1', 'Attendance', '0'],&#10;        ['F2', 'Class participation', '10'],&#10;        ['F3', 'Level-3 project (CampusBites)', '20'],&#10;        ['F4', 'Assignments (5 × 2)', '10'],&#10;      ].map(([id, t, w]) =&gt; (&#10;        &lt;Box key={id} style={{ flexDirection: 'row', alignItems: 'center', gap: 10, padding: '10px 0', borderBottom: '1px solid #E5E7EB' }}&gt;&#10;          &lt;Box style={{ width: 34, height: 22, borderRadius: 5, background: '#E8EFF8', justifyContent: 'center', alignItems: 'center' }}&gt;&#10;            &lt;Text style={{ fontSize: 12, fontWeight: 'bold', color: '#1E4FA8' }}&gt;{id}&lt;/Text&gt;&#10;          &lt;/Box&gt;&#10;          &lt;Text style={{ flex: 1, fontSize: 14, color: '#4A5568' }}&gt;{t}&lt;/Text&gt;&#10;          &lt;Text style={{ fontSize: 14, fontWeight: 'bold', color: '#1E4FA8' }}&gt;{w}&lt;/Text&gt;&#10;        &lt;/Box&gt;&#10;      ))}&#10;      &lt;Box style={{ marginTop: 12, padding: '12px 14px', background: '#FFFFFF', borderRadius: 8, border: '1px solid #E5E7EB' }}&gt;&#10;        &lt;Text style={{ fontSize: 13, color: '#4A5568', lineHeight: 1.5 }}&gt;F3 = milestones &lt;span style={{ fontWeight: 'bold', color: '#1A2230' }}&gt;14&lt;/span&gt; (M0 1 · M1 3 · M2 4 · M3 3 · M4 3) + &lt;span style={{ fontWeight: 'bold', color: '#1A2230' }}&gt;your own&lt;/span&gt; contribution &amp;amp; Git 6.&lt;/Text&gt;&#10;      &lt;/Box&gt;&#10;    &lt;/Box&gt;&#10;    &lt;Box style={{ flex: 1, padding: '18px 18px', background: '#0E3F8C', borderRadius: 12, flexDirection: 'column' }}&gt;&#10;      &lt;Box style={{ flexDirection: 'row', alignItems: 'baseline', marginBottom: 12 }}&gt;&#10;        &lt;Text style={{ fontSize: 40, fontWeight: 'bold', color: '#FFC107', lineHeight: 1 }}&gt;100&lt;/Text&gt;&#10;        &lt;Text style={{ fontSize: 20, fontWeight: 'bold', color: '#FFC107' }}&gt; × 60%&lt;/Text&gt;&#10;        &lt;Text style={{ fontSize: 18, fontWeight: 'bold', color: '#FFFFFF', marginLeft: 10 }}&gt;Summative · W16 defense&lt;/Text&gt;&#10;      &lt;/Box&gt;&#10;      {[&#10;        ['S1', 'Portfolio walkthrough (team)', '30'],&#10;        ['S2', 'Individual Q&amp;A', '55'],&#10;        ['S3', 'English communication', '10'],&#10;        ['S4', 'Reflection &amp; contribution report', '5'],&#10;      ].map(([id, t, w]) =&gt; (&#10;        &lt;Box key={id} style={{ flexDirection: 'row', alignItems: 'center', gap: 10, padding: '10px 0', borderBottom: '1px solid #2B5793' }}&gt;&#10;          &lt;Box style={{ width: 34, height: 22, borderRadius: 5, background: '#2B5793', justifyContent: 'center', alignItems: 'center' }}&gt;&#10;            &lt;Text style={{ fontSize: 12, fontWeight: 'bold', color: '#FFC107' }}&gt;{id}&lt;/Text&gt;&#10;          &lt;/Box&gt;&#10;          &lt;Text style={{ flex: 1, fontSize: 14, color: '#C5D4EA' }}&gt;{t}&lt;/Text&gt;&#10;          &lt;Text style={{ fontSize: 14, fontWeight: 'bold', color: '#FFC107' }}&gt;{w}&lt;/Text&gt;&#10;        &lt;/Box&gt;&#10;      ))}&#10;      &lt;Box style={{ marginTop: 12, padding: '12px 14px', background: '#16325F', borderRadius: 8 }}&gt;&#10;        &lt;Text style={{ fontSize: 13, color: '#B9CDF0', lineHeight: 1.5 }}&gt;Every member is questioned on &lt;span style={{ fontWeight: 'bold', color: '#FFFFFF' }}&gt;any part&lt;/span&gt; of the team's work — not just &quot;your part&quot;.&lt;/Text&gt;&#10;      &lt;/Box&gt;&#10;    &lt;/Box&gt;&#10;    &lt;Box style={{ flex: 1, padding: '18px 18px', background: '#F7F9FC', borderRadius: 12, border: '1px solid #E5E7EB', flexDirection: 'column' }}&gt;&#10;      &lt;Box style={{ flexDirection: 'row', alignItems: 'baseline', marginBottom: 12 }}&gt;&#10;        &lt;Text style={{ fontSize: 40, fontWeight: 'bold', color: '#1E4FA8', lineHeight: 1 }}&gt;+5&lt;/Text&gt;&#10;        &lt;Text style={{ fontSize: 20, fontWeight: 'bold', color: '#1E4FA8' }}&gt; max&lt;/Text&gt;&#10;        &lt;Text style={{ fontSize: 18, fontWeight: 'bold', color: '#1A2230', marginLeft: 10 }}&gt;Bonus · cap 100&lt;/Text&gt;&#10;      &lt;/Box&gt;&#10;      {[&#10;        ['C1', 'Extra patterns (correct)', '+2'],&#10;        ['C2', 'Refactoring narrative', '+2'],&#10;        ['C3', 'Outstanding docs', '+1'],&#10;      ].map(([id, t, w]) =&gt; (&#10;        &lt;Box key={id} style={{ flexDirection: 'row', alignItems: 'center', gap: 10, padding: '10px 0', borderBottom: '1px solid #E5E7EB' }}&gt;&#10;          &lt;Box style={{ width: 34, height: 22, borderRadius: 5, background: '#E8EFF8', justifyContent: 'center', alignItems: 'center' }}&gt;&#10;            &lt;Text style={{ fontSize: 12, fontWeight: 'bold', color: '#1E4FA8' }}&gt;{id}&lt;/Text&gt;&#10;          &lt;/Box&gt;&#10;          &lt;Text style={{ flex: 1, fontSize: 14, color: '#4A5568' }}&gt;{t}&lt;/Text&gt;&#10;          &lt;Text style={{ fontSize: 13, fontWeight: 'bold', color: '#D9534F' }}&gt;{w}&lt;/Text&gt;&#10;        &lt;/Box&gt;&#10;      ))}&#10;      &lt;Box style={{ marginTop: 12, padding: '12px 14px', background: '#FFFFFF', borderRadius: 8, border: '1px solid #E5E7EB' }}&gt;&#10;        &lt;Text style={{ fontSize: 13, color: '#4A5568', lineHeight: 1.5 }}&gt;Weekly exercises feed &lt;span style={{ fontWeight: 'bold', color: '#1A2230' }}&gt;F2 participation&lt;/span&gt; (4 pts) — checked and discussed in class every week.&lt;/Text&gt;&#10;      &lt;/Box&gt;&#10;    &lt;/Box&gt;&#10;  &lt;/Box&gt;&#10;  &lt;Box style={{ height: 44, padding: '0 40px', flexDirection: 'row', alignItems: 'center', justifyContent: 'space-between', background: '#F7F9FC', borderTop: '1px solid #E5E7EB' }}&gt;&#10;    &lt;Box style={{ flexDirection: 'row', alignItems: 'center', gap: 8, flex: 1 }}&gt;&#10;      &lt;Text style={{ fontSize: 13, fontWeight: 'bold', color: '#0E3F8C' }}&gt;Milestones&lt;/Text&gt;&#10;      &lt;Text style={{ fontSize: 13, color: '#4A5568' }}&gt;M0 Sep 11 · M1 Oct 4 · M2 Oct 25 · M3 Nov 22 · M4 Dec 6 · M5 defense Dec 14–18&lt;/Text&gt;&#10;    &lt;/Box&gt;&#10;    &lt;Text style={{ fontSize: 14, color: '#1E4FA8', fontWeight: 'bold' }}&gt;06 / 38&lt;/Text&gt;&#10;  &lt;/Box&gt;&#10;&lt;/Slide&gt;"/>
+        <p:cNvPr id="702" name=""/>
         <p:cNvGrpSpPr/>
         <p:nvPr/>
       </p:nvGrpSpPr>
@@ -26659,7 +27310,10 @@
         </p:spPr>
         <p:txBody>
           <a:bodyPr/>
-          <a:p/>
+          <a:p>
+            <a:pPr/>
+            <a:endParaRPr/>
+          </a:p>
         </p:txBody>
       </p:sp>
       <p:sp>
@@ -26683,7 +27337,10 @@
         </p:spPr>
         <p:txBody>
           <a:bodyPr/>
-          <a:p/>
+          <a:p>
+            <a:pPr/>
+            <a:endParaRPr/>
+          </a:p>
         </p:txBody>
       </p:sp>
       <p:sp>
@@ -26819,7 +27476,10 @@
         </p:spPr>
         <p:txBody>
           <a:bodyPr/>
-          <a:p/>
+          <a:p>
+            <a:pPr/>
+            <a:endParaRPr/>
+          </a:p>
         </p:txBody>
       </p:sp>
       <p:sp>
@@ -26964,7 +27624,10 @@
         </p:spPr>
         <p:txBody>
           <a:bodyPr/>
-          <a:p/>
+          <a:p>
+            <a:pPr/>
+            <a:endParaRPr/>
+          </a:p>
         </p:txBody>
       </p:sp>
       <p:sp>
@@ -26990,7 +27653,10 @@
         </p:spPr>
         <p:txBody>
           <a:bodyPr/>
-          <a:p/>
+          <a:p>
+            <a:pPr/>
+            <a:endParaRPr/>
+          </a:p>
         </p:txBody>
       </p:sp>
       <p:sp>
@@ -27135,7 +27801,10 @@
         </p:spPr>
         <p:txBody>
           <a:bodyPr/>
-          <a:p/>
+          <a:p>
+            <a:pPr/>
+            <a:endParaRPr/>
+          </a:p>
         </p:txBody>
       </p:sp>
       <p:sp>
@@ -27161,7 +27830,10 @@
         </p:spPr>
         <p:txBody>
           <a:bodyPr/>
-          <a:p/>
+          <a:p>
+            <a:pPr/>
+            <a:endParaRPr/>
+          </a:p>
         </p:txBody>
       </p:sp>
       <p:sp>
@@ -27306,7 +27978,10 @@
         </p:spPr>
         <p:txBody>
           <a:bodyPr/>
-          <a:p/>
+          <a:p>
+            <a:pPr/>
+            <a:endParaRPr/>
+          </a:p>
         </p:txBody>
       </p:sp>
       <p:sp>
@@ -27332,7 +28007,10 @@
         </p:spPr>
         <p:txBody>
           <a:bodyPr/>
-          <a:p/>
+          <a:p>
+            <a:pPr/>
+            <a:endParaRPr/>
+          </a:p>
         </p:txBody>
       </p:sp>
       <p:sp>
@@ -27477,7 +28155,10 @@
         </p:spPr>
         <p:txBody>
           <a:bodyPr/>
-          <a:p/>
+          <a:p>
+            <a:pPr/>
+            <a:endParaRPr/>
+          </a:p>
         </p:txBody>
       </p:sp>
       <p:sp>
@@ -27503,7 +28184,10 @@
         </p:spPr>
         <p:txBody>
           <a:bodyPr/>
-          <a:p/>
+          <a:p>
+            <a:pPr/>
+            <a:endParaRPr/>
+          </a:p>
         </p:txBody>
       </p:sp>
       <p:sp>
@@ -27639,7 +28323,10 @@
         </p:spPr>
         <p:txBody>
           <a:bodyPr/>
-          <a:p/>
+          <a:p>
+            <a:pPr/>
+            <a:endParaRPr/>
+          </a:p>
         </p:txBody>
       </p:sp>
       <p:sp>
@@ -27742,7 +28429,10 @@
         </p:spPr>
         <p:txBody>
           <a:bodyPr/>
-          <a:p/>
+          <a:p>
+            <a:pPr/>
+            <a:endParaRPr/>
+          </a:p>
         </p:txBody>
       </p:sp>
       <p:sp>
@@ -27887,7 +28577,10 @@
         </p:spPr>
         <p:txBody>
           <a:bodyPr/>
-          <a:p/>
+          <a:p>
+            <a:pPr/>
+            <a:endParaRPr/>
+          </a:p>
         </p:txBody>
       </p:sp>
       <p:sp>
@@ -27913,7 +28606,10 @@
         </p:spPr>
         <p:txBody>
           <a:bodyPr/>
-          <a:p/>
+          <a:p>
+            <a:pPr/>
+            <a:endParaRPr/>
+          </a:p>
         </p:txBody>
       </p:sp>
       <p:sp>
@@ -28058,7 +28754,10 @@
         </p:spPr>
         <p:txBody>
           <a:bodyPr/>
-          <a:p/>
+          <a:p>
+            <a:pPr/>
+            <a:endParaRPr/>
+          </a:p>
         </p:txBody>
       </p:sp>
       <p:sp>
@@ -28084,7 +28783,10 @@
         </p:spPr>
         <p:txBody>
           <a:bodyPr/>
-          <a:p/>
+          <a:p>
+            <a:pPr/>
+            <a:endParaRPr/>
+          </a:p>
         </p:txBody>
       </p:sp>
       <p:sp>
@@ -28229,7 +28931,10 @@
         </p:spPr>
         <p:txBody>
           <a:bodyPr/>
-          <a:p/>
+          <a:p>
+            <a:pPr/>
+            <a:endParaRPr/>
+          </a:p>
         </p:txBody>
       </p:sp>
       <p:sp>
@@ -28255,7 +28960,10 @@
         </p:spPr>
         <p:txBody>
           <a:bodyPr/>
-          <a:p/>
+          <a:p>
+            <a:pPr/>
+            <a:endParaRPr/>
+          </a:p>
         </p:txBody>
       </p:sp>
       <p:sp>
@@ -28400,7 +29108,10 @@
         </p:spPr>
         <p:txBody>
           <a:bodyPr/>
-          <a:p/>
+          <a:p>
+            <a:pPr/>
+            <a:endParaRPr/>
+          </a:p>
         </p:txBody>
       </p:sp>
       <p:sp>
@@ -28426,7 +29137,10 @@
         </p:spPr>
         <p:txBody>
           <a:bodyPr/>
-          <a:p/>
+          <a:p>
+            <a:pPr/>
+            <a:endParaRPr/>
+          </a:p>
         </p:txBody>
       </p:sp>
       <p:sp>
@@ -28557,7 +29271,10 @@
         </p:spPr>
         <p:txBody>
           <a:bodyPr/>
-          <a:p/>
+          <a:p>
+            <a:pPr/>
+            <a:endParaRPr/>
+          </a:p>
         </p:txBody>
       </p:sp>
       <p:sp>
@@ -28645,7 +29362,10 @@
         </p:spPr>
         <p:txBody>
           <a:bodyPr/>
-          <a:p/>
+          <a:p>
+            <a:pPr/>
+            <a:endParaRPr/>
+          </a:p>
         </p:txBody>
       </p:sp>
       <p:sp>
@@ -28790,7 +29510,10 @@
         </p:spPr>
         <p:txBody>
           <a:bodyPr/>
-          <a:p/>
+          <a:p>
+            <a:pPr/>
+            <a:endParaRPr/>
+          </a:p>
         </p:txBody>
       </p:sp>
       <p:sp>
@@ -28816,7 +29539,10 @@
         </p:spPr>
         <p:txBody>
           <a:bodyPr/>
-          <a:p/>
+          <a:p>
+            <a:pPr/>
+            <a:endParaRPr/>
+          </a:p>
         </p:txBody>
       </p:sp>
       <p:sp>
@@ -28961,7 +29687,10 @@
         </p:spPr>
         <p:txBody>
           <a:bodyPr/>
-          <a:p/>
+          <a:p>
+            <a:pPr/>
+            <a:endParaRPr/>
+          </a:p>
         </p:txBody>
       </p:sp>
       <p:sp>
@@ -28987,7 +29716,10 @@
         </p:spPr>
         <p:txBody>
           <a:bodyPr/>
-          <a:p/>
+          <a:p>
+            <a:pPr/>
+            <a:endParaRPr/>
+          </a:p>
         </p:txBody>
       </p:sp>
       <p:sp>
@@ -29132,7 +29864,10 @@
         </p:spPr>
         <p:txBody>
           <a:bodyPr/>
-          <a:p/>
+          <a:p>
+            <a:pPr/>
+            <a:endParaRPr/>
+          </a:p>
         </p:txBody>
       </p:sp>
       <p:sp>
@@ -29158,7 +29893,10 @@
         </p:spPr>
         <p:txBody>
           <a:bodyPr/>
-          <a:p/>
+          <a:p>
+            <a:pPr/>
+            <a:endParaRPr/>
+          </a:p>
         </p:txBody>
       </p:sp>
       <p:sp>
@@ -29294,7 +30032,10 @@
         </p:spPr>
         <p:txBody>
           <a:bodyPr/>
-          <a:p/>
+          <a:p>
+            <a:pPr/>
+            <a:endParaRPr/>
+          </a:p>
         </p:txBody>
       </p:sp>
       <p:sp>
@@ -29375,7 +30116,10 @@
         </p:spPr>
         <p:txBody>
           <a:bodyPr/>
-          <a:p/>
+          <a:p>
+            <a:pPr/>
+            <a:endParaRPr/>
+          </a:p>
         </p:txBody>
       </p:sp>
       <p:sp>
@@ -29415,7 +30159,10 @@
         </p:spPr>
         <p:txBody>
           <a:bodyPr/>
-          <a:p/>
+          <a:p>
+            <a:pPr/>
+            <a:endParaRPr/>
+          </a:p>
         </p:txBody>
       </p:sp>
       <p:sp>
@@ -29533,7 +30280,7 @@
   <p:cSld>
     <p:spTree>
       <p:nvGrpSpPr>
-        <p:cNvPr id="786" name="" descr="&lt;Slide style={{ background: '#FFFFFF', padding: 0 }}&gt;&#10;  &lt;Box style={{ height: 72, background: '#1E4FA8', padding: '0 40px', flexDirection: 'row', alignItems: 'center', justifyContent: 'space-between' }}&gt;&#10;    &lt;Text style={{ fontSize: 15, color: '#B9CDF0', letterSpacing: 1 }}&gt;ISAD · INFORMATION SYSTEMS ANALYSIS &amp;amp; DESIGN&lt;/Text&gt;&#10;    &lt;Text style={{ fontSize: 15, color: '#B9CDF0' }}&gt;W01 · INTRODUCTION&lt;/Text&gt;&#10;  &lt;/Box&gt;&#10;  &lt;Box style={{ padding: '24px 40px 0 40px' }}&gt;&#10;    &lt;Text style={{ fontSize: 34, fontWeight: 'bold', color: '#0E3F8C' }}&gt;The Running Project: CampusBites&lt;/Text&gt;&#10;  &lt;/Box&gt;&#10;  &lt;Box style={{ flex: 1, padding: '18px 40px 0 40px', flexDirection: 'row', gap: 30 }}&gt;&#10;    &lt;Box style={{ flex: 3, justifyContent: 'center', alignItems: 'center' }}&gt;&#10;      &lt;svg width={460} height={400} viewBox='0 0 460 400'&gt;&#10;        &lt;line x1='90' y1='91' x2='200' y2='172' stroke='#D6DCE5' strokeWidth='2' /&gt;&#10;        &lt;line x1='370' y1='91' x2='260' y2='172' stroke='#D6DCE5' strokeWidth='2' /&gt;&#10;        &lt;line x1='90' y1='309' x2='200' y2='228' stroke='#D6DCE5' strokeWidth='2' /&gt;&#10;        &lt;line x1='370' y1='309' x2='260' y2='228' stroke='#D6DCE5' strokeWidth='2' /&gt;&#10;        &lt;rect x='180' y='160' width='100' height='80' rx='12' fill='#1E4FA8' /&gt;&#10;        &lt;text x='230' y='196' textAnchor='middle' fill='#FFFFFF' fontSize='17' fontWeight='bold'&gt;CampusBites&lt;/text&gt;&#10;        &lt;text x='230' y='218' textAnchor='middle' fill='#B9CDF0' fontSize='13'&gt;platform&lt;/text&gt;&#10;        &lt;rect x='30' y='35' width='120' height='56' rx='10' fill='#E8EFF8' stroke='#3D7BD9' strokeWidth='2' /&gt;&#10;        &lt;text x='90' y='58' textAnchor='middle' fill='#0E3F8C' fontSize='16' fontWeight='bold'&gt;Student&lt;/text&gt;&#10;        &lt;text x='90' y='78' textAnchor='middle' fill='#4A5568' fontSize='13'&gt;customer&lt;/text&gt;&#10;        &lt;rect x='310' y='35' width='120' height='56' rx='10' fill='#E8EFF8' stroke='#3D7BD9' strokeWidth='2' /&gt;&#10;        &lt;text x='370' y='58' textAnchor='middle' fill='#0E3F8C' fontSize='16' fontWeight='bold'&gt;Restaurant&lt;/text&gt;&#10;        &lt;text x='370' y='78' textAnchor='middle' fill='#4A5568' fontSize='13'&gt;vendor&lt;/text&gt;&#10;        &lt;rect x='30' y='289' width='120' height='56' rx='10' fill='#E8EFF8' stroke='#3D7BD9' strokeWidth='2' /&gt;&#10;        &lt;text x='90' y='312' textAnchor='middle' fill='#0E3F8C' fontSize='16' fontWeight='bold'&gt;Courier&lt;/text&gt;&#10;        &lt;text x='90' y='332' textAnchor='middle' fill='#4A5568' fontSize='13'&gt;rider&lt;/text&gt;&#10;        &lt;rect x='310' y='289' width='120' height='56' rx='10' fill='#E8EFF8' stroke='#3D7BD9' strokeWidth='2' /&gt;&#10;        &lt;text x='370' y='312' textAnchor='middle' fill='#0E3F8C' fontSize='16' fontWeight='bold'&gt;Payment&lt;/text&gt;&#10;        &lt;text x='370' y='332' textAnchor='middle' fill='#4A5568' fontSize='13'&gt;service&lt;/text&gt;&#10;      &lt;/svg&gt;&#10;    &lt;/Box&gt;&#10;    &lt;Box style={{ flex: 2, flexDirection: 'column', gap: 14, justifyContent: 'center' }}&gt;&#10;      &lt;Text style={{ fontSize: 20, color: '#4A5568', lineHeight: 1.5 }}&gt;A campus &lt;span style={{ fontWeight: 'bold', color: '#1A2230' }}&gt;food ordering &amp;amp; delivery&lt;/span&gt; platform you will analyse and design for 16 weeks.&lt;/Text&gt;&#10;      &lt;Box style={{ padding: '16px 18px', background: '#F7F9FC', borderRadius: 10, border: '1px solid #E5E7EB', flexDirection: 'column', gap: 8 }}&gt;&#10;        &lt;Text style={{ fontSize: 15, fontWeight: 'bold', color: '#0E3F8C' }}&gt;Why this domain? It is pattern-rich&lt;/Text&gt;&#10;        &lt;Text style={{ fontSize: 14, color: '#4A5568', lineHeight: 1.55 }}&gt;Order lifecycle → &lt;span style={{ fontWeight: 'bold' }}&gt;State&lt;/span&gt; · Payment → &lt;span style={{ fontWeight: 'bold' }}&gt;Strategy&lt;/span&gt; · Order tracking → &lt;span style={{ fontWeight: 'bold' }}&gt;Observer&lt;/span&gt; · Campus card → &lt;span style={{ fontWeight: 'bold' }}&gt;Adapter&lt;/span&gt; · Toppings → &lt;span style={{ fontWeight: 'bold' }}&gt;Decorator&lt;/span&gt;&lt;/Text&gt;&#10;      &lt;/Box&gt;&#10;      &lt;Box style={{ flexDirection: 'row', alignItems: 'center', gap: 12 }}&gt;&#10;        &lt;FAIcon name='users' style={{ fill: '#1E4FA8', width: 24, height: 24 }} /&gt;&#10;        &lt;Text style={{ fontSize: 16, color: '#1A2230' }}&gt;One team of four — &lt;span style={{ fontWeight: 'bold' }}&gt;small cohort, everyone counts&lt;/span&gt;&lt;/Text&gt;&#10;      &lt;/Box&gt;&#10;    &lt;/Box&gt;&#10;  &lt;/Box&gt;&#10;  &lt;Box style={{ height: 40, padding: '0 40px', flexDirection: 'row', alignItems: 'center', justifyContent: 'space-between' }}&gt;&#10;    &lt;Text style={{ fontSize: 13, color: '#8B97A8' }}&gt;ISAD · Fall 2026&lt;/Text&gt;&#10;    &lt;Text style={{ fontSize: 14, color: '#1E4FA8', fontWeight: 'bold' }}&gt;07 / 38&lt;/Text&gt;&#10;  &lt;/Box&gt;&#10;&lt;/Slide&gt;"/>
+        <p:cNvPr id="786" name=""/>
         <p:cNvGrpSpPr/>
         <p:nvPr/>
       </p:nvGrpSpPr>
@@ -29566,7 +30313,10 @@
         </p:spPr>
         <p:txBody>
           <a:bodyPr/>
-          <a:p/>
+          <a:p>
+            <a:pPr/>
+            <a:endParaRPr/>
+          </a:p>
         </p:txBody>
       </p:sp>
       <p:sp>
@@ -29590,7 +30340,10 @@
         </p:spPr>
         <p:txBody>
           <a:bodyPr/>
-          <a:p/>
+          <a:p>
+            <a:pPr/>
+            <a:endParaRPr/>
+          </a:p>
         </p:txBody>
       </p:sp>
       <p:sp>
@@ -29814,7 +30567,10 @@
         </p:spPr>
         <p:txBody>
           <a:bodyPr/>
-          <a:p/>
+          <a:p>
+            <a:pPr/>
+            <a:endParaRPr/>
+          </a:p>
         </p:txBody>
       </p:sp>
       <p:sp>
@@ -30135,7 +30891,7 @@
   <p:cSld>
     <p:spTree>
       <p:nvGrpSpPr>
-        <p:cNvPr id="801" name="" descr="&lt;Slide style={{ background: '#0E3F8C', padding: 0 }}&gt;&#10;  &lt;Box style={{ flexDirection: 'row', height: '100%', position: 'relative' }}&gt;&#10;    &lt;Box style={{ position: 'absolute', top: 0, left: 0, right: 0, height: 8, background: '#1E4FA8' }} /&gt;&#10;    &lt;Box style={{ width: 300, justifyContent: 'center', alignItems: 'center', borderRight: '1px solid #2B5793' }}&gt;&#10;      &lt;Text style={{ fontSize: 220, fontWeight: 'bold', color: '#3D7BD9', fontFamily: 'Georgia, serif', lineHeight: 1 }}&gt;02&lt;/Text&gt;&#10;    &lt;/Box&gt;&#10;    &lt;Box style={{ flex: 1, padding: '70px 64px', flexDirection: 'column', justifyContent: 'center' }}&gt;&#10;      &lt;Text style={{ fontSize: 15, color: '#7FA2D6', letterSpacing: 2, marginBottom: 18 }}&gt;PART 1 · LECTURE&lt;/Text&gt;&#10;      &lt;Text style={{ fontSize: 48, fontWeight: 'bold', color: '#FFFFFF', lineHeight: 1.18 }}&gt;What Is an&lt;br /&gt;Information System?&lt;/Text&gt;&#10;      &lt;Box style={{ width: 64, height: 4, background: '#FFC107', marginTop: 26, marginBottom: 26 }} /&gt;&#10;      &lt;Box style={{ flexDirection: 'column', gap: 12 }}&gt;&#10;        {[&#10;          'A definition beyond just software',&#10;          'The four elements: people, process, data, technology',&#10;          'Why information systems fail — and who fixes them',&#10;        ].map((t) =&gt; (&#10;          &lt;Box key={t} style={{ flexDirection: 'row', alignItems: 'center', gap: 12 }}&gt;&#10;            &lt;Box style={{ width: 8, height: 8, borderRadius: 4, background: '#3D7BD9' }} /&gt;&#10;            &lt;Text style={{ fontSize: 20, color: '#C5D4EA' }}&gt;{t}&lt;/Text&gt;&#10;          &lt;/Box&gt;&#10;        ))}&#10;      &lt;/Box&gt;&#10;    &lt;/Box&gt;&#10;  &lt;/Box&gt;&#10;&lt;/Slide&gt;"/>
+        <p:cNvPr id="801" name=""/>
         <p:cNvGrpSpPr/>
         <p:nvPr/>
       </p:nvGrpSpPr>
@@ -30168,7 +30924,10 @@
         </p:spPr>
         <p:txBody>
           <a:bodyPr/>
-          <a:p/>
+          <a:p>
+            <a:pPr/>
+            <a:endParaRPr/>
+          </a:p>
         </p:txBody>
       </p:sp>
       <p:sp>
@@ -30208,7 +30967,10 @@
         </p:spPr>
         <p:txBody>
           <a:bodyPr/>
-          <a:p/>
+          <a:p>
+            <a:pPr/>
+            <a:endParaRPr/>
+          </a:p>
         </p:txBody>
       </p:sp>
       <p:sp>
@@ -30355,7 +31117,10 @@
         </p:spPr>
         <p:txBody>
           <a:bodyPr/>
-          <a:p/>
+          <a:p>
+            <a:pPr/>
+            <a:endParaRPr/>
+          </a:p>
         </p:txBody>
       </p:sp>
       <p:sp>
@@ -30381,7 +31146,10 @@
         </p:spPr>
         <p:txBody>
           <a:bodyPr/>
-          <a:p/>
+          <a:p>
+            <a:pPr/>
+            <a:endParaRPr/>
+          </a:p>
         </p:txBody>
       </p:sp>
       <p:sp>
@@ -30442,7 +31210,10 @@
         </p:spPr>
         <p:txBody>
           <a:bodyPr/>
-          <a:p/>
+          <a:p>
+            <a:pPr/>
+            <a:endParaRPr/>
+          </a:p>
         </p:txBody>
       </p:sp>
       <p:sp>
@@ -30503,7 +31274,10 @@
         </p:spPr>
         <p:txBody>
           <a:bodyPr/>
-          <a:p/>
+          <a:p>
+            <a:pPr/>
+            <a:endParaRPr/>
+          </a:p>
         </p:txBody>
       </p:sp>
       <p:sp>
@@ -30562,7 +31336,10 @@
         </p:spPr>
         <p:txBody>
           <a:bodyPr/>
-          <a:p/>
+          <a:p>
+            <a:pPr/>
+            <a:endParaRPr/>
+          </a:p>
         </p:txBody>
       </p:sp>
     </p:spTree>
@@ -30575,7 +31352,7 @@
   <p:cSld>
     <p:spTree>
       <p:nvGrpSpPr>
-        <p:cNvPr id="815" name="" descr="&lt;Slide style={{ background: '#FFFFFF', padding: 0 }}&gt;&#10;  &lt;Box style={{ height: 72, background: '#1E4FA8', padding: '0 40px', flexDirection: 'row', alignItems: 'center', justifyContent: 'space-between' }}&gt;&#10;    &lt;Text style={{ fontSize: 15, color: '#B9CDF0', letterSpacing: 1 }}&gt;ISAD · INFORMATION SYSTEMS ANALYSIS &amp;amp; DESIGN&lt;/Text&gt;&#10;    &lt;Text style={{ fontSize: 15, color: '#B9CDF0' }}&gt;W01 · INTRODUCTION&lt;/Text&gt;&#10;  &lt;/Box&gt;&#10;  &lt;Box style={{ padding: '24px 40px 0 40px' }}&gt;&#10;    &lt;Text style={{ fontSize: 34, fontWeight: 'bold', color: '#0E3F8C' }}&gt;Defining an Information System&lt;/Text&gt;&#10;  &lt;/Box&gt;&#10;  &lt;Box style={{ flex: 1, padding: '18px 40px 0 40px', flexDirection: 'row', gap: 28 }}&gt;&#10;    &lt;Box style={{ width: 320, padding: '28px 24px', background: '#0E3F8C', borderRadius: 12, flexDirection: 'column', justifyContent: 'center', gap: 16 }}&gt;&#10;      &lt;FAIcon name='info-circle' style={{ fill: '#FFC107', width: 40, height: 40 }} /&gt;&#10;      &lt;Text style={{ fontSize: 26, fontWeight: 'bold', color: '#FFFFFF', lineHeight: 1.3 }}&gt;Definition&lt;/Text&gt;&#10;      &lt;Text style={{ fontSize: 17, color: '#C5D4EA', lineHeight: 1.55 }}&gt;An organised combination of people, process, data and technology that collects, processes, stores and distributes information to support a goal.&lt;/Text&gt;&#10;    &lt;/Box&gt;&#10;    &lt;Box style={{ flex: 1, flexDirection: 'column', gap: 16, justifyContent: 'center' }}&gt;&#10;      {[&#10;        ['It is more than software', 'Software is one part. The system also lives in how people work and how information flows.'],&#10;        ['It has a purpose', 'Every information system exists to support a decision or an activity — ordering food, enrolling, booking a room.'],&#10;        ['It transforms data into information', 'Raw data (a list of orders) becomes information (a delivery route for a courier) through processing.'],&#10;      ].map(([t, d]) =&gt; (&#10;        &lt;Box key={t} style={{ flexDirection: 'row', gap: 14, padding: '16px 18px', background: '#F7F9FC', borderRadius: 10, border: '1px solid #E5E7EB', alignItems: 'flex-start' }}&gt;&#10;          &lt;FAIcon name='check-circle' style={{ fill: '#1E4FA8', width: 24, height: 24 }} /&gt;&#10;          &lt;Box style={{ flexDirection: 'column', gap: 4 }}&gt;&#10;            &lt;Text style={{ fontSize: 19, fontWeight: 'bold', color: '#1A2230' }}&gt;{t}&lt;/Text&gt;&#10;            &lt;Text style={{ fontSize: 15, color: '#4A5568', lineHeight: 1.5 }}&gt;{d}&lt;/Text&gt;&#10;          &lt;/Box&gt;&#10;        &lt;/Box&gt;&#10;      ))}&#10;    &lt;/Box&gt;&#10;  &lt;/Box&gt;&#10;  &lt;Box style={{ height: 40, padding: '0 40px', flexDirection: 'row', alignItems: 'center', justifyContent: 'space-between' }}&gt;&#10;    &lt;Text style={{ fontSize: 13, color: '#8B97A8' }}&gt;ISAD · Fall 2026&lt;/Text&gt;&#10;    &lt;Text style={{ fontSize: 14, color: '#1E4FA8', fontWeight: 'bold' }}&gt;09 / 38&lt;/Text&gt;&#10;  &lt;/Box&gt;&#10;&lt;/Slide&gt;"/>
+        <p:cNvPr id="815" name=""/>
         <p:cNvGrpSpPr/>
         <p:nvPr/>
       </p:nvGrpSpPr>
@@ -30608,7 +31385,10 @@
         </p:spPr>
         <p:txBody>
           <a:bodyPr/>
-          <a:p/>
+          <a:p>
+            <a:pPr/>
+            <a:endParaRPr/>
+          </a:p>
         </p:txBody>
       </p:sp>
       <p:sp>
@@ -30632,7 +31412,10 @@
         </p:spPr>
         <p:txBody>
           <a:bodyPr/>
-          <a:p/>
+          <a:p>
+            <a:pPr/>
+            <a:endParaRPr/>
+          </a:p>
         </p:txBody>
       </p:sp>
       <p:sp>
@@ -30763,7 +31546,10 @@
         </p:spPr>
         <p:txBody>
           <a:bodyPr/>
-          <a:p/>
+          <a:p>
+            <a:pPr/>
+            <a:endParaRPr/>
+          </a:p>
         </p:txBody>
       </p:sp>
       <p:pic>
@@ -30897,7 +31683,10 @@
         </p:spPr>
         <p:txBody>
           <a:bodyPr/>
-          <a:p/>
+          <a:p>
+            <a:pPr/>
+            <a:endParaRPr/>
+          </a:p>
         </p:txBody>
       </p:sp>
       <p:pic>
@@ -31029,7 +31818,10 @@
         </p:spPr>
         <p:txBody>
           <a:bodyPr/>
-          <a:p/>
+          <a:p>
+            <a:pPr/>
+            <a:endParaRPr/>
+          </a:p>
         </p:txBody>
       </p:sp>
       <p:pic>
@@ -31161,7 +31953,10 @@
         </p:spPr>
         <p:txBody>
           <a:bodyPr/>
-          <a:p/>
+          <a:p>
+            <a:pPr/>
+            <a:endParaRPr/>
+          </a:p>
         </p:txBody>
       </p:sp>
       <p:pic>
